--- a/docs/claude-code-deck/claude-code-summary.pptx
+++ b/docs/claude-code-deck/claude-code-summary.pptx
@@ -1836,7 +1836,7 @@
     <p:bg>
       <p:bgPr>
         <a:solidFill>
-          <a:srgbClr val="12151C"/>
+          <a:srgbClr val="0A0D14"/>
         </a:solidFill>
       </p:bgPr>
     </p:bg>
@@ -1856,7 +1856,757 @@
       </p:grpSpPr>
       <p:sp>
         <p:nvSpPr>
-          <p:cNvPr id="2" name="Text 0"/>
+          <p:cNvPr id="2" name="Shape 0"/>
+          <p:cNvSpPr/>
+          <p:nvPr/>
+        </p:nvSpPr>
+        <p:spPr>
+          <a:xfrm>
+            <a:off x="7772400" y="5394960"/>
+            <a:ext cx="41148" cy="41148"/>
+          </a:xfrm>
+          <a:prstGeom prst="ellipse">
+            <a:avLst/>
+          </a:prstGeom>
+          <a:solidFill>
+            <a:srgbClr val="27324A"/>
+          </a:solidFill>
+          <a:ln w="12700">
+            <a:solidFill>
+              <a:srgbClr val="27324A"/>
+            </a:solidFill>
+            <a:prstDash val="solid"/>
+          </a:ln>
+        </p:spPr>
+      </p:sp>
+      <p:sp>
+        <p:nvSpPr>
+          <p:cNvPr id="3" name="Shape 1"/>
+          <p:cNvSpPr/>
+          <p:nvPr/>
+        </p:nvSpPr>
+        <p:spPr>
+          <a:xfrm>
+            <a:off x="7772400" y="5815584"/>
+            <a:ext cx="41148" cy="41148"/>
+          </a:xfrm>
+          <a:prstGeom prst="ellipse">
+            <a:avLst/>
+          </a:prstGeom>
+          <a:solidFill>
+            <a:srgbClr val="27324A"/>
+          </a:solidFill>
+          <a:ln w="12700">
+            <a:solidFill>
+              <a:srgbClr val="27324A"/>
+            </a:solidFill>
+            <a:prstDash val="solid"/>
+          </a:ln>
+        </p:spPr>
+      </p:sp>
+      <p:sp>
+        <p:nvSpPr>
+          <p:cNvPr id="4" name="Shape 2"/>
+          <p:cNvSpPr/>
+          <p:nvPr/>
+        </p:nvSpPr>
+        <p:spPr>
+          <a:xfrm>
+            <a:off x="7772400" y="6236208"/>
+            <a:ext cx="41148" cy="41148"/>
+          </a:xfrm>
+          <a:prstGeom prst="ellipse">
+            <a:avLst/>
+          </a:prstGeom>
+          <a:solidFill>
+            <a:srgbClr val="27324A"/>
+          </a:solidFill>
+          <a:ln w="12700">
+            <a:solidFill>
+              <a:srgbClr val="27324A"/>
+            </a:solidFill>
+            <a:prstDash val="solid"/>
+          </a:ln>
+        </p:spPr>
+      </p:sp>
+      <p:sp>
+        <p:nvSpPr>
+          <p:cNvPr id="5" name="Shape 3"/>
+          <p:cNvSpPr/>
+          <p:nvPr/>
+        </p:nvSpPr>
+        <p:spPr>
+          <a:xfrm>
+            <a:off x="8193024" y="5394960"/>
+            <a:ext cx="41148" cy="41148"/>
+          </a:xfrm>
+          <a:prstGeom prst="ellipse">
+            <a:avLst/>
+          </a:prstGeom>
+          <a:solidFill>
+            <a:srgbClr val="27324A"/>
+          </a:solidFill>
+          <a:ln w="12700">
+            <a:solidFill>
+              <a:srgbClr val="27324A"/>
+            </a:solidFill>
+            <a:prstDash val="solid"/>
+          </a:ln>
+        </p:spPr>
+      </p:sp>
+      <p:sp>
+        <p:nvSpPr>
+          <p:cNvPr id="6" name="Shape 4"/>
+          <p:cNvSpPr/>
+          <p:nvPr/>
+        </p:nvSpPr>
+        <p:spPr>
+          <a:xfrm>
+            <a:off x="8193024" y="5815584"/>
+            <a:ext cx="41148" cy="41148"/>
+          </a:xfrm>
+          <a:prstGeom prst="ellipse">
+            <a:avLst/>
+          </a:prstGeom>
+          <a:solidFill>
+            <a:srgbClr val="27324A"/>
+          </a:solidFill>
+          <a:ln w="12700">
+            <a:solidFill>
+              <a:srgbClr val="27324A"/>
+            </a:solidFill>
+            <a:prstDash val="solid"/>
+          </a:ln>
+        </p:spPr>
+      </p:sp>
+      <p:sp>
+        <p:nvSpPr>
+          <p:cNvPr id="7" name="Shape 5"/>
+          <p:cNvSpPr/>
+          <p:nvPr/>
+        </p:nvSpPr>
+        <p:spPr>
+          <a:xfrm>
+            <a:off x="8193024" y="6236208"/>
+            <a:ext cx="41148" cy="41148"/>
+          </a:xfrm>
+          <a:prstGeom prst="ellipse">
+            <a:avLst/>
+          </a:prstGeom>
+          <a:solidFill>
+            <a:srgbClr val="27324A"/>
+          </a:solidFill>
+          <a:ln w="12700">
+            <a:solidFill>
+              <a:srgbClr val="27324A"/>
+            </a:solidFill>
+            <a:prstDash val="solid"/>
+          </a:ln>
+        </p:spPr>
+      </p:sp>
+      <p:sp>
+        <p:nvSpPr>
+          <p:cNvPr id="8" name="Shape 6"/>
+          <p:cNvSpPr/>
+          <p:nvPr/>
+        </p:nvSpPr>
+        <p:spPr>
+          <a:xfrm>
+            <a:off x="8613648" y="5394960"/>
+            <a:ext cx="41148" cy="41148"/>
+          </a:xfrm>
+          <a:prstGeom prst="ellipse">
+            <a:avLst/>
+          </a:prstGeom>
+          <a:solidFill>
+            <a:srgbClr val="27324A"/>
+          </a:solidFill>
+          <a:ln w="12700">
+            <a:solidFill>
+              <a:srgbClr val="27324A"/>
+            </a:solidFill>
+            <a:prstDash val="solid"/>
+          </a:ln>
+        </p:spPr>
+      </p:sp>
+      <p:sp>
+        <p:nvSpPr>
+          <p:cNvPr id="9" name="Shape 7"/>
+          <p:cNvSpPr/>
+          <p:nvPr/>
+        </p:nvSpPr>
+        <p:spPr>
+          <a:xfrm>
+            <a:off x="8613648" y="5815584"/>
+            <a:ext cx="41148" cy="41148"/>
+          </a:xfrm>
+          <a:prstGeom prst="ellipse">
+            <a:avLst/>
+          </a:prstGeom>
+          <a:solidFill>
+            <a:srgbClr val="27324A"/>
+          </a:solidFill>
+          <a:ln w="12700">
+            <a:solidFill>
+              <a:srgbClr val="27324A"/>
+            </a:solidFill>
+            <a:prstDash val="solid"/>
+          </a:ln>
+        </p:spPr>
+      </p:sp>
+      <p:sp>
+        <p:nvSpPr>
+          <p:cNvPr id="10" name="Shape 8"/>
+          <p:cNvSpPr/>
+          <p:nvPr/>
+        </p:nvSpPr>
+        <p:spPr>
+          <a:xfrm>
+            <a:off x="8613648" y="6236208"/>
+            <a:ext cx="41148" cy="41148"/>
+          </a:xfrm>
+          <a:prstGeom prst="ellipse">
+            <a:avLst/>
+          </a:prstGeom>
+          <a:solidFill>
+            <a:srgbClr val="27324A"/>
+          </a:solidFill>
+          <a:ln w="12700">
+            <a:solidFill>
+              <a:srgbClr val="27324A"/>
+            </a:solidFill>
+            <a:prstDash val="solid"/>
+          </a:ln>
+        </p:spPr>
+      </p:sp>
+      <p:sp>
+        <p:nvSpPr>
+          <p:cNvPr id="11" name="Shape 9"/>
+          <p:cNvSpPr/>
+          <p:nvPr/>
+        </p:nvSpPr>
+        <p:spPr>
+          <a:xfrm>
+            <a:off x="9034272" y="5394960"/>
+            <a:ext cx="41148" cy="41148"/>
+          </a:xfrm>
+          <a:prstGeom prst="ellipse">
+            <a:avLst/>
+          </a:prstGeom>
+          <a:solidFill>
+            <a:srgbClr val="27324A"/>
+          </a:solidFill>
+          <a:ln w="12700">
+            <a:solidFill>
+              <a:srgbClr val="27324A"/>
+            </a:solidFill>
+            <a:prstDash val="solid"/>
+          </a:ln>
+        </p:spPr>
+      </p:sp>
+      <p:sp>
+        <p:nvSpPr>
+          <p:cNvPr id="12" name="Shape 10"/>
+          <p:cNvSpPr/>
+          <p:nvPr/>
+        </p:nvSpPr>
+        <p:spPr>
+          <a:xfrm>
+            <a:off x="9034272" y="5815584"/>
+            <a:ext cx="41148" cy="41148"/>
+          </a:xfrm>
+          <a:prstGeom prst="ellipse">
+            <a:avLst/>
+          </a:prstGeom>
+          <a:solidFill>
+            <a:srgbClr val="27324A"/>
+          </a:solidFill>
+          <a:ln w="12700">
+            <a:solidFill>
+              <a:srgbClr val="27324A"/>
+            </a:solidFill>
+            <a:prstDash val="solid"/>
+          </a:ln>
+        </p:spPr>
+      </p:sp>
+      <p:sp>
+        <p:nvSpPr>
+          <p:cNvPr id="13" name="Shape 11"/>
+          <p:cNvSpPr/>
+          <p:nvPr/>
+        </p:nvSpPr>
+        <p:spPr>
+          <a:xfrm>
+            <a:off x="9034272" y="6236208"/>
+            <a:ext cx="41148" cy="41148"/>
+          </a:xfrm>
+          <a:prstGeom prst="ellipse">
+            <a:avLst/>
+          </a:prstGeom>
+          <a:solidFill>
+            <a:srgbClr val="27324A"/>
+          </a:solidFill>
+          <a:ln w="12700">
+            <a:solidFill>
+              <a:srgbClr val="27324A"/>
+            </a:solidFill>
+            <a:prstDash val="solid"/>
+          </a:ln>
+        </p:spPr>
+      </p:sp>
+      <p:sp>
+        <p:nvSpPr>
+          <p:cNvPr id="14" name="Shape 12"/>
+          <p:cNvSpPr/>
+          <p:nvPr/>
+        </p:nvSpPr>
+        <p:spPr>
+          <a:xfrm>
+            <a:off x="9454896" y="5394960"/>
+            <a:ext cx="41148" cy="41148"/>
+          </a:xfrm>
+          <a:prstGeom prst="ellipse">
+            <a:avLst/>
+          </a:prstGeom>
+          <a:solidFill>
+            <a:srgbClr val="27324A"/>
+          </a:solidFill>
+          <a:ln w="12700">
+            <a:solidFill>
+              <a:srgbClr val="27324A"/>
+            </a:solidFill>
+            <a:prstDash val="solid"/>
+          </a:ln>
+        </p:spPr>
+      </p:sp>
+      <p:sp>
+        <p:nvSpPr>
+          <p:cNvPr id="15" name="Shape 13"/>
+          <p:cNvSpPr/>
+          <p:nvPr/>
+        </p:nvSpPr>
+        <p:spPr>
+          <a:xfrm>
+            <a:off x="9454896" y="5815584"/>
+            <a:ext cx="41148" cy="41148"/>
+          </a:xfrm>
+          <a:prstGeom prst="ellipse">
+            <a:avLst/>
+          </a:prstGeom>
+          <a:solidFill>
+            <a:srgbClr val="27324A"/>
+          </a:solidFill>
+          <a:ln w="12700">
+            <a:solidFill>
+              <a:srgbClr val="27324A"/>
+            </a:solidFill>
+            <a:prstDash val="solid"/>
+          </a:ln>
+        </p:spPr>
+      </p:sp>
+      <p:sp>
+        <p:nvSpPr>
+          <p:cNvPr id="16" name="Shape 14"/>
+          <p:cNvSpPr/>
+          <p:nvPr/>
+        </p:nvSpPr>
+        <p:spPr>
+          <a:xfrm>
+            <a:off x="9454896" y="6236208"/>
+            <a:ext cx="41148" cy="41148"/>
+          </a:xfrm>
+          <a:prstGeom prst="ellipse">
+            <a:avLst/>
+          </a:prstGeom>
+          <a:solidFill>
+            <a:srgbClr val="27324A"/>
+          </a:solidFill>
+          <a:ln w="12700">
+            <a:solidFill>
+              <a:srgbClr val="27324A"/>
+            </a:solidFill>
+            <a:prstDash val="solid"/>
+          </a:ln>
+        </p:spPr>
+      </p:sp>
+      <p:sp>
+        <p:nvSpPr>
+          <p:cNvPr id="17" name="Shape 15"/>
+          <p:cNvSpPr/>
+          <p:nvPr/>
+        </p:nvSpPr>
+        <p:spPr>
+          <a:xfrm>
+            <a:off x="9875520" y="5394960"/>
+            <a:ext cx="41148" cy="41148"/>
+          </a:xfrm>
+          <a:prstGeom prst="ellipse">
+            <a:avLst/>
+          </a:prstGeom>
+          <a:solidFill>
+            <a:srgbClr val="27324A"/>
+          </a:solidFill>
+          <a:ln w="12700">
+            <a:solidFill>
+              <a:srgbClr val="27324A"/>
+            </a:solidFill>
+            <a:prstDash val="solid"/>
+          </a:ln>
+        </p:spPr>
+      </p:sp>
+      <p:sp>
+        <p:nvSpPr>
+          <p:cNvPr id="18" name="Shape 16"/>
+          <p:cNvSpPr/>
+          <p:nvPr/>
+        </p:nvSpPr>
+        <p:spPr>
+          <a:xfrm>
+            <a:off x="9875520" y="5815584"/>
+            <a:ext cx="41148" cy="41148"/>
+          </a:xfrm>
+          <a:prstGeom prst="ellipse">
+            <a:avLst/>
+          </a:prstGeom>
+          <a:solidFill>
+            <a:srgbClr val="27324A"/>
+          </a:solidFill>
+          <a:ln w="12700">
+            <a:solidFill>
+              <a:srgbClr val="27324A"/>
+            </a:solidFill>
+            <a:prstDash val="solid"/>
+          </a:ln>
+        </p:spPr>
+      </p:sp>
+      <p:sp>
+        <p:nvSpPr>
+          <p:cNvPr id="19" name="Shape 17"/>
+          <p:cNvSpPr/>
+          <p:nvPr/>
+        </p:nvSpPr>
+        <p:spPr>
+          <a:xfrm>
+            <a:off x="9875520" y="6236208"/>
+            <a:ext cx="41148" cy="41148"/>
+          </a:xfrm>
+          <a:prstGeom prst="ellipse">
+            <a:avLst/>
+          </a:prstGeom>
+          <a:solidFill>
+            <a:srgbClr val="27324A"/>
+          </a:solidFill>
+          <a:ln w="12700">
+            <a:solidFill>
+              <a:srgbClr val="27324A"/>
+            </a:solidFill>
+            <a:prstDash val="solid"/>
+          </a:ln>
+        </p:spPr>
+      </p:sp>
+      <p:sp>
+        <p:nvSpPr>
+          <p:cNvPr id="20" name="Shape 18"/>
+          <p:cNvSpPr/>
+          <p:nvPr/>
+        </p:nvSpPr>
+        <p:spPr>
+          <a:xfrm>
+            <a:off x="10296144" y="5394960"/>
+            <a:ext cx="41148" cy="41148"/>
+          </a:xfrm>
+          <a:prstGeom prst="ellipse">
+            <a:avLst/>
+          </a:prstGeom>
+          <a:solidFill>
+            <a:srgbClr val="27324A"/>
+          </a:solidFill>
+          <a:ln w="12700">
+            <a:solidFill>
+              <a:srgbClr val="27324A"/>
+            </a:solidFill>
+            <a:prstDash val="solid"/>
+          </a:ln>
+        </p:spPr>
+      </p:sp>
+      <p:sp>
+        <p:nvSpPr>
+          <p:cNvPr id="21" name="Shape 19"/>
+          <p:cNvSpPr/>
+          <p:nvPr/>
+        </p:nvSpPr>
+        <p:spPr>
+          <a:xfrm>
+            <a:off x="10296144" y="5815584"/>
+            <a:ext cx="41148" cy="41148"/>
+          </a:xfrm>
+          <a:prstGeom prst="ellipse">
+            <a:avLst/>
+          </a:prstGeom>
+          <a:solidFill>
+            <a:srgbClr val="27324A"/>
+          </a:solidFill>
+          <a:ln w="12700">
+            <a:solidFill>
+              <a:srgbClr val="27324A"/>
+            </a:solidFill>
+            <a:prstDash val="solid"/>
+          </a:ln>
+        </p:spPr>
+      </p:sp>
+      <p:sp>
+        <p:nvSpPr>
+          <p:cNvPr id="22" name="Shape 20"/>
+          <p:cNvSpPr/>
+          <p:nvPr/>
+        </p:nvSpPr>
+        <p:spPr>
+          <a:xfrm>
+            <a:off x="10296144" y="6236208"/>
+            <a:ext cx="41148" cy="41148"/>
+          </a:xfrm>
+          <a:prstGeom prst="ellipse">
+            <a:avLst/>
+          </a:prstGeom>
+          <a:solidFill>
+            <a:srgbClr val="27324A"/>
+          </a:solidFill>
+          <a:ln w="12700">
+            <a:solidFill>
+              <a:srgbClr val="27324A"/>
+            </a:solidFill>
+            <a:prstDash val="solid"/>
+          </a:ln>
+        </p:spPr>
+      </p:sp>
+      <p:sp>
+        <p:nvSpPr>
+          <p:cNvPr id="23" name="Shape 21"/>
+          <p:cNvSpPr/>
+          <p:nvPr/>
+        </p:nvSpPr>
+        <p:spPr>
+          <a:xfrm>
+            <a:off x="10716768" y="5394960"/>
+            <a:ext cx="41148" cy="41148"/>
+          </a:xfrm>
+          <a:prstGeom prst="ellipse">
+            <a:avLst/>
+          </a:prstGeom>
+          <a:solidFill>
+            <a:srgbClr val="27324A"/>
+          </a:solidFill>
+          <a:ln w="12700">
+            <a:solidFill>
+              <a:srgbClr val="27324A"/>
+            </a:solidFill>
+            <a:prstDash val="solid"/>
+          </a:ln>
+        </p:spPr>
+      </p:sp>
+      <p:sp>
+        <p:nvSpPr>
+          <p:cNvPr id="24" name="Shape 22"/>
+          <p:cNvSpPr/>
+          <p:nvPr/>
+        </p:nvSpPr>
+        <p:spPr>
+          <a:xfrm>
+            <a:off x="10716768" y="5815584"/>
+            <a:ext cx="41148" cy="41148"/>
+          </a:xfrm>
+          <a:prstGeom prst="ellipse">
+            <a:avLst/>
+          </a:prstGeom>
+          <a:solidFill>
+            <a:srgbClr val="27324A"/>
+          </a:solidFill>
+          <a:ln w="12700">
+            <a:solidFill>
+              <a:srgbClr val="27324A"/>
+            </a:solidFill>
+            <a:prstDash val="solid"/>
+          </a:ln>
+        </p:spPr>
+      </p:sp>
+      <p:sp>
+        <p:nvSpPr>
+          <p:cNvPr id="25" name="Shape 23"/>
+          <p:cNvSpPr/>
+          <p:nvPr/>
+        </p:nvSpPr>
+        <p:spPr>
+          <a:xfrm>
+            <a:off x="10716768" y="6236208"/>
+            <a:ext cx="41148" cy="41148"/>
+          </a:xfrm>
+          <a:prstGeom prst="ellipse">
+            <a:avLst/>
+          </a:prstGeom>
+          <a:solidFill>
+            <a:srgbClr val="27324A"/>
+          </a:solidFill>
+          <a:ln w="12700">
+            <a:solidFill>
+              <a:srgbClr val="27324A"/>
+            </a:solidFill>
+            <a:prstDash val="solid"/>
+          </a:ln>
+        </p:spPr>
+      </p:sp>
+      <p:sp>
+        <p:nvSpPr>
+          <p:cNvPr id="26" name="Shape 24"/>
+          <p:cNvSpPr/>
+          <p:nvPr/>
+        </p:nvSpPr>
+        <p:spPr>
+          <a:xfrm>
+            <a:off x="11137392" y="5394960"/>
+            <a:ext cx="41148" cy="41148"/>
+          </a:xfrm>
+          <a:prstGeom prst="ellipse">
+            <a:avLst/>
+          </a:prstGeom>
+          <a:solidFill>
+            <a:srgbClr val="27324A"/>
+          </a:solidFill>
+          <a:ln w="12700">
+            <a:solidFill>
+              <a:srgbClr val="27324A"/>
+            </a:solidFill>
+            <a:prstDash val="solid"/>
+          </a:ln>
+        </p:spPr>
+      </p:sp>
+      <p:sp>
+        <p:nvSpPr>
+          <p:cNvPr id="27" name="Shape 25"/>
+          <p:cNvSpPr/>
+          <p:nvPr/>
+        </p:nvSpPr>
+        <p:spPr>
+          <a:xfrm>
+            <a:off x="11137392" y="5815584"/>
+            <a:ext cx="41148" cy="41148"/>
+          </a:xfrm>
+          <a:prstGeom prst="ellipse">
+            <a:avLst/>
+          </a:prstGeom>
+          <a:solidFill>
+            <a:srgbClr val="27324A"/>
+          </a:solidFill>
+          <a:ln w="12700">
+            <a:solidFill>
+              <a:srgbClr val="27324A"/>
+            </a:solidFill>
+            <a:prstDash val="solid"/>
+          </a:ln>
+        </p:spPr>
+      </p:sp>
+      <p:sp>
+        <p:nvSpPr>
+          <p:cNvPr id="28" name="Shape 26"/>
+          <p:cNvSpPr/>
+          <p:nvPr/>
+        </p:nvSpPr>
+        <p:spPr>
+          <a:xfrm>
+            <a:off x="11137392" y="6236208"/>
+            <a:ext cx="41148" cy="41148"/>
+          </a:xfrm>
+          <a:prstGeom prst="ellipse">
+            <a:avLst/>
+          </a:prstGeom>
+          <a:solidFill>
+            <a:srgbClr val="27324A"/>
+          </a:solidFill>
+          <a:ln w="12700">
+            <a:solidFill>
+              <a:srgbClr val="27324A"/>
+            </a:solidFill>
+            <a:prstDash val="solid"/>
+          </a:ln>
+        </p:spPr>
+      </p:sp>
+      <p:sp>
+        <p:nvSpPr>
+          <p:cNvPr id="29" name="Shape 27"/>
+          <p:cNvSpPr/>
+          <p:nvPr/>
+        </p:nvSpPr>
+        <p:spPr>
+          <a:xfrm>
+            <a:off x="11558016" y="5394960"/>
+            <a:ext cx="41148" cy="41148"/>
+          </a:xfrm>
+          <a:prstGeom prst="ellipse">
+            <a:avLst/>
+          </a:prstGeom>
+          <a:solidFill>
+            <a:srgbClr val="27324A"/>
+          </a:solidFill>
+          <a:ln w="12700">
+            <a:solidFill>
+              <a:srgbClr val="27324A"/>
+            </a:solidFill>
+            <a:prstDash val="solid"/>
+          </a:ln>
+        </p:spPr>
+      </p:sp>
+      <p:sp>
+        <p:nvSpPr>
+          <p:cNvPr id="30" name="Shape 28"/>
+          <p:cNvSpPr/>
+          <p:nvPr/>
+        </p:nvSpPr>
+        <p:spPr>
+          <a:xfrm>
+            <a:off x="11558016" y="5815584"/>
+            <a:ext cx="41148" cy="41148"/>
+          </a:xfrm>
+          <a:prstGeom prst="ellipse">
+            <a:avLst/>
+          </a:prstGeom>
+          <a:solidFill>
+            <a:srgbClr val="27324A"/>
+          </a:solidFill>
+          <a:ln w="12700">
+            <a:solidFill>
+              <a:srgbClr val="27324A"/>
+            </a:solidFill>
+            <a:prstDash val="solid"/>
+          </a:ln>
+        </p:spPr>
+      </p:sp>
+      <p:sp>
+        <p:nvSpPr>
+          <p:cNvPr id="31" name="Shape 29"/>
+          <p:cNvSpPr/>
+          <p:nvPr/>
+        </p:nvSpPr>
+        <p:spPr>
+          <a:xfrm>
+            <a:off x="11558016" y="6236208"/>
+            <a:ext cx="41148" cy="41148"/>
+          </a:xfrm>
+          <a:prstGeom prst="ellipse">
+            <a:avLst/>
+          </a:prstGeom>
+          <a:solidFill>
+            <a:srgbClr val="27324A"/>
+          </a:solidFill>
+          <a:ln w="12700">
+            <a:solidFill>
+              <a:srgbClr val="27324A"/>
+            </a:solidFill>
+            <a:prstDash val="solid"/>
+          </a:ln>
+        </p:spPr>
+      </p:sp>
+      <p:sp>
+        <p:nvSpPr>
+          <p:cNvPr id="32" name="Text 30"/>
           <p:cNvSpPr/>
           <p:nvPr/>
         </p:nvSpPr>
@@ -1881,7 +2631,7 @@
             <a:r>
               <a:rPr lang="en-US" sz="1300" b="1" spc="250" kern="0" dirty="0">
                 <a:solidFill>
-                  <a:srgbClr val="E2603C"/>
+                  <a:srgbClr val="3FE0C8"/>
                 </a:solidFill>
                 <a:latin typeface="Yu Gothic" pitchFamily="34" charset="0"/>
                 <a:ea typeface="Yu Gothic" pitchFamily="34" charset="-122"/>
@@ -1895,7 +2645,7 @@
       </p:sp>
       <p:sp>
         <p:nvSpPr>
-          <p:cNvPr id="3" name="Text 1"/>
+          <p:cNvPr id="33" name="Text 31"/>
           <p:cNvSpPr/>
           <p:nvPr/>
         </p:nvSpPr>
@@ -1957,7 +2707,7 @@
       </p:sp>
       <p:sp>
         <p:nvSpPr>
-          <p:cNvPr id="4" name="Text 2"/>
+          <p:cNvPr id="34" name="Text 32"/>
           <p:cNvSpPr/>
           <p:nvPr/>
         </p:nvSpPr>
@@ -1985,7 +2735,7 @@
             <a:r>
               <a:rPr lang="en-US" sz="1400" dirty="0">
                 <a:solidFill>
-                  <a:srgbClr val="9AA3B8"/>
+                  <a:srgbClr val="C4CDE0"/>
                 </a:solidFill>
                 <a:latin typeface="Yu Gothic" pitchFamily="34" charset="0"/>
                 <a:ea typeface="Yu Gothic" pitchFamily="34" charset="-122"/>
@@ -2005,7 +2755,7 @@
             <a:r>
               <a:rPr lang="en-US" sz="1400" dirty="0">
                 <a:solidFill>
-                  <a:srgbClr val="9AA3B8"/>
+                  <a:srgbClr val="C4CDE0"/>
                 </a:solidFill>
                 <a:latin typeface="Yu Gothic" pitchFamily="34" charset="0"/>
                 <a:ea typeface="Yu Gothic" pitchFamily="34" charset="-122"/>
@@ -2019,7 +2769,7 @@
       </p:sp>
       <p:sp>
         <p:nvSpPr>
-          <p:cNvPr id="5" name="Text 3"/>
+          <p:cNvPr id="35" name="Text 33"/>
           <p:cNvSpPr/>
           <p:nvPr/>
         </p:nvSpPr>
@@ -2044,7 +2794,7 @@
             <a:r>
               <a:rPr lang="en-US" sz="1200" spc="100" kern="0" dirty="0">
                 <a:solidFill>
-                  <a:srgbClr val="6E7891"/>
+                  <a:srgbClr val="8794AE"/>
                 </a:solidFill>
                 <a:latin typeface="Yu Gothic" pitchFamily="34" charset="0"/>
                 <a:ea typeface="Yu Gothic" pitchFamily="34" charset="-122"/>
@@ -2058,7 +2808,7 @@
       </p:sp>
       <p:sp>
         <p:nvSpPr>
-          <p:cNvPr id="6" name="Shape 4"/>
+          <p:cNvPr id="36" name="Shape 34"/>
           <p:cNvSpPr/>
           <p:nvPr/>
         </p:nvSpPr>
@@ -2069,30 +2819,23 @@
           </a:xfrm>
           <a:prstGeom prst="roundRect">
             <a:avLst>
-              <a:gd name="adj" fmla="val 2222"/>
+              <a:gd name="adj" fmla="val 1667"/>
             </a:avLst>
           </a:prstGeom>
           <a:solidFill>
-            <a:srgbClr val="1D2230"/>
+            <a:srgbClr val="182034"/>
           </a:solidFill>
           <a:ln w="12700">
             <a:solidFill>
-              <a:srgbClr val="1D2230"/>
+              <a:srgbClr val="2A6B62"/>
             </a:solidFill>
             <a:prstDash val="solid"/>
           </a:ln>
-          <a:effectLst>
-            <a:outerShdw sx="100000" sy="100000" kx="0" ky="0" algn="bl" rotWithShape="0" blurRad="177800" dist="38100" dir="5400000">
-              <a:srgbClr val="1A1F2C">
-                <a:alpha val="10000"/>
-              </a:srgbClr>
-            </a:outerShdw>
-          </a:effectLst>
-        </p:spPr>
-      </p:sp>
-      <p:sp>
-        <p:nvSpPr>
-          <p:cNvPr id="7" name="Shape 5"/>
+        </p:spPr>
+      </p:sp>
+      <p:sp>
+        <p:nvSpPr>
+          <p:cNvPr id="37" name="Shape 35"/>
           <p:cNvSpPr/>
           <p:nvPr/>
         </p:nvSpPr>
@@ -2112,7 +2855,7 @@
       </p:sp>
       <p:sp>
         <p:nvSpPr>
-          <p:cNvPr id="8" name="Shape 6"/>
+          <p:cNvPr id="38" name="Shape 36"/>
           <p:cNvSpPr/>
           <p:nvPr/>
         </p:nvSpPr>
@@ -2132,7 +2875,7 @@
       </p:sp>
       <p:sp>
         <p:nvSpPr>
-          <p:cNvPr id="9" name="Shape 7"/>
+          <p:cNvPr id="39" name="Shape 37"/>
           <p:cNvSpPr/>
           <p:nvPr/>
         </p:nvSpPr>
@@ -2145,14 +2888,14 @@
             <a:avLst/>
           </a:prstGeom>
           <a:solidFill>
-            <a:srgbClr val="63A87B"/>
-          </a:solidFill>
-          <a:ln/>
-        </p:spPr>
-      </p:sp>
-      <p:sp>
-        <p:nvSpPr>
-          <p:cNvPr id="10" name="Text 8"/>
+            <a:srgbClr val="3FE0C8"/>
+          </a:solidFill>
+          <a:ln/>
+        </p:spPr>
+      </p:sp>
+      <p:sp>
+        <p:nvSpPr>
+          <p:cNvPr id="40" name="Text 38"/>
           <p:cNvSpPr/>
           <p:nvPr/>
         </p:nvSpPr>
@@ -2180,7 +2923,7 @@
             <a:r>
               <a:rPr lang="en-US" sz="1300" dirty="0">
                 <a:solidFill>
-                  <a:srgbClr val="8C93A8"/>
+                  <a:srgbClr val="8794AE"/>
                 </a:solidFill>
                 <a:latin typeface="Yu Gothic" pitchFamily="34" charset="0"/>
                 <a:ea typeface="Yu Gothic" pitchFamily="34" charset="-122"/>
@@ -2258,7 +3001,7 @@
             <a:r>
               <a:rPr lang="en-US" sz="1300" dirty="0">
                 <a:solidFill>
-                  <a:srgbClr val="9DC7B4"/>
+                  <a:srgbClr val="3FE0C8"/>
                 </a:solidFill>
                 <a:latin typeface="Yu Gothic" pitchFamily="34" charset="0"/>
                 <a:ea typeface="Yu Gothic" pitchFamily="34" charset="-122"/>
@@ -2278,7 +3021,7 @@
             <a:r>
               <a:rPr lang="en-US" sz="1300" dirty="0">
                 <a:solidFill>
-                  <a:srgbClr val="9DC7B4"/>
+                  <a:srgbClr val="3FE0C8"/>
                 </a:solidFill>
                 <a:latin typeface="Yu Gothic" pitchFamily="34" charset="0"/>
                 <a:ea typeface="Yu Gothic" pitchFamily="34" charset="-122"/>
@@ -2298,7 +3041,7 @@
             <a:r>
               <a:rPr lang="en-US" sz="1300" dirty="0">
                 <a:solidFill>
-                  <a:srgbClr val="9DC7B4"/>
+                  <a:srgbClr val="3FE0C8"/>
                 </a:solidFill>
                 <a:latin typeface="Yu Gothic" pitchFamily="34" charset="0"/>
                 <a:ea typeface="Yu Gothic" pitchFamily="34" charset="-122"/>
@@ -2312,7 +3055,7 @@
       </p:sp>
       <p:sp>
         <p:nvSpPr>
-          <p:cNvPr id="11" name="Text 9"/>
+          <p:cNvPr id="41" name="Text 39"/>
           <p:cNvSpPr/>
           <p:nvPr/>
         </p:nvSpPr>
@@ -2337,7 +3080,7 @@
             <a:r>
               <a:rPr lang="en-US" sz="1200" i="1" dirty="0">
                 <a:solidFill>
-                  <a:srgbClr val="6E7891"/>
+                  <a:srgbClr val="8794AE"/>
                 </a:solidFill>
                 <a:latin typeface="Yu Gothic" pitchFamily="34" charset="0"/>
                 <a:ea typeface="Yu Gothic" pitchFamily="34" charset="-122"/>
@@ -2363,7 +3106,7 @@
     <p:bg>
       <p:bgPr>
         <a:solidFill>
-          <a:srgbClr val="FFFFFF"/>
+          <a:srgbClr val="0A0D14"/>
         </a:solidFill>
       </p:bgPr>
     </p:bg>
@@ -2389,16 +3132,23 @@
         </p:nvSpPr>
         <p:spPr>
           <a:xfrm>
-            <a:off x="685800" y="548640"/>
-            <a:ext cx="457200" cy="457200"/>
-          </a:xfrm>
-          <a:prstGeom prst="ellipse">
-            <a:avLst/>
-          </a:prstGeom>
-          <a:solidFill>
-            <a:srgbClr val="E2603C"/>
-          </a:solidFill>
-          <a:ln/>
+            <a:off x="685800" y="566928"/>
+            <a:ext cx="566928" cy="402336"/>
+          </a:xfrm>
+          <a:prstGeom prst="roundRect">
+            <a:avLst>
+              <a:gd name="adj" fmla="val 11364"/>
+            </a:avLst>
+          </a:prstGeom>
+          <a:solidFill>
+            <a:srgbClr val="0E2A2A"/>
+          </a:solidFill>
+          <a:ln w="12700">
+            <a:solidFill>
+              <a:srgbClr val="2A6B62"/>
+            </a:solidFill>
+            <a:prstDash val="solid"/>
+          </a:ln>
         </p:spPr>
       </p:sp>
       <p:sp>
@@ -2409,8 +3159,8 @@
         </p:nvSpPr>
         <p:spPr>
           <a:xfrm>
-            <a:off x="685800" y="548640"/>
-            <a:ext cx="457200" cy="457200"/>
+            <a:off x="685800" y="566928"/>
+            <a:ext cx="566928" cy="402336"/>
           </a:xfrm>
           <a:prstGeom prst="rect">
             <a:avLst/>
@@ -2426,17 +3176,17 @@
               <a:buNone/>
             </a:pPr>
             <a:r>
-              <a:rPr lang="en-US" sz="1500" b="1" dirty="0">
-                <a:solidFill>
-                  <a:srgbClr val="FFFFFF"/>
-                </a:solidFill>
-                <a:latin typeface="Yu Gothic" pitchFamily="34" charset="0"/>
-                <a:ea typeface="Yu Gothic" pitchFamily="34" charset="-122"/>
-                <a:cs typeface="Yu Gothic" pitchFamily="34" charset="-120"/>
+              <a:rPr lang="en-US" sz="1400" b="1" dirty="0">
+                <a:solidFill>
+                  <a:srgbClr val="3FE0C8"/>
+                </a:solidFill>
+                <a:latin typeface="Courier New" pitchFamily="34" charset="0"/>
+                <a:ea typeface="Courier New" pitchFamily="34" charset="-122"/>
+                <a:cs typeface="Courier New" pitchFamily="34" charset="-120"/>
               </a:rPr>
               <a:t>06</a:t>
             </a:r>
-            <a:endParaRPr lang="en-US" sz="1500" dirty="0"/>
+            <a:endParaRPr lang="en-US" sz="1400" dirty="0"/>
           </a:p>
         </p:txBody>
       </p:sp>
@@ -2448,8 +3198,8 @@
         </p:nvSpPr>
         <p:spPr>
           <a:xfrm>
-            <a:off x="1307592" y="548640"/>
-            <a:ext cx="7315200" cy="457200"/>
+            <a:off x="1417320" y="566928"/>
+            <a:ext cx="8229600" cy="402336"/>
           </a:xfrm>
           <a:prstGeom prst="rect">
             <a:avLst/>
@@ -2467,7 +3217,7 @@
             <a:r>
               <a:rPr lang="en-US" sz="1300" b="1" spc="150" kern="0" dirty="0">
                 <a:solidFill>
-                  <a:srgbClr val="6E7891"/>
+                  <a:srgbClr val="8794AE"/>
                 </a:solidFill>
                 <a:latin typeface="Yu Gothic" pitchFamily="34" charset="0"/>
                 <a:ea typeface="Yu Gothic" pitchFamily="34" charset="-122"/>
@@ -2509,7 +3259,7 @@
             <a:r>
               <a:rPr lang="en-US" sz="3300" b="1" dirty="0">
                 <a:solidFill>
-                  <a:srgbClr val="12151C"/>
+                  <a:srgbClr val="FFFFFF"/>
                 </a:solidFill>
                 <a:latin typeface="Yu Gothic" pitchFamily="34" charset="0"/>
                 <a:ea typeface="Yu Gothic" pitchFamily="34" charset="-122"/>
@@ -2534,15 +3284,15 @@
           </a:xfrm>
           <a:prstGeom prst="roundRect">
             <a:avLst>
-              <a:gd name="adj" fmla="val 5814"/>
+              <a:gd name="adj" fmla="val 3488"/>
             </a:avLst>
           </a:prstGeom>
           <a:solidFill>
-            <a:srgbClr val="F3F4F7"/>
+            <a:srgbClr val="121826"/>
           </a:solidFill>
           <a:ln w="12700">
             <a:solidFill>
-              <a:srgbClr val="E2E5EB"/>
+              <a:srgbClr val="232C42"/>
             </a:solidFill>
             <a:prstDash val="solid"/>
           </a:ln>
@@ -2575,7 +3325,7 @@
             <a:r>
               <a:rPr lang="en-US" sz="1700" b="1" dirty="0">
                 <a:solidFill>
-                  <a:srgbClr val="12151C"/>
+                  <a:srgbClr val="FFFFFF"/>
                 </a:solidFill>
                 <a:latin typeface="Yu Gothic" pitchFamily="34" charset="0"/>
                 <a:ea typeface="Yu Gothic" pitchFamily="34" charset="-122"/>
@@ -2617,7 +3367,7 @@
             <a:r>
               <a:rPr lang="en-US" sz="1250" dirty="0">
                 <a:solidFill>
-                  <a:srgbClr val="39435A"/>
+                  <a:srgbClr val="C4CDE0"/>
                 </a:solidFill>
                 <a:latin typeface="Yu Gothic" pitchFamily="34" charset="0"/>
                 <a:ea typeface="Yu Gothic" pitchFamily="34" charset="-122"/>
@@ -2642,15 +3392,15 @@
           </a:xfrm>
           <a:prstGeom prst="roundRect">
             <a:avLst>
-              <a:gd name="adj" fmla="val 5814"/>
+              <a:gd name="adj" fmla="val 3488"/>
             </a:avLst>
           </a:prstGeom>
           <a:solidFill>
-            <a:srgbClr val="F3F4F7"/>
+            <a:srgbClr val="121826"/>
           </a:solidFill>
           <a:ln w="12700">
             <a:solidFill>
-              <a:srgbClr val="E2E5EB"/>
+              <a:srgbClr val="232C42"/>
             </a:solidFill>
             <a:prstDash val="solid"/>
           </a:ln>
@@ -2683,7 +3433,7 @@
             <a:r>
               <a:rPr lang="en-US" sz="1700" b="1" dirty="0">
                 <a:solidFill>
-                  <a:srgbClr val="12151C"/>
+                  <a:srgbClr val="FFFFFF"/>
                 </a:solidFill>
                 <a:latin typeface="Yu Gothic" pitchFamily="34" charset="0"/>
                 <a:ea typeface="Yu Gothic" pitchFamily="34" charset="-122"/>
@@ -2725,7 +3475,7 @@
             <a:r>
               <a:rPr lang="en-US" sz="1250" dirty="0">
                 <a:solidFill>
-                  <a:srgbClr val="39435A"/>
+                  <a:srgbClr val="C4CDE0"/>
                 </a:solidFill>
                 <a:latin typeface="Yu Gothic" pitchFamily="34" charset="0"/>
                 <a:ea typeface="Yu Gothic" pitchFamily="34" charset="-122"/>
@@ -2750,15 +3500,15 @@
           </a:xfrm>
           <a:prstGeom prst="roundRect">
             <a:avLst>
-              <a:gd name="adj" fmla="val 5814"/>
+              <a:gd name="adj" fmla="val 3488"/>
             </a:avLst>
           </a:prstGeom>
           <a:solidFill>
-            <a:srgbClr val="FCEFE9"/>
+            <a:srgbClr val="0E2A2A"/>
           </a:solidFill>
           <a:ln w="12700">
             <a:solidFill>
-              <a:srgbClr val="F0C9B8"/>
+              <a:srgbClr val="2A6B62"/>
             </a:solidFill>
             <a:prstDash val="solid"/>
           </a:ln>
@@ -2791,7 +3541,7 @@
             <a:r>
               <a:rPr lang="en-US" sz="1700" b="1" dirty="0">
                 <a:solidFill>
-                  <a:srgbClr val="12151C"/>
+                  <a:srgbClr val="FFFFFF"/>
                 </a:solidFill>
                 <a:latin typeface="Yu Gothic" pitchFamily="34" charset="0"/>
                 <a:ea typeface="Yu Gothic" pitchFamily="34" charset="-122"/>
@@ -2833,7 +3583,7 @@
             <a:r>
               <a:rPr lang="en-US" sz="1250" dirty="0">
                 <a:solidFill>
-                  <a:srgbClr val="39435A"/>
+                  <a:srgbClr val="FFFFFF"/>
                 </a:solidFill>
                 <a:latin typeface="Yu Gothic" pitchFamily="34" charset="0"/>
                 <a:ea typeface="Yu Gothic" pitchFamily="34" charset="-122"/>
@@ -2858,15 +3608,15 @@
           </a:xfrm>
           <a:prstGeom prst="roundRect">
             <a:avLst>
-              <a:gd name="adj" fmla="val 5814"/>
+              <a:gd name="adj" fmla="val 3488"/>
             </a:avLst>
           </a:prstGeom>
           <a:solidFill>
-            <a:srgbClr val="FCEFE9"/>
+            <a:srgbClr val="0E2A2A"/>
           </a:solidFill>
           <a:ln w="12700">
             <a:solidFill>
-              <a:srgbClr val="F0C9B8"/>
+              <a:srgbClr val="2A6B62"/>
             </a:solidFill>
             <a:prstDash val="solid"/>
           </a:ln>
@@ -2899,7 +3649,7 @@
             <a:r>
               <a:rPr lang="en-US" sz="1700" b="1" dirty="0">
                 <a:solidFill>
-                  <a:srgbClr val="12151C"/>
+                  <a:srgbClr val="FFFFFF"/>
                 </a:solidFill>
                 <a:latin typeface="Yu Gothic" pitchFamily="34" charset="0"/>
                 <a:ea typeface="Yu Gothic" pitchFamily="34" charset="-122"/>
@@ -2941,7 +3691,7 @@
             <a:r>
               <a:rPr lang="en-US" sz="1250" dirty="0">
                 <a:solidFill>
-                  <a:srgbClr val="39435A"/>
+                  <a:srgbClr val="FFFFFF"/>
                 </a:solidFill>
                 <a:latin typeface="Yu Gothic" pitchFamily="34" charset="0"/>
                 <a:ea typeface="Yu Gothic" pitchFamily="34" charset="-122"/>
@@ -2980,7 +3730,7 @@
             <a:r>
               <a:rPr lang="en-US" sz="1500" b="1" dirty="0">
                 <a:solidFill>
-                  <a:srgbClr val="E2603C"/>
+                  <a:srgbClr val="3FE0C8"/>
                 </a:solidFill>
                 <a:latin typeface="Yu Gothic" pitchFamily="34" charset="0"/>
                 <a:ea typeface="Yu Gothic" pitchFamily="34" charset="-122"/>
@@ -3006,7 +3756,7 @@
     <p:bg>
       <p:bgPr>
         <a:solidFill>
-          <a:srgbClr val="FFFFFF"/>
+          <a:srgbClr val="0A0D14"/>
         </a:solidFill>
       </p:bgPr>
     </p:bg>
@@ -3051,7 +3801,7 @@
             <a:r>
               <a:rPr lang="en-US" sz="1300" b="1" spc="250" kern="0" dirty="0">
                 <a:solidFill>
-                  <a:srgbClr val="E2603C"/>
+                  <a:srgbClr val="3FE0C8"/>
                 </a:solidFill>
                 <a:latin typeface="Yu Gothic" pitchFamily="34" charset="0"/>
                 <a:ea typeface="Yu Gothic" pitchFamily="34" charset="-122"/>
@@ -3093,7 +3843,7 @@
             <a:r>
               <a:rPr lang="en-US" sz="3300" b="1" dirty="0">
                 <a:solidFill>
-                  <a:srgbClr val="12151C"/>
+                  <a:srgbClr val="FFFFFF"/>
                 </a:solidFill>
                 <a:latin typeface="Yu Gothic" pitchFamily="34" charset="0"/>
                 <a:ea typeface="Yu Gothic" pitchFamily="34" charset="-122"/>
@@ -3118,15 +3868,15 @@
           </a:xfrm>
           <a:prstGeom prst="roundRect">
             <a:avLst>
-              <a:gd name="adj" fmla="val 6957"/>
+              <a:gd name="adj" fmla="val 5217"/>
             </a:avLst>
           </a:prstGeom>
           <a:solidFill>
-            <a:srgbClr val="E2603C"/>
+            <a:srgbClr val="3FE0C8"/>
           </a:solidFill>
           <a:ln w="12700">
             <a:solidFill>
-              <a:srgbClr val="E2603C"/>
+              <a:srgbClr val="3FE0C8"/>
             </a:solidFill>
             <a:prstDash val="solid"/>
           </a:ln>
@@ -3159,11 +3909,11 @@
             <a:r>
               <a:rPr lang="en-US" sz="1300" b="1" spc="100" kern="0" dirty="0">
                 <a:solidFill>
-                  <a:srgbClr val="FFFFFF"/>
-                </a:solidFill>
-                <a:latin typeface="Yu Gothic" pitchFamily="34" charset="0"/>
-                <a:ea typeface="Yu Gothic" pitchFamily="34" charset="-122"/>
-                <a:cs typeface="Yu Gothic" pitchFamily="34" charset="-120"/>
+                  <a:srgbClr val="07231F"/>
+                </a:solidFill>
+                <a:latin typeface="Courier New" pitchFamily="34" charset="0"/>
+                <a:ea typeface="Courier New" pitchFamily="34" charset="-122"/>
+                <a:cs typeface="Courier New" pitchFamily="34" charset="-120"/>
               </a:rPr>
               <a:t>STEP 1</a:t>
             </a:r>
@@ -3198,7 +3948,7 @@
             <a:r>
               <a:rPr lang="en-US" sz="1900" b="1" dirty="0">
                 <a:solidFill>
-                  <a:srgbClr val="12151C"/>
+                  <a:srgbClr val="FFFFFF"/>
                 </a:solidFill>
                 <a:latin typeface="Yu Gothic" pitchFamily="34" charset="0"/>
                 <a:ea typeface="Yu Gothic" pitchFamily="34" charset="-122"/>
@@ -3240,7 +3990,7 @@
             <a:r>
               <a:rPr lang="en-US" sz="1300" dirty="0">
                 <a:solidFill>
-                  <a:srgbClr val="39435A"/>
+                  <a:srgbClr val="C4CDE0"/>
                 </a:solidFill>
                 <a:latin typeface="Yu Gothic" pitchFamily="34" charset="0"/>
                 <a:ea typeface="Yu Gothic" pitchFamily="34" charset="-122"/>
@@ -3265,15 +4015,15 @@
           </a:xfrm>
           <a:prstGeom prst="roundRect">
             <a:avLst>
-              <a:gd name="adj" fmla="val 6957"/>
+              <a:gd name="adj" fmla="val 5217"/>
             </a:avLst>
           </a:prstGeom>
           <a:solidFill>
-            <a:srgbClr val="12151C"/>
+            <a:srgbClr val="121826"/>
           </a:solidFill>
           <a:ln w="12700">
             <a:solidFill>
-              <a:srgbClr val="12151C"/>
+              <a:srgbClr val="232C42"/>
             </a:solidFill>
             <a:prstDash val="solid"/>
           </a:ln>
@@ -3306,11 +4056,11 @@
             <a:r>
               <a:rPr lang="en-US" sz="1300" b="1" spc="100" kern="0" dirty="0">
                 <a:solidFill>
-                  <a:srgbClr val="FFFFFF"/>
-                </a:solidFill>
-                <a:latin typeface="Yu Gothic" pitchFamily="34" charset="0"/>
-                <a:ea typeface="Yu Gothic" pitchFamily="34" charset="-122"/>
-                <a:cs typeface="Yu Gothic" pitchFamily="34" charset="-120"/>
+                  <a:srgbClr val="8794AE"/>
+                </a:solidFill>
+                <a:latin typeface="Courier New" pitchFamily="34" charset="0"/>
+                <a:ea typeface="Courier New" pitchFamily="34" charset="-122"/>
+                <a:cs typeface="Courier New" pitchFamily="34" charset="-120"/>
               </a:rPr>
               <a:t>STEP 2</a:t>
             </a:r>
@@ -3345,7 +4095,7 @@
             <a:r>
               <a:rPr lang="en-US" sz="1900" b="1" dirty="0">
                 <a:solidFill>
-                  <a:srgbClr val="12151C"/>
+                  <a:srgbClr val="FFFFFF"/>
                 </a:solidFill>
                 <a:latin typeface="Yu Gothic" pitchFamily="34" charset="0"/>
                 <a:ea typeface="Yu Gothic" pitchFamily="34" charset="-122"/>
@@ -3387,7 +4137,7 @@
             <a:r>
               <a:rPr lang="en-US" sz="1300" dirty="0">
                 <a:solidFill>
-                  <a:srgbClr val="39435A"/>
+                  <a:srgbClr val="C4CDE0"/>
                 </a:solidFill>
                 <a:latin typeface="Yu Gothic" pitchFamily="34" charset="0"/>
                 <a:ea typeface="Yu Gothic" pitchFamily="34" charset="-122"/>
@@ -3412,15 +4162,15 @@
           </a:xfrm>
           <a:prstGeom prst="roundRect">
             <a:avLst>
-              <a:gd name="adj" fmla="val 6957"/>
+              <a:gd name="adj" fmla="val 5217"/>
             </a:avLst>
           </a:prstGeom>
           <a:solidFill>
-            <a:srgbClr val="12151C"/>
+            <a:srgbClr val="121826"/>
           </a:solidFill>
           <a:ln w="12700">
             <a:solidFill>
-              <a:srgbClr val="12151C"/>
+              <a:srgbClr val="232C42"/>
             </a:solidFill>
             <a:prstDash val="solid"/>
           </a:ln>
@@ -3453,11 +4203,11 @@
             <a:r>
               <a:rPr lang="en-US" sz="1300" b="1" spc="100" kern="0" dirty="0">
                 <a:solidFill>
-                  <a:srgbClr val="FFFFFF"/>
-                </a:solidFill>
-                <a:latin typeface="Yu Gothic" pitchFamily="34" charset="0"/>
-                <a:ea typeface="Yu Gothic" pitchFamily="34" charset="-122"/>
-                <a:cs typeface="Yu Gothic" pitchFamily="34" charset="-120"/>
+                  <a:srgbClr val="8794AE"/>
+                </a:solidFill>
+                <a:latin typeface="Courier New" pitchFamily="34" charset="0"/>
+                <a:ea typeface="Courier New" pitchFamily="34" charset="-122"/>
+                <a:cs typeface="Courier New" pitchFamily="34" charset="-120"/>
               </a:rPr>
               <a:t>STEP 3</a:t>
             </a:r>
@@ -3492,7 +4242,7 @@
             <a:r>
               <a:rPr lang="en-US" sz="1900" b="1" dirty="0">
                 <a:solidFill>
-                  <a:srgbClr val="12151C"/>
+                  <a:srgbClr val="FFFFFF"/>
                 </a:solidFill>
                 <a:latin typeface="Yu Gothic" pitchFamily="34" charset="0"/>
                 <a:ea typeface="Yu Gothic" pitchFamily="34" charset="-122"/>
@@ -3534,7 +4284,7 @@
             <a:r>
               <a:rPr lang="en-US" sz="1300" dirty="0">
                 <a:solidFill>
-                  <a:srgbClr val="39435A"/>
+                  <a:srgbClr val="C4CDE0"/>
                 </a:solidFill>
                 <a:latin typeface="Yu Gothic" pitchFamily="34" charset="0"/>
                 <a:ea typeface="Yu Gothic" pitchFamily="34" charset="-122"/>
@@ -3560,7 +4310,7 @@
     <p:bg>
       <p:bgPr>
         <a:solidFill>
-          <a:srgbClr val="12151C"/>
+          <a:srgbClr val="0A0D14"/>
         </a:solidFill>
       </p:bgPr>
     </p:bg>
@@ -3644,7 +4394,7 @@
             <a:r>
               <a:rPr lang="en-US" sz="1200" b="1" spc="200" kern="0" dirty="0">
                 <a:solidFill>
-                  <a:srgbClr val="E2603C"/>
+                  <a:srgbClr val="3FE0C8"/>
                 </a:solidFill>
                 <a:latin typeface="Yu Gothic" pitchFamily="34" charset="0"/>
                 <a:ea typeface="Yu Gothic" pitchFamily="34" charset="-122"/>
@@ -3686,7 +4436,7 @@
             <a:r>
               <a:rPr lang="en-US" sz="1300" dirty="0">
                 <a:solidFill>
-                  <a:srgbClr val="D7DBE6"/>
+                  <a:srgbClr val="C4CDE0"/>
                 </a:solidFill>
                 <a:latin typeface="Yu Gothic" pitchFamily="34" charset="0"/>
                 <a:ea typeface="Yu Gothic" pitchFamily="34" charset="-122"/>
@@ -3706,7 +4456,7 @@
             <a:r>
               <a:rPr lang="en-US" sz="1300" dirty="0">
                 <a:solidFill>
-                  <a:srgbClr val="D7DBE6"/>
+                  <a:srgbClr val="C4CDE0"/>
                 </a:solidFill>
                 <a:latin typeface="Yu Gothic" pitchFamily="34" charset="0"/>
                 <a:ea typeface="Yu Gothic" pitchFamily="34" charset="-122"/>
@@ -3745,11 +4495,11 @@
             <a:r>
               <a:rPr lang="en-US" sz="1200" dirty="0">
                 <a:solidFill>
-                  <a:srgbClr val="9AA3B8"/>
-                </a:solidFill>
-                <a:latin typeface="Arial" pitchFamily="34" charset="0"/>
-                <a:ea typeface="Arial" pitchFamily="34" charset="-122"/>
-                <a:cs typeface="Arial" pitchFamily="34" charset="-120"/>
+                  <a:srgbClr val="8794AE"/>
+                </a:solidFill>
+                <a:latin typeface="Courier New" pitchFamily="34" charset="0"/>
+                <a:ea typeface="Courier New" pitchFamily="34" charset="-122"/>
+                <a:cs typeface="Courier New" pitchFamily="34" charset="-120"/>
               </a:rPr>
               <a:t>https://youtu.be/LRSSjGwsuv0</a:t>
             </a:r>
@@ -3784,7 +4534,7 @@
             <a:r>
               <a:rPr lang="en-US" sz="1200" b="1" spc="200" kern="0" dirty="0">
                 <a:solidFill>
-                  <a:srgbClr val="E2603C"/>
+                  <a:srgbClr val="3FE0C8"/>
                 </a:solidFill>
                 <a:latin typeface="Yu Gothic" pitchFamily="34" charset="0"/>
                 <a:ea typeface="Yu Gothic" pitchFamily="34" charset="-122"/>
@@ -3830,7 +4580,7 @@
             <a:r>
               <a:rPr lang="en-US" sz="1300" dirty="0">
                 <a:solidFill>
-                  <a:srgbClr val="D7DBE6"/>
+                  <a:srgbClr val="C4CDE0"/>
                 </a:solidFill>
                 <a:latin typeface="Yu Gothic" pitchFamily="34" charset="0"/>
                 <a:ea typeface="Yu Gothic" pitchFamily="34" charset="-122"/>
@@ -3854,7 +4604,7 @@
             <a:r>
               <a:rPr lang="en-US" sz="1300" dirty="0">
                 <a:solidFill>
-                  <a:srgbClr val="D7DBE6"/>
+                  <a:srgbClr val="C4CDE0"/>
                 </a:solidFill>
                 <a:latin typeface="Yu Gothic" pitchFamily="34" charset="0"/>
                 <a:ea typeface="Yu Gothic" pitchFamily="34" charset="-122"/>
@@ -3878,7 +4628,7 @@
             <a:r>
               <a:rPr lang="en-US" sz="1300" dirty="0">
                 <a:solidFill>
-                  <a:srgbClr val="D7DBE6"/>
+                  <a:srgbClr val="C4CDE0"/>
                 </a:solidFill>
                 <a:latin typeface="Yu Gothic" pitchFamily="34" charset="0"/>
                 <a:ea typeface="Yu Gothic" pitchFamily="34" charset="-122"/>
@@ -3917,7 +4667,7 @@
             <a:r>
               <a:rPr lang="en-US" sz="1200" spc="100" kern="0" dirty="0">
                 <a:solidFill>
-                  <a:srgbClr val="6E7891"/>
+                  <a:srgbClr val="8794AE"/>
                 </a:solidFill>
                 <a:latin typeface="Yu Gothic" pitchFamily="34" charset="0"/>
                 <a:ea typeface="Yu Gothic" pitchFamily="34" charset="-122"/>
@@ -3943,7 +4693,7 @@
     <p:bg>
       <p:bgPr>
         <a:solidFill>
-          <a:srgbClr val="FFFFFF"/>
+          <a:srgbClr val="0A0D14"/>
         </a:solidFill>
       </p:bgPr>
     </p:bg>
@@ -3988,7 +4738,7 @@
             <a:r>
               <a:rPr lang="en-US" sz="1300" b="1" spc="250" kern="0" dirty="0">
                 <a:solidFill>
-                  <a:srgbClr val="E2603C"/>
+                  <a:srgbClr val="3FE0C8"/>
                 </a:solidFill>
                 <a:latin typeface="Yu Gothic" pitchFamily="34" charset="0"/>
                 <a:ea typeface="Yu Gothic" pitchFamily="34" charset="-122"/>
@@ -4030,7 +4780,7 @@
             <a:r>
               <a:rPr lang="en-US" sz="3100" b="1" dirty="0">
                 <a:solidFill>
-                  <a:srgbClr val="12151C"/>
+                  <a:srgbClr val="FFFFFF"/>
                 </a:solidFill>
                 <a:latin typeface="Yu Gothic" pitchFamily="34" charset="0"/>
                 <a:ea typeface="Yu Gothic" pitchFamily="34" charset="-122"/>
@@ -4055,15 +4805,15 @@
           </a:xfrm>
           <a:prstGeom prst="roundRect">
             <a:avLst>
-              <a:gd name="adj" fmla="val 5405"/>
+              <a:gd name="adj" fmla="val 3243"/>
             </a:avLst>
           </a:prstGeom>
           <a:solidFill>
-            <a:srgbClr val="F3F4F7"/>
+            <a:srgbClr val="121826"/>
           </a:solidFill>
           <a:ln w="12700">
             <a:solidFill>
-              <a:srgbClr val="E2E5EB"/>
+              <a:srgbClr val="232C42"/>
             </a:solidFill>
             <a:prstDash val="solid"/>
           </a:ln>
@@ -4078,15 +4828,22 @@
         <p:spPr>
           <a:xfrm>
             <a:off x="960120" y="2560320"/>
-            <a:ext cx="402336" cy="402336"/>
-          </a:xfrm>
-          <a:prstGeom prst="ellipse">
-            <a:avLst/>
-          </a:prstGeom>
-          <a:solidFill>
-            <a:srgbClr val="E2603C"/>
-          </a:solidFill>
-          <a:ln/>
+            <a:ext cx="530352" cy="384048"/>
+          </a:xfrm>
+          <a:prstGeom prst="roundRect">
+            <a:avLst>
+              <a:gd name="adj" fmla="val 11905"/>
+            </a:avLst>
+          </a:prstGeom>
+          <a:solidFill>
+            <a:srgbClr val="0E2A2A"/>
+          </a:solidFill>
+          <a:ln w="12700">
+            <a:solidFill>
+              <a:srgbClr val="2A6B62"/>
+            </a:solidFill>
+            <a:prstDash val="solid"/>
+          </a:ln>
         </p:spPr>
       </p:sp>
       <p:sp>
@@ -4098,7 +4855,7 @@
         <p:spPr>
           <a:xfrm>
             <a:off x="960120" y="2560320"/>
-            <a:ext cx="402336" cy="402336"/>
+            <a:ext cx="530352" cy="384048"/>
           </a:xfrm>
           <a:prstGeom prst="rect">
             <a:avLst/>
@@ -4116,46 +4873,46 @@
             <a:r>
               <a:rPr lang="en-US" sz="1200" b="1" dirty="0">
                 <a:solidFill>
+                  <a:srgbClr val="3FE0C8"/>
+                </a:solidFill>
+                <a:latin typeface="Courier New" pitchFamily="34" charset="0"/>
+                <a:ea typeface="Courier New" pitchFamily="34" charset="-122"/>
+                <a:cs typeface="Courier New" pitchFamily="34" charset="-120"/>
+              </a:rPr>
+              <a:t>01</a:t>
+            </a:r>
+            <a:endParaRPr lang="en-US" sz="1200" dirty="0"/>
+          </a:p>
+        </p:txBody>
+      </p:sp>
+      <p:sp>
+        <p:nvSpPr>
+          <p:cNvPr id="7" name="Text 5"/>
+          <p:cNvSpPr/>
+          <p:nvPr/>
+        </p:nvSpPr>
+        <p:spPr>
+          <a:xfrm>
+            <a:off x="1618488" y="2560320"/>
+            <a:ext cx="2221992" cy="384048"/>
+          </a:xfrm>
+          <a:prstGeom prst="rect">
+            <a:avLst/>
+          </a:prstGeom>
+          <a:noFill/>
+          <a:ln/>
+        </p:spPr>
+        <p:txBody>
+          <a:bodyPr wrap="square" lIns="0" tIns="0" rIns="0" bIns="0" rtlCol="0" anchor="ctr"/>
+          <a:lstStyle/>
+          <a:p>
+            <a:pPr indent="0" marL="0">
+              <a:buNone/>
+            </a:pPr>
+            <a:r>
+              <a:rPr lang="en-US" sz="1600" b="1" dirty="0">
+                <a:solidFill>
                   <a:srgbClr val="FFFFFF"/>
-                </a:solidFill>
-                <a:latin typeface="Yu Gothic" pitchFamily="34" charset="0"/>
-                <a:ea typeface="Yu Gothic" pitchFamily="34" charset="-122"/>
-                <a:cs typeface="Yu Gothic" pitchFamily="34" charset="-120"/>
-              </a:rPr>
-              <a:t>01</a:t>
-            </a:r>
-            <a:endParaRPr lang="en-US" sz="1200" dirty="0"/>
-          </a:p>
-        </p:txBody>
-      </p:sp>
-      <p:sp>
-        <p:nvSpPr>
-          <p:cNvPr id="7" name="Text 5"/>
-          <p:cNvSpPr/>
-          <p:nvPr/>
-        </p:nvSpPr>
-        <p:spPr>
-          <a:xfrm>
-            <a:off x="1490472" y="2560320"/>
-            <a:ext cx="2350008" cy="402336"/>
-          </a:xfrm>
-          <a:prstGeom prst="rect">
-            <a:avLst/>
-          </a:prstGeom>
-          <a:noFill/>
-          <a:ln/>
-        </p:spPr>
-        <p:txBody>
-          <a:bodyPr wrap="square" lIns="0" tIns="0" rIns="0" bIns="0" rtlCol="0" anchor="ctr"/>
-          <a:lstStyle/>
-          <a:p>
-            <a:pPr indent="0" marL="0">
-              <a:buNone/>
-            </a:pPr>
-            <a:r>
-              <a:rPr lang="en-US" sz="1600" b="1" dirty="0">
-                <a:solidFill>
-                  <a:srgbClr val="12151C"/>
                 </a:solidFill>
                 <a:latin typeface="Yu Gothic" pitchFamily="34" charset="0"/>
                 <a:ea typeface="Yu Gothic" pitchFamily="34" charset="-122"/>
@@ -4197,7 +4954,7 @@
             <a:r>
               <a:rPr lang="en-US" sz="1200" dirty="0">
                 <a:solidFill>
-                  <a:srgbClr val="39435A"/>
+                  <a:srgbClr val="C4CDE0"/>
                 </a:solidFill>
                 <a:latin typeface="Yu Gothic" pitchFamily="34" charset="0"/>
                 <a:ea typeface="Yu Gothic" pitchFamily="34" charset="-122"/>
@@ -4222,15 +4979,15 @@
           </a:xfrm>
           <a:prstGeom prst="roundRect">
             <a:avLst>
-              <a:gd name="adj" fmla="val 5405"/>
+              <a:gd name="adj" fmla="val 3243"/>
             </a:avLst>
           </a:prstGeom>
           <a:solidFill>
-            <a:srgbClr val="F3F4F7"/>
+            <a:srgbClr val="121826"/>
           </a:solidFill>
           <a:ln w="12700">
             <a:solidFill>
-              <a:srgbClr val="E2E5EB"/>
+              <a:srgbClr val="232C42"/>
             </a:solidFill>
             <a:prstDash val="solid"/>
           </a:ln>
@@ -4245,15 +5002,22 @@
         <p:spPr>
           <a:xfrm>
             <a:off x="4645152" y="2560320"/>
-            <a:ext cx="402336" cy="402336"/>
-          </a:xfrm>
-          <a:prstGeom prst="ellipse">
-            <a:avLst/>
-          </a:prstGeom>
-          <a:solidFill>
-            <a:srgbClr val="E2603C"/>
-          </a:solidFill>
-          <a:ln/>
+            <a:ext cx="530352" cy="384048"/>
+          </a:xfrm>
+          <a:prstGeom prst="roundRect">
+            <a:avLst>
+              <a:gd name="adj" fmla="val 11905"/>
+            </a:avLst>
+          </a:prstGeom>
+          <a:solidFill>
+            <a:srgbClr val="0E2A2A"/>
+          </a:solidFill>
+          <a:ln w="12700">
+            <a:solidFill>
+              <a:srgbClr val="2A6B62"/>
+            </a:solidFill>
+            <a:prstDash val="solid"/>
+          </a:ln>
         </p:spPr>
       </p:sp>
       <p:sp>
@@ -4265,7 +5029,7 @@
         <p:spPr>
           <a:xfrm>
             <a:off x="4645152" y="2560320"/>
-            <a:ext cx="402336" cy="402336"/>
+            <a:ext cx="530352" cy="384048"/>
           </a:xfrm>
           <a:prstGeom prst="rect">
             <a:avLst/>
@@ -4283,46 +5047,46 @@
             <a:r>
               <a:rPr lang="en-US" sz="1200" b="1" dirty="0">
                 <a:solidFill>
+                  <a:srgbClr val="3FE0C8"/>
+                </a:solidFill>
+                <a:latin typeface="Courier New" pitchFamily="34" charset="0"/>
+                <a:ea typeface="Courier New" pitchFamily="34" charset="-122"/>
+                <a:cs typeface="Courier New" pitchFamily="34" charset="-120"/>
+              </a:rPr>
+              <a:t>02</a:t>
+            </a:r>
+            <a:endParaRPr lang="en-US" sz="1200" dirty="0"/>
+          </a:p>
+        </p:txBody>
+      </p:sp>
+      <p:sp>
+        <p:nvSpPr>
+          <p:cNvPr id="12" name="Text 10"/>
+          <p:cNvSpPr/>
+          <p:nvPr/>
+        </p:nvSpPr>
+        <p:spPr>
+          <a:xfrm>
+            <a:off x="5303520" y="2560320"/>
+            <a:ext cx="2221992" cy="384048"/>
+          </a:xfrm>
+          <a:prstGeom prst="rect">
+            <a:avLst/>
+          </a:prstGeom>
+          <a:noFill/>
+          <a:ln/>
+        </p:spPr>
+        <p:txBody>
+          <a:bodyPr wrap="square" lIns="0" tIns="0" rIns="0" bIns="0" rtlCol="0" anchor="ctr"/>
+          <a:lstStyle/>
+          <a:p>
+            <a:pPr indent="0" marL="0">
+              <a:buNone/>
+            </a:pPr>
+            <a:r>
+              <a:rPr lang="en-US" sz="1600" b="1" dirty="0">
+                <a:solidFill>
                   <a:srgbClr val="FFFFFF"/>
-                </a:solidFill>
-                <a:latin typeface="Yu Gothic" pitchFamily="34" charset="0"/>
-                <a:ea typeface="Yu Gothic" pitchFamily="34" charset="-122"/>
-                <a:cs typeface="Yu Gothic" pitchFamily="34" charset="-120"/>
-              </a:rPr>
-              <a:t>02</a:t>
-            </a:r>
-            <a:endParaRPr lang="en-US" sz="1200" dirty="0"/>
-          </a:p>
-        </p:txBody>
-      </p:sp>
-      <p:sp>
-        <p:nvSpPr>
-          <p:cNvPr id="12" name="Text 10"/>
-          <p:cNvSpPr/>
-          <p:nvPr/>
-        </p:nvSpPr>
-        <p:spPr>
-          <a:xfrm>
-            <a:off x="5175504" y="2560320"/>
-            <a:ext cx="2350008" cy="402336"/>
-          </a:xfrm>
-          <a:prstGeom prst="rect">
-            <a:avLst/>
-          </a:prstGeom>
-          <a:noFill/>
-          <a:ln/>
-        </p:spPr>
-        <p:txBody>
-          <a:bodyPr wrap="square" lIns="0" tIns="0" rIns="0" bIns="0" rtlCol="0" anchor="ctr"/>
-          <a:lstStyle/>
-          <a:p>
-            <a:pPr indent="0" marL="0">
-              <a:buNone/>
-            </a:pPr>
-            <a:r>
-              <a:rPr lang="en-US" sz="1600" b="1" dirty="0">
-                <a:solidFill>
-                  <a:srgbClr val="12151C"/>
                 </a:solidFill>
                 <a:latin typeface="Yu Gothic" pitchFamily="34" charset="0"/>
                 <a:ea typeface="Yu Gothic" pitchFamily="34" charset="-122"/>
@@ -4364,7 +5128,7 @@
             <a:r>
               <a:rPr lang="en-US" sz="1200" dirty="0">
                 <a:solidFill>
-                  <a:srgbClr val="39435A"/>
+                  <a:srgbClr val="C4CDE0"/>
                 </a:solidFill>
                 <a:latin typeface="Yu Gothic" pitchFamily="34" charset="0"/>
                 <a:ea typeface="Yu Gothic" pitchFamily="34" charset="-122"/>
@@ -4389,15 +5153,15 @@
           </a:xfrm>
           <a:prstGeom prst="roundRect">
             <a:avLst>
-              <a:gd name="adj" fmla="val 5405"/>
+              <a:gd name="adj" fmla="val 3243"/>
             </a:avLst>
           </a:prstGeom>
           <a:solidFill>
-            <a:srgbClr val="F3F4F7"/>
+            <a:srgbClr val="121826"/>
           </a:solidFill>
           <a:ln w="12700">
             <a:solidFill>
-              <a:srgbClr val="E2E5EB"/>
+              <a:srgbClr val="232C42"/>
             </a:solidFill>
             <a:prstDash val="solid"/>
           </a:ln>
@@ -4412,15 +5176,22 @@
         <p:spPr>
           <a:xfrm>
             <a:off x="8330184" y="2560320"/>
-            <a:ext cx="402336" cy="402336"/>
-          </a:xfrm>
-          <a:prstGeom prst="ellipse">
-            <a:avLst/>
-          </a:prstGeom>
-          <a:solidFill>
-            <a:srgbClr val="E2603C"/>
-          </a:solidFill>
-          <a:ln/>
+            <a:ext cx="530352" cy="384048"/>
+          </a:xfrm>
+          <a:prstGeom prst="roundRect">
+            <a:avLst>
+              <a:gd name="adj" fmla="val 11905"/>
+            </a:avLst>
+          </a:prstGeom>
+          <a:solidFill>
+            <a:srgbClr val="0E2A2A"/>
+          </a:solidFill>
+          <a:ln w="12700">
+            <a:solidFill>
+              <a:srgbClr val="2A6B62"/>
+            </a:solidFill>
+            <a:prstDash val="solid"/>
+          </a:ln>
         </p:spPr>
       </p:sp>
       <p:sp>
@@ -4432,7 +5203,7 @@
         <p:spPr>
           <a:xfrm>
             <a:off x="8330184" y="2560320"/>
-            <a:ext cx="402336" cy="402336"/>
+            <a:ext cx="530352" cy="384048"/>
           </a:xfrm>
           <a:prstGeom prst="rect">
             <a:avLst/>
@@ -4450,46 +5221,46 @@
             <a:r>
               <a:rPr lang="en-US" sz="1200" b="1" dirty="0">
                 <a:solidFill>
+                  <a:srgbClr val="3FE0C8"/>
+                </a:solidFill>
+                <a:latin typeface="Courier New" pitchFamily="34" charset="0"/>
+                <a:ea typeface="Courier New" pitchFamily="34" charset="-122"/>
+                <a:cs typeface="Courier New" pitchFamily="34" charset="-120"/>
+              </a:rPr>
+              <a:t>03</a:t>
+            </a:r>
+            <a:endParaRPr lang="en-US" sz="1200" dirty="0"/>
+          </a:p>
+        </p:txBody>
+      </p:sp>
+      <p:sp>
+        <p:nvSpPr>
+          <p:cNvPr id="17" name="Text 15"/>
+          <p:cNvSpPr/>
+          <p:nvPr/>
+        </p:nvSpPr>
+        <p:spPr>
+          <a:xfrm>
+            <a:off x="8988552" y="2560320"/>
+            <a:ext cx="2221992" cy="384048"/>
+          </a:xfrm>
+          <a:prstGeom prst="rect">
+            <a:avLst/>
+          </a:prstGeom>
+          <a:noFill/>
+          <a:ln/>
+        </p:spPr>
+        <p:txBody>
+          <a:bodyPr wrap="square" lIns="0" tIns="0" rIns="0" bIns="0" rtlCol="0" anchor="ctr"/>
+          <a:lstStyle/>
+          <a:p>
+            <a:pPr indent="0" marL="0">
+              <a:buNone/>
+            </a:pPr>
+            <a:r>
+              <a:rPr lang="en-US" sz="1600" b="1" dirty="0">
+                <a:solidFill>
                   <a:srgbClr val="FFFFFF"/>
-                </a:solidFill>
-                <a:latin typeface="Yu Gothic" pitchFamily="34" charset="0"/>
-                <a:ea typeface="Yu Gothic" pitchFamily="34" charset="-122"/>
-                <a:cs typeface="Yu Gothic" pitchFamily="34" charset="-120"/>
-              </a:rPr>
-              <a:t>03</a:t>
-            </a:r>
-            <a:endParaRPr lang="en-US" sz="1200" dirty="0"/>
-          </a:p>
-        </p:txBody>
-      </p:sp>
-      <p:sp>
-        <p:nvSpPr>
-          <p:cNvPr id="17" name="Text 15"/>
-          <p:cNvSpPr/>
-          <p:nvPr/>
-        </p:nvSpPr>
-        <p:spPr>
-          <a:xfrm>
-            <a:off x="8860536" y="2560320"/>
-            <a:ext cx="2350008" cy="402336"/>
-          </a:xfrm>
-          <a:prstGeom prst="rect">
-            <a:avLst/>
-          </a:prstGeom>
-          <a:noFill/>
-          <a:ln/>
-        </p:spPr>
-        <p:txBody>
-          <a:bodyPr wrap="square" lIns="0" tIns="0" rIns="0" bIns="0" rtlCol="0" anchor="ctr"/>
-          <a:lstStyle/>
-          <a:p>
-            <a:pPr indent="0" marL="0">
-              <a:buNone/>
-            </a:pPr>
-            <a:r>
-              <a:rPr lang="en-US" sz="1600" b="1" dirty="0">
-                <a:solidFill>
-                  <a:srgbClr val="12151C"/>
                 </a:solidFill>
                 <a:latin typeface="Yu Gothic" pitchFamily="34" charset="0"/>
                 <a:ea typeface="Yu Gothic" pitchFamily="34" charset="-122"/>
@@ -4531,7 +5302,7 @@
             <a:r>
               <a:rPr lang="en-US" sz="1200" dirty="0">
                 <a:solidFill>
-                  <a:srgbClr val="39435A"/>
+                  <a:srgbClr val="C4CDE0"/>
                 </a:solidFill>
                 <a:latin typeface="Yu Gothic" pitchFamily="34" charset="0"/>
                 <a:ea typeface="Yu Gothic" pitchFamily="34" charset="-122"/>
@@ -4556,15 +5327,15 @@
           </a:xfrm>
           <a:prstGeom prst="roundRect">
             <a:avLst>
-              <a:gd name="adj" fmla="val 5405"/>
+              <a:gd name="adj" fmla="val 3243"/>
             </a:avLst>
           </a:prstGeom>
           <a:solidFill>
-            <a:srgbClr val="F3F4F7"/>
+            <a:srgbClr val="121826"/>
           </a:solidFill>
           <a:ln w="12700">
             <a:solidFill>
-              <a:srgbClr val="E2E5EB"/>
+              <a:srgbClr val="232C42"/>
             </a:solidFill>
             <a:prstDash val="solid"/>
           </a:ln>
@@ -4579,15 +5350,22 @@
         <p:spPr>
           <a:xfrm>
             <a:off x="960120" y="4526280"/>
-            <a:ext cx="402336" cy="402336"/>
-          </a:xfrm>
-          <a:prstGeom prst="ellipse">
-            <a:avLst/>
-          </a:prstGeom>
-          <a:solidFill>
-            <a:srgbClr val="E2603C"/>
-          </a:solidFill>
-          <a:ln/>
+            <a:ext cx="530352" cy="384048"/>
+          </a:xfrm>
+          <a:prstGeom prst="roundRect">
+            <a:avLst>
+              <a:gd name="adj" fmla="val 11905"/>
+            </a:avLst>
+          </a:prstGeom>
+          <a:solidFill>
+            <a:srgbClr val="0E2A2A"/>
+          </a:solidFill>
+          <a:ln w="12700">
+            <a:solidFill>
+              <a:srgbClr val="2A6B62"/>
+            </a:solidFill>
+            <a:prstDash val="solid"/>
+          </a:ln>
         </p:spPr>
       </p:sp>
       <p:sp>
@@ -4599,7 +5377,7 @@
         <p:spPr>
           <a:xfrm>
             <a:off x="960120" y="4526280"/>
-            <a:ext cx="402336" cy="402336"/>
+            <a:ext cx="530352" cy="384048"/>
           </a:xfrm>
           <a:prstGeom prst="rect">
             <a:avLst/>
@@ -4617,46 +5395,46 @@
             <a:r>
               <a:rPr lang="en-US" sz="1200" b="1" dirty="0">
                 <a:solidFill>
+                  <a:srgbClr val="3FE0C8"/>
+                </a:solidFill>
+                <a:latin typeface="Courier New" pitchFamily="34" charset="0"/>
+                <a:ea typeface="Courier New" pitchFamily="34" charset="-122"/>
+                <a:cs typeface="Courier New" pitchFamily="34" charset="-120"/>
+              </a:rPr>
+              <a:t>04</a:t>
+            </a:r>
+            <a:endParaRPr lang="en-US" sz="1200" dirty="0"/>
+          </a:p>
+        </p:txBody>
+      </p:sp>
+      <p:sp>
+        <p:nvSpPr>
+          <p:cNvPr id="22" name="Text 20"/>
+          <p:cNvSpPr/>
+          <p:nvPr/>
+        </p:nvSpPr>
+        <p:spPr>
+          <a:xfrm>
+            <a:off x="1618488" y="4526280"/>
+            <a:ext cx="2221992" cy="384048"/>
+          </a:xfrm>
+          <a:prstGeom prst="rect">
+            <a:avLst/>
+          </a:prstGeom>
+          <a:noFill/>
+          <a:ln/>
+        </p:spPr>
+        <p:txBody>
+          <a:bodyPr wrap="square" lIns="0" tIns="0" rIns="0" bIns="0" rtlCol="0" anchor="ctr"/>
+          <a:lstStyle/>
+          <a:p>
+            <a:pPr indent="0" marL="0">
+              <a:buNone/>
+            </a:pPr>
+            <a:r>
+              <a:rPr lang="en-US" sz="1600" b="1" dirty="0">
+                <a:solidFill>
                   <a:srgbClr val="FFFFFF"/>
-                </a:solidFill>
-                <a:latin typeface="Yu Gothic" pitchFamily="34" charset="0"/>
-                <a:ea typeface="Yu Gothic" pitchFamily="34" charset="-122"/>
-                <a:cs typeface="Yu Gothic" pitchFamily="34" charset="-120"/>
-              </a:rPr>
-              <a:t>04</a:t>
-            </a:r>
-            <a:endParaRPr lang="en-US" sz="1200" dirty="0"/>
-          </a:p>
-        </p:txBody>
-      </p:sp>
-      <p:sp>
-        <p:nvSpPr>
-          <p:cNvPr id="22" name="Text 20"/>
-          <p:cNvSpPr/>
-          <p:nvPr/>
-        </p:nvSpPr>
-        <p:spPr>
-          <a:xfrm>
-            <a:off x="1490472" y="4526280"/>
-            <a:ext cx="2350008" cy="402336"/>
-          </a:xfrm>
-          <a:prstGeom prst="rect">
-            <a:avLst/>
-          </a:prstGeom>
-          <a:noFill/>
-          <a:ln/>
-        </p:spPr>
-        <p:txBody>
-          <a:bodyPr wrap="square" lIns="0" tIns="0" rIns="0" bIns="0" rtlCol="0" anchor="ctr"/>
-          <a:lstStyle/>
-          <a:p>
-            <a:pPr indent="0" marL="0">
-              <a:buNone/>
-            </a:pPr>
-            <a:r>
-              <a:rPr lang="en-US" sz="1600" b="1" dirty="0">
-                <a:solidFill>
-                  <a:srgbClr val="12151C"/>
                 </a:solidFill>
                 <a:latin typeface="Yu Gothic" pitchFamily="34" charset="0"/>
                 <a:ea typeface="Yu Gothic" pitchFamily="34" charset="-122"/>
@@ -4698,7 +5476,7 @@
             <a:r>
               <a:rPr lang="en-US" sz="1200" dirty="0">
                 <a:solidFill>
-                  <a:srgbClr val="39435A"/>
+                  <a:srgbClr val="C4CDE0"/>
                 </a:solidFill>
                 <a:latin typeface="Yu Gothic" pitchFamily="34" charset="0"/>
                 <a:ea typeface="Yu Gothic" pitchFamily="34" charset="-122"/>
@@ -4723,15 +5501,15 @@
           </a:xfrm>
           <a:prstGeom prst="roundRect">
             <a:avLst>
-              <a:gd name="adj" fmla="val 5405"/>
+              <a:gd name="adj" fmla="val 3243"/>
             </a:avLst>
           </a:prstGeom>
           <a:solidFill>
-            <a:srgbClr val="F3F4F7"/>
+            <a:srgbClr val="121826"/>
           </a:solidFill>
           <a:ln w="12700">
             <a:solidFill>
-              <a:srgbClr val="E2E5EB"/>
+              <a:srgbClr val="232C42"/>
             </a:solidFill>
             <a:prstDash val="solid"/>
           </a:ln>
@@ -4746,15 +5524,22 @@
         <p:spPr>
           <a:xfrm>
             <a:off x="4645152" y="4526280"/>
-            <a:ext cx="402336" cy="402336"/>
-          </a:xfrm>
-          <a:prstGeom prst="ellipse">
-            <a:avLst/>
-          </a:prstGeom>
-          <a:solidFill>
-            <a:srgbClr val="E2603C"/>
-          </a:solidFill>
-          <a:ln/>
+            <a:ext cx="530352" cy="384048"/>
+          </a:xfrm>
+          <a:prstGeom prst="roundRect">
+            <a:avLst>
+              <a:gd name="adj" fmla="val 11905"/>
+            </a:avLst>
+          </a:prstGeom>
+          <a:solidFill>
+            <a:srgbClr val="0E2A2A"/>
+          </a:solidFill>
+          <a:ln w="12700">
+            <a:solidFill>
+              <a:srgbClr val="2A6B62"/>
+            </a:solidFill>
+            <a:prstDash val="solid"/>
+          </a:ln>
         </p:spPr>
       </p:sp>
       <p:sp>
@@ -4766,7 +5551,7 @@
         <p:spPr>
           <a:xfrm>
             <a:off x="4645152" y="4526280"/>
-            <a:ext cx="402336" cy="402336"/>
+            <a:ext cx="530352" cy="384048"/>
           </a:xfrm>
           <a:prstGeom prst="rect">
             <a:avLst/>
@@ -4784,46 +5569,46 @@
             <a:r>
               <a:rPr lang="en-US" sz="1200" b="1" dirty="0">
                 <a:solidFill>
+                  <a:srgbClr val="3FE0C8"/>
+                </a:solidFill>
+                <a:latin typeface="Courier New" pitchFamily="34" charset="0"/>
+                <a:ea typeface="Courier New" pitchFamily="34" charset="-122"/>
+                <a:cs typeface="Courier New" pitchFamily="34" charset="-120"/>
+              </a:rPr>
+              <a:t>05</a:t>
+            </a:r>
+            <a:endParaRPr lang="en-US" sz="1200" dirty="0"/>
+          </a:p>
+        </p:txBody>
+      </p:sp>
+      <p:sp>
+        <p:nvSpPr>
+          <p:cNvPr id="27" name="Text 25"/>
+          <p:cNvSpPr/>
+          <p:nvPr/>
+        </p:nvSpPr>
+        <p:spPr>
+          <a:xfrm>
+            <a:off x="5303520" y="4526280"/>
+            <a:ext cx="2221992" cy="384048"/>
+          </a:xfrm>
+          <a:prstGeom prst="rect">
+            <a:avLst/>
+          </a:prstGeom>
+          <a:noFill/>
+          <a:ln/>
+        </p:spPr>
+        <p:txBody>
+          <a:bodyPr wrap="square" lIns="0" tIns="0" rIns="0" bIns="0" rtlCol="0" anchor="ctr"/>
+          <a:lstStyle/>
+          <a:p>
+            <a:pPr indent="0" marL="0">
+              <a:buNone/>
+            </a:pPr>
+            <a:r>
+              <a:rPr lang="en-US" sz="1600" b="1" dirty="0">
+                <a:solidFill>
                   <a:srgbClr val="FFFFFF"/>
-                </a:solidFill>
-                <a:latin typeface="Yu Gothic" pitchFamily="34" charset="0"/>
-                <a:ea typeface="Yu Gothic" pitchFamily="34" charset="-122"/>
-                <a:cs typeface="Yu Gothic" pitchFamily="34" charset="-120"/>
-              </a:rPr>
-              <a:t>05</a:t>
-            </a:r>
-            <a:endParaRPr lang="en-US" sz="1200" dirty="0"/>
-          </a:p>
-        </p:txBody>
-      </p:sp>
-      <p:sp>
-        <p:nvSpPr>
-          <p:cNvPr id="27" name="Text 25"/>
-          <p:cNvSpPr/>
-          <p:nvPr/>
-        </p:nvSpPr>
-        <p:spPr>
-          <a:xfrm>
-            <a:off x="5175504" y="4526280"/>
-            <a:ext cx="2350008" cy="402336"/>
-          </a:xfrm>
-          <a:prstGeom prst="rect">
-            <a:avLst/>
-          </a:prstGeom>
-          <a:noFill/>
-          <a:ln/>
-        </p:spPr>
-        <p:txBody>
-          <a:bodyPr wrap="square" lIns="0" tIns="0" rIns="0" bIns="0" rtlCol="0" anchor="ctr"/>
-          <a:lstStyle/>
-          <a:p>
-            <a:pPr indent="0" marL="0">
-              <a:buNone/>
-            </a:pPr>
-            <a:r>
-              <a:rPr lang="en-US" sz="1600" b="1" dirty="0">
-                <a:solidFill>
-                  <a:srgbClr val="12151C"/>
                 </a:solidFill>
                 <a:latin typeface="Yu Gothic" pitchFamily="34" charset="0"/>
                 <a:ea typeface="Yu Gothic" pitchFamily="34" charset="-122"/>
@@ -4865,7 +5650,7 @@
             <a:r>
               <a:rPr lang="en-US" sz="1200" dirty="0">
                 <a:solidFill>
-                  <a:srgbClr val="39435A"/>
+                  <a:srgbClr val="C4CDE0"/>
                 </a:solidFill>
                 <a:latin typeface="Yu Gothic" pitchFamily="34" charset="0"/>
                 <a:ea typeface="Yu Gothic" pitchFamily="34" charset="-122"/>
@@ -4890,15 +5675,15 @@
           </a:xfrm>
           <a:prstGeom prst="roundRect">
             <a:avLst>
-              <a:gd name="adj" fmla="val 5405"/>
+              <a:gd name="adj" fmla="val 3243"/>
             </a:avLst>
           </a:prstGeom>
           <a:solidFill>
-            <a:srgbClr val="F3F4F7"/>
+            <a:srgbClr val="121826"/>
           </a:solidFill>
           <a:ln w="12700">
             <a:solidFill>
-              <a:srgbClr val="E2E5EB"/>
+              <a:srgbClr val="232C42"/>
             </a:solidFill>
             <a:prstDash val="solid"/>
           </a:ln>
@@ -4913,15 +5698,22 @@
         <p:spPr>
           <a:xfrm>
             <a:off x="8330184" y="4526280"/>
-            <a:ext cx="402336" cy="402336"/>
-          </a:xfrm>
-          <a:prstGeom prst="ellipse">
-            <a:avLst/>
-          </a:prstGeom>
-          <a:solidFill>
-            <a:srgbClr val="E2603C"/>
-          </a:solidFill>
-          <a:ln/>
+            <a:ext cx="530352" cy="384048"/>
+          </a:xfrm>
+          <a:prstGeom prst="roundRect">
+            <a:avLst>
+              <a:gd name="adj" fmla="val 11905"/>
+            </a:avLst>
+          </a:prstGeom>
+          <a:solidFill>
+            <a:srgbClr val="0E2A2A"/>
+          </a:solidFill>
+          <a:ln w="12700">
+            <a:solidFill>
+              <a:srgbClr val="2A6B62"/>
+            </a:solidFill>
+            <a:prstDash val="solid"/>
+          </a:ln>
         </p:spPr>
       </p:sp>
       <p:sp>
@@ -4933,7 +5725,7 @@
         <p:spPr>
           <a:xfrm>
             <a:off x="8330184" y="4526280"/>
-            <a:ext cx="402336" cy="402336"/>
+            <a:ext cx="530352" cy="384048"/>
           </a:xfrm>
           <a:prstGeom prst="rect">
             <a:avLst/>
@@ -4951,46 +5743,46 @@
             <a:r>
               <a:rPr lang="en-US" sz="1200" b="1" dirty="0">
                 <a:solidFill>
+                  <a:srgbClr val="3FE0C8"/>
+                </a:solidFill>
+                <a:latin typeface="Courier New" pitchFamily="34" charset="0"/>
+                <a:ea typeface="Courier New" pitchFamily="34" charset="-122"/>
+                <a:cs typeface="Courier New" pitchFamily="34" charset="-120"/>
+              </a:rPr>
+              <a:t>06</a:t>
+            </a:r>
+            <a:endParaRPr lang="en-US" sz="1200" dirty="0"/>
+          </a:p>
+        </p:txBody>
+      </p:sp>
+      <p:sp>
+        <p:nvSpPr>
+          <p:cNvPr id="32" name="Text 30"/>
+          <p:cNvSpPr/>
+          <p:nvPr/>
+        </p:nvSpPr>
+        <p:spPr>
+          <a:xfrm>
+            <a:off x="8988552" y="4526280"/>
+            <a:ext cx="2221992" cy="384048"/>
+          </a:xfrm>
+          <a:prstGeom prst="rect">
+            <a:avLst/>
+          </a:prstGeom>
+          <a:noFill/>
+          <a:ln/>
+        </p:spPr>
+        <p:txBody>
+          <a:bodyPr wrap="square" lIns="0" tIns="0" rIns="0" bIns="0" rtlCol="0" anchor="ctr"/>
+          <a:lstStyle/>
+          <a:p>
+            <a:pPr indent="0" marL="0">
+              <a:buNone/>
+            </a:pPr>
+            <a:r>
+              <a:rPr lang="en-US" sz="1600" b="1" dirty="0">
+                <a:solidFill>
                   <a:srgbClr val="FFFFFF"/>
-                </a:solidFill>
-                <a:latin typeface="Yu Gothic" pitchFamily="34" charset="0"/>
-                <a:ea typeface="Yu Gothic" pitchFamily="34" charset="-122"/>
-                <a:cs typeface="Yu Gothic" pitchFamily="34" charset="-120"/>
-              </a:rPr>
-              <a:t>06</a:t>
-            </a:r>
-            <a:endParaRPr lang="en-US" sz="1200" dirty="0"/>
-          </a:p>
-        </p:txBody>
-      </p:sp>
-      <p:sp>
-        <p:nvSpPr>
-          <p:cNvPr id="32" name="Text 30"/>
-          <p:cNvSpPr/>
-          <p:nvPr/>
-        </p:nvSpPr>
-        <p:spPr>
-          <a:xfrm>
-            <a:off x="8860536" y="4526280"/>
-            <a:ext cx="2350008" cy="402336"/>
-          </a:xfrm>
-          <a:prstGeom prst="rect">
-            <a:avLst/>
-          </a:prstGeom>
-          <a:noFill/>
-          <a:ln/>
-        </p:spPr>
-        <p:txBody>
-          <a:bodyPr wrap="square" lIns="0" tIns="0" rIns="0" bIns="0" rtlCol="0" anchor="ctr"/>
-          <a:lstStyle/>
-          <a:p>
-            <a:pPr indent="0" marL="0">
-              <a:buNone/>
-            </a:pPr>
-            <a:r>
-              <a:rPr lang="en-US" sz="1600" b="1" dirty="0">
-                <a:solidFill>
-                  <a:srgbClr val="12151C"/>
                 </a:solidFill>
                 <a:latin typeface="Yu Gothic" pitchFamily="34" charset="0"/>
                 <a:ea typeface="Yu Gothic" pitchFamily="34" charset="-122"/>
@@ -5032,7 +5824,7 @@
             <a:r>
               <a:rPr lang="en-US" sz="1200" dirty="0">
                 <a:solidFill>
-                  <a:srgbClr val="39435A"/>
+                  <a:srgbClr val="C4CDE0"/>
                 </a:solidFill>
                 <a:latin typeface="Yu Gothic" pitchFamily="34" charset="0"/>
                 <a:ea typeface="Yu Gothic" pitchFamily="34" charset="-122"/>
@@ -5058,7 +5850,7 @@
     <p:bg>
       <p:bgPr>
         <a:solidFill>
-          <a:srgbClr val="FFFFFF"/>
+          <a:srgbClr val="0A0D14"/>
         </a:solidFill>
       </p:bgPr>
     </p:bg>
@@ -5084,16 +5876,23 @@
         </p:nvSpPr>
         <p:spPr>
           <a:xfrm>
-            <a:off x="685800" y="548640"/>
-            <a:ext cx="457200" cy="457200"/>
-          </a:xfrm>
-          <a:prstGeom prst="ellipse">
-            <a:avLst/>
-          </a:prstGeom>
-          <a:solidFill>
-            <a:srgbClr val="E2603C"/>
-          </a:solidFill>
-          <a:ln/>
+            <a:off x="685800" y="566928"/>
+            <a:ext cx="566928" cy="402336"/>
+          </a:xfrm>
+          <a:prstGeom prst="roundRect">
+            <a:avLst>
+              <a:gd name="adj" fmla="val 11364"/>
+            </a:avLst>
+          </a:prstGeom>
+          <a:solidFill>
+            <a:srgbClr val="0E2A2A"/>
+          </a:solidFill>
+          <a:ln w="12700">
+            <a:solidFill>
+              <a:srgbClr val="2A6B62"/>
+            </a:solidFill>
+            <a:prstDash val="solid"/>
+          </a:ln>
         </p:spPr>
       </p:sp>
       <p:sp>
@@ -5104,8 +5903,8 @@
         </p:nvSpPr>
         <p:spPr>
           <a:xfrm>
-            <a:off x="685800" y="548640"/>
-            <a:ext cx="457200" cy="457200"/>
+            <a:off x="685800" y="566928"/>
+            <a:ext cx="566928" cy="402336"/>
           </a:xfrm>
           <a:prstGeom prst="rect">
             <a:avLst/>
@@ -5121,17 +5920,17 @@
               <a:buNone/>
             </a:pPr>
             <a:r>
-              <a:rPr lang="en-US" sz="1500" b="1" dirty="0">
-                <a:solidFill>
-                  <a:srgbClr val="FFFFFF"/>
-                </a:solidFill>
-                <a:latin typeface="Yu Gothic" pitchFamily="34" charset="0"/>
-                <a:ea typeface="Yu Gothic" pitchFamily="34" charset="-122"/>
-                <a:cs typeface="Yu Gothic" pitchFamily="34" charset="-120"/>
+              <a:rPr lang="en-US" sz="1400" b="1" dirty="0">
+                <a:solidFill>
+                  <a:srgbClr val="3FE0C8"/>
+                </a:solidFill>
+                <a:latin typeface="Courier New" pitchFamily="34" charset="0"/>
+                <a:ea typeface="Courier New" pitchFamily="34" charset="-122"/>
+                <a:cs typeface="Courier New" pitchFamily="34" charset="-120"/>
               </a:rPr>
               <a:t>01</a:t>
             </a:r>
-            <a:endParaRPr lang="en-US" sz="1500" dirty="0"/>
+            <a:endParaRPr lang="en-US" sz="1400" dirty="0"/>
           </a:p>
         </p:txBody>
       </p:sp>
@@ -5143,8 +5942,8 @@
         </p:nvSpPr>
         <p:spPr>
           <a:xfrm>
-            <a:off x="1307592" y="548640"/>
-            <a:ext cx="7315200" cy="457200"/>
+            <a:off x="1417320" y="566928"/>
+            <a:ext cx="8229600" cy="402336"/>
           </a:xfrm>
           <a:prstGeom prst="rect">
             <a:avLst/>
@@ -5162,7 +5961,7 @@
             <a:r>
               <a:rPr lang="en-US" sz="1300" b="1" spc="150" kern="0" dirty="0">
                 <a:solidFill>
-                  <a:srgbClr val="6E7891"/>
+                  <a:srgbClr val="8794AE"/>
                 </a:solidFill>
                 <a:latin typeface="Yu Gothic" pitchFamily="34" charset="0"/>
                 <a:ea typeface="Yu Gothic" pitchFamily="34" charset="-122"/>
@@ -5204,7 +6003,7 @@
             <a:r>
               <a:rPr lang="en-US" sz="3300" b="1" dirty="0">
                 <a:solidFill>
-                  <a:srgbClr val="12151C"/>
+                  <a:srgbClr val="FFFFFF"/>
                 </a:solidFill>
                 <a:latin typeface="Yu Gothic" pitchFamily="34" charset="0"/>
                 <a:ea typeface="Yu Gothic" pitchFamily="34" charset="-122"/>
@@ -5229,15 +6028,15 @@
           </a:xfrm>
           <a:prstGeom prst="roundRect">
             <a:avLst>
-              <a:gd name="adj" fmla="val 3125"/>
+              <a:gd name="adj" fmla="val 1875"/>
             </a:avLst>
           </a:prstGeom>
           <a:solidFill>
-            <a:srgbClr val="F3F4F7"/>
+            <a:srgbClr val="121826"/>
           </a:solidFill>
           <a:ln w="12700">
             <a:solidFill>
-              <a:srgbClr val="E2E5EB"/>
+              <a:srgbClr val="232C42"/>
             </a:solidFill>
             <a:prstDash val="solid"/>
           </a:ln>
@@ -5270,7 +6069,7 @@
             <a:r>
               <a:rPr lang="en-US" sz="1300" b="1" spc="150" kern="0" dirty="0">
                 <a:solidFill>
-                  <a:srgbClr val="6E7891"/>
+                  <a:srgbClr val="8794AE"/>
                 </a:solidFill>
                 <a:latin typeface="Yu Gothic" pitchFamily="34" charset="0"/>
                 <a:ea typeface="Yu Gothic" pitchFamily="34" charset="-122"/>
@@ -5309,7 +6108,7 @@
             <a:r>
               <a:rPr lang="en-US" sz="2100" b="1" dirty="0">
                 <a:solidFill>
-                  <a:srgbClr val="39435A"/>
+                  <a:srgbClr val="C4CDE0"/>
                 </a:solidFill>
                 <a:latin typeface="Yu Gothic" pitchFamily="34" charset="0"/>
                 <a:ea typeface="Yu Gothic" pitchFamily="34" charset="-122"/>
@@ -5330,7 +6129,7 @@
         <p:spPr>
           <a:xfrm>
             <a:off x="1069848" y="3611880"/>
-            <a:ext cx="4489704" cy="1280160"/>
+            <a:ext cx="4489704" cy="1371600"/>
           </a:xfrm>
           <a:prstGeom prst="rect">
             <a:avLst/>
@@ -5352,7 +6151,7 @@
             <a:r>
               <a:rPr lang="en-US" sz="1350" dirty="0">
                 <a:solidFill>
-                  <a:srgbClr val="39435A"/>
+                  <a:srgbClr val="8794AE"/>
                 </a:solidFill>
                 <a:latin typeface="Yu Gothic" pitchFamily="34" charset="0"/>
                 <a:ea typeface="Yu Gothic" pitchFamily="34" charset="-122"/>
@@ -5373,7 +6172,7 @@
             <a:r>
               <a:rPr lang="en-US" sz="1350" dirty="0">
                 <a:solidFill>
-                  <a:srgbClr val="39435A"/>
+                  <a:srgbClr val="8794AE"/>
                 </a:solidFill>
                 <a:latin typeface="Yu Gothic" pitchFamily="34" charset="0"/>
                 <a:ea typeface="Yu Gothic" pitchFamily="34" charset="-122"/>
@@ -5394,7 +6193,7 @@
             <a:r>
               <a:rPr lang="en-US" sz="1350" dirty="0">
                 <a:solidFill>
-                  <a:srgbClr val="39435A"/>
+                  <a:srgbClr val="8794AE"/>
                 </a:solidFill>
                 <a:latin typeface="Yu Gothic" pitchFamily="34" charset="0"/>
                 <a:ea typeface="Yu Gothic" pitchFamily="34" charset="-122"/>
@@ -5415,7 +6214,7 @@
             <a:r>
               <a:rPr lang="en-US" sz="1350" dirty="0">
                 <a:solidFill>
-                  <a:srgbClr val="39435A"/>
+                  <a:srgbClr val="8794AE"/>
                 </a:solidFill>
                 <a:latin typeface="Yu Gothic" pitchFamily="34" charset="0"/>
                 <a:ea typeface="Yu Gothic" pitchFamily="34" charset="-122"/>
@@ -5440,15 +6239,15 @@
           </a:xfrm>
           <a:prstGeom prst="roundRect">
             <a:avLst>
-              <a:gd name="adj" fmla="val 3125"/>
+              <a:gd name="adj" fmla="val 1875"/>
             </a:avLst>
           </a:prstGeom>
           <a:solidFill>
-            <a:srgbClr val="FCEFE9"/>
+            <a:srgbClr val="0E2A2A"/>
           </a:solidFill>
           <a:ln w="12700">
             <a:solidFill>
-              <a:srgbClr val="F0C9B8"/>
+              <a:srgbClr val="2A6B62"/>
             </a:solidFill>
             <a:prstDash val="solid"/>
           </a:ln>
@@ -5481,7 +6280,7 @@
             <a:r>
               <a:rPr lang="en-US" sz="1300" b="1" spc="150" kern="0" dirty="0">
                 <a:solidFill>
-                  <a:srgbClr val="E2603C"/>
+                  <a:srgbClr val="3FE0C8"/>
                 </a:solidFill>
                 <a:latin typeface="Yu Gothic" pitchFamily="34" charset="0"/>
                 <a:ea typeface="Yu Gothic" pitchFamily="34" charset="-122"/>
@@ -5520,7 +6319,7 @@
             <a:r>
               <a:rPr lang="en-US" sz="2100" b="1" dirty="0">
                 <a:solidFill>
-                  <a:srgbClr val="12151C"/>
+                  <a:srgbClr val="FFFFFF"/>
                 </a:solidFill>
                 <a:latin typeface="Yu Gothic" pitchFamily="34" charset="0"/>
                 <a:ea typeface="Yu Gothic" pitchFamily="34" charset="-122"/>
@@ -5541,7 +6340,7 @@
         <p:spPr>
           <a:xfrm>
             <a:off x="6601968" y="3611880"/>
-            <a:ext cx="4489704" cy="1280160"/>
+            <a:ext cx="4489704" cy="1371600"/>
           </a:xfrm>
           <a:prstGeom prst="rect">
             <a:avLst/>
@@ -5563,7 +6362,7 @@
             <a:r>
               <a:rPr lang="en-US" sz="1350" dirty="0">
                 <a:solidFill>
-                  <a:srgbClr val="1D2230"/>
+                  <a:srgbClr val="FFFFFF"/>
                 </a:solidFill>
                 <a:latin typeface="Yu Gothic" pitchFamily="34" charset="0"/>
                 <a:ea typeface="Yu Gothic" pitchFamily="34" charset="-122"/>
@@ -5584,7 +6383,7 @@
             <a:r>
               <a:rPr lang="en-US" sz="1350" dirty="0">
                 <a:solidFill>
-                  <a:srgbClr val="1D2230"/>
+                  <a:srgbClr val="FFFFFF"/>
                 </a:solidFill>
                 <a:latin typeface="Yu Gothic" pitchFamily="34" charset="0"/>
                 <a:ea typeface="Yu Gothic" pitchFamily="34" charset="-122"/>
@@ -5605,7 +6404,7 @@
             <a:r>
               <a:rPr lang="en-US" sz="1350" dirty="0">
                 <a:solidFill>
-                  <a:srgbClr val="1D2230"/>
+                  <a:srgbClr val="FFFFFF"/>
                 </a:solidFill>
                 <a:latin typeface="Yu Gothic" pitchFamily="34" charset="0"/>
                 <a:ea typeface="Yu Gothic" pitchFamily="34" charset="-122"/>
@@ -5626,7 +6425,7 @@
             <a:r>
               <a:rPr lang="en-US" sz="1350" dirty="0">
                 <a:solidFill>
-                  <a:srgbClr val="1D2230"/>
+                  <a:srgbClr val="FFFFFF"/>
                 </a:solidFill>
                 <a:latin typeface="Yu Gothic" pitchFamily="34" charset="0"/>
                 <a:ea typeface="Yu Gothic" pitchFamily="34" charset="-122"/>
@@ -5665,7 +6464,7 @@
             <a:r>
               <a:rPr lang="en-US" sz="1500" b="1" dirty="0">
                 <a:solidFill>
-                  <a:srgbClr val="E2603C"/>
+                  <a:srgbClr val="3FE0C8"/>
                 </a:solidFill>
                 <a:latin typeface="Yu Gothic" pitchFamily="34" charset="0"/>
                 <a:ea typeface="Yu Gothic" pitchFamily="34" charset="-122"/>
@@ -5691,7 +6490,7 @@
     <p:bg>
       <p:bgPr>
         <a:solidFill>
-          <a:srgbClr val="FFFFFF"/>
+          <a:srgbClr val="0A0D14"/>
         </a:solidFill>
       </p:bgPr>
     </p:bg>
@@ -5717,16 +6516,23 @@
         </p:nvSpPr>
         <p:spPr>
           <a:xfrm>
-            <a:off x="685800" y="548640"/>
-            <a:ext cx="457200" cy="457200"/>
-          </a:xfrm>
-          <a:prstGeom prst="ellipse">
-            <a:avLst/>
-          </a:prstGeom>
-          <a:solidFill>
-            <a:srgbClr val="E2603C"/>
-          </a:solidFill>
-          <a:ln/>
+            <a:off x="685800" y="566928"/>
+            <a:ext cx="566928" cy="402336"/>
+          </a:xfrm>
+          <a:prstGeom prst="roundRect">
+            <a:avLst>
+              <a:gd name="adj" fmla="val 11364"/>
+            </a:avLst>
+          </a:prstGeom>
+          <a:solidFill>
+            <a:srgbClr val="0E2A2A"/>
+          </a:solidFill>
+          <a:ln w="12700">
+            <a:solidFill>
+              <a:srgbClr val="2A6B62"/>
+            </a:solidFill>
+            <a:prstDash val="solid"/>
+          </a:ln>
         </p:spPr>
       </p:sp>
       <p:sp>
@@ -5737,8 +6543,8 @@
         </p:nvSpPr>
         <p:spPr>
           <a:xfrm>
-            <a:off x="685800" y="548640"/>
-            <a:ext cx="457200" cy="457200"/>
+            <a:off x="685800" y="566928"/>
+            <a:ext cx="566928" cy="402336"/>
           </a:xfrm>
           <a:prstGeom prst="rect">
             <a:avLst/>
@@ -5754,17 +6560,17 @@
               <a:buNone/>
             </a:pPr>
             <a:r>
-              <a:rPr lang="en-US" sz="1500" b="1" dirty="0">
-                <a:solidFill>
-                  <a:srgbClr val="FFFFFF"/>
-                </a:solidFill>
-                <a:latin typeface="Yu Gothic" pitchFamily="34" charset="0"/>
-                <a:ea typeface="Yu Gothic" pitchFamily="34" charset="-122"/>
-                <a:cs typeface="Yu Gothic" pitchFamily="34" charset="-120"/>
+              <a:rPr lang="en-US" sz="1400" b="1" dirty="0">
+                <a:solidFill>
+                  <a:srgbClr val="3FE0C8"/>
+                </a:solidFill>
+                <a:latin typeface="Courier New" pitchFamily="34" charset="0"/>
+                <a:ea typeface="Courier New" pitchFamily="34" charset="-122"/>
+                <a:cs typeface="Courier New" pitchFamily="34" charset="-120"/>
               </a:rPr>
               <a:t>01</a:t>
             </a:r>
-            <a:endParaRPr lang="en-US" sz="1500" dirty="0"/>
+            <a:endParaRPr lang="en-US" sz="1400" dirty="0"/>
           </a:p>
         </p:txBody>
       </p:sp>
@@ -5776,8 +6582,8 @@
         </p:nvSpPr>
         <p:spPr>
           <a:xfrm>
-            <a:off x="1307592" y="548640"/>
-            <a:ext cx="7315200" cy="457200"/>
+            <a:off x="1417320" y="566928"/>
+            <a:ext cx="8229600" cy="402336"/>
           </a:xfrm>
           <a:prstGeom prst="rect">
             <a:avLst/>
@@ -5795,7 +6601,7 @@
             <a:r>
               <a:rPr lang="en-US" sz="1300" b="1" spc="150" kern="0" dirty="0">
                 <a:solidFill>
-                  <a:srgbClr val="6E7891"/>
+                  <a:srgbClr val="8794AE"/>
                 </a:solidFill>
                 <a:latin typeface="Yu Gothic" pitchFamily="34" charset="0"/>
                 <a:ea typeface="Yu Gothic" pitchFamily="34" charset="-122"/>
@@ -5837,7 +6643,7 @@
             <a:r>
               <a:rPr lang="en-US" sz="3300" b="1" dirty="0">
                 <a:solidFill>
-                  <a:srgbClr val="12151C"/>
+                  <a:srgbClr val="FFFFFF"/>
                 </a:solidFill>
                 <a:latin typeface="Yu Gothic" pitchFamily="34" charset="0"/>
                 <a:ea typeface="Yu Gothic" pitchFamily="34" charset="-122"/>
@@ -5895,7 +6701,7 @@
                   <a:tcPr marL="177800" marR="177800" marT="76200" marB="76200" anchor="ctr">
                     <a:lnL w="12700" cap="flat" cmpd="sng" algn="ctr">
                       <a:solidFill>
-                        <a:srgbClr val="E2E5EB"/>
+                        <a:srgbClr val="232C42"/>
                       </a:solidFill>
                       <a:prstDash val="solid"/>
                       <a:round/>
@@ -5904,7 +6710,7 @@
                     </a:lnL>
                     <a:lnR w="12700" cap="flat" cmpd="sng" algn="ctr">
                       <a:solidFill>
-                        <a:srgbClr val="E2E5EB"/>
+                        <a:srgbClr val="232C42"/>
                       </a:solidFill>
                       <a:prstDash val="solid"/>
                       <a:round/>
@@ -5913,7 +6719,7 @@
                     </a:lnR>
                     <a:lnT w="12700" cap="flat" cmpd="sng" algn="ctr">
                       <a:solidFill>
-                        <a:srgbClr val="E2E5EB"/>
+                        <a:srgbClr val="232C42"/>
                       </a:solidFill>
                       <a:prstDash val="solid"/>
                       <a:round/>
@@ -5922,7 +6728,7 @@
                     </a:lnT>
                     <a:lnB w="12700" cap="flat" cmpd="sng" algn="ctr">
                       <a:solidFill>
-                        <a:srgbClr val="E2E5EB"/>
+                        <a:srgbClr val="232C42"/>
                       </a:solidFill>
                       <a:prstDash val="solid"/>
                       <a:round/>
@@ -5930,7 +6736,7 @@
                       <a:tailEnd type="none" w="med" len="med"/>
                     </a:lnB>
                     <a:solidFill>
-                      <a:srgbClr val="FFFFFF"/>
+                      <a:srgbClr val="0A0D14"/>
                     </a:solidFill>
                   </a:tcPr>
                 </a:tc>
@@ -5945,7 +6751,7 @@
                       <a:r>
                         <a:rPr lang="en-US" sz="1350" b="1" dirty="0">
                           <a:solidFill>
-                            <a:srgbClr val="1C7293"/>
+                            <a:srgbClr val="8E7BFF"/>
                           </a:solidFill>
                           <a:latin typeface="Yu Gothic" pitchFamily="34" charset="0"/>
                           <a:ea typeface="Yu Gothic" pitchFamily="34" charset="-122"/>
@@ -5963,7 +6769,7 @@
                   <a:tcPr marL="177800" marR="177800" marT="76200" marB="76200" anchor="ctr">
                     <a:lnL w="12700" cap="flat" cmpd="sng" algn="ctr">
                       <a:solidFill>
-                        <a:srgbClr val="E2E5EB"/>
+                        <a:srgbClr val="232C42"/>
                       </a:solidFill>
                       <a:prstDash val="solid"/>
                       <a:round/>
@@ -5972,7 +6778,7 @@
                     </a:lnL>
                     <a:lnR w="12700" cap="flat" cmpd="sng" algn="ctr">
                       <a:solidFill>
-                        <a:srgbClr val="E2E5EB"/>
+                        <a:srgbClr val="232C42"/>
                       </a:solidFill>
                       <a:prstDash val="solid"/>
                       <a:round/>
@@ -5981,7 +6787,7 @@
                     </a:lnR>
                     <a:lnT w="12700" cap="flat" cmpd="sng" algn="ctr">
                       <a:solidFill>
-                        <a:srgbClr val="E2E5EB"/>
+                        <a:srgbClr val="232C42"/>
                       </a:solidFill>
                       <a:prstDash val="solid"/>
                       <a:round/>
@@ -5990,7 +6796,7 @@
                     </a:lnT>
                     <a:lnB w="12700" cap="flat" cmpd="sng" algn="ctr">
                       <a:solidFill>
-                        <a:srgbClr val="E2E5EB"/>
+                        <a:srgbClr val="232C42"/>
                       </a:solidFill>
                       <a:prstDash val="solid"/>
                       <a:round/>
@@ -5998,7 +6804,7 @@
                       <a:tailEnd type="none" w="med" len="med"/>
                     </a:lnB>
                     <a:solidFill>
-                      <a:srgbClr val="E8F1F5"/>
+                      <a:srgbClr val="1A1733"/>
                     </a:solidFill>
                   </a:tcPr>
                 </a:tc>
@@ -6013,7 +6819,7 @@
                       <a:r>
                         <a:rPr lang="en-US" sz="1350" b="1" dirty="0">
                           <a:solidFill>
-                            <a:srgbClr val="E2603C"/>
+                            <a:srgbClr val="3FE0C8"/>
                           </a:solidFill>
                           <a:latin typeface="Yu Gothic" pitchFamily="34" charset="0"/>
                           <a:ea typeface="Yu Gothic" pitchFamily="34" charset="-122"/>
@@ -6031,7 +6837,7 @@
                   <a:tcPr marL="177800" marR="177800" marT="76200" marB="76200" anchor="ctr">
                     <a:lnL w="12700" cap="flat" cmpd="sng" algn="ctr">
                       <a:solidFill>
-                        <a:srgbClr val="E2E5EB"/>
+                        <a:srgbClr val="232C42"/>
                       </a:solidFill>
                       <a:prstDash val="solid"/>
                       <a:round/>
@@ -6040,7 +6846,7 @@
                     </a:lnL>
                     <a:lnR w="12700" cap="flat" cmpd="sng" algn="ctr">
                       <a:solidFill>
-                        <a:srgbClr val="E2E5EB"/>
+                        <a:srgbClr val="232C42"/>
                       </a:solidFill>
                       <a:prstDash val="solid"/>
                       <a:round/>
@@ -6049,7 +6855,7 @@
                     </a:lnR>
                     <a:lnT w="12700" cap="flat" cmpd="sng" algn="ctr">
                       <a:solidFill>
-                        <a:srgbClr val="E2E5EB"/>
+                        <a:srgbClr val="232C42"/>
                       </a:solidFill>
                       <a:prstDash val="solid"/>
                       <a:round/>
@@ -6058,7 +6864,7 @@
                     </a:lnT>
                     <a:lnB w="12700" cap="flat" cmpd="sng" algn="ctr">
                       <a:solidFill>
-                        <a:srgbClr val="E2E5EB"/>
+                        <a:srgbClr val="232C42"/>
                       </a:solidFill>
                       <a:prstDash val="solid"/>
                       <a:round/>
@@ -6066,7 +6872,7 @@
                       <a:tailEnd type="none" w="med" len="med"/>
                     </a:lnB>
                     <a:solidFill>
-                      <a:srgbClr val="FCEFE9"/>
+                      <a:srgbClr val="0E2A2A"/>
                     </a:solidFill>
                   </a:tcPr>
                 </a:tc>
@@ -6083,7 +6889,7 @@
                       <a:r>
                         <a:rPr lang="en-US" sz="1350" b="1" dirty="0">
                           <a:solidFill>
-                            <a:srgbClr val="12151C"/>
+                            <a:srgbClr val="FFFFFF"/>
                           </a:solidFill>
                           <a:latin typeface="Yu Gothic" pitchFamily="34" charset="0"/>
                           <a:ea typeface="Yu Gothic" pitchFamily="34" charset="-122"/>
@@ -6101,7 +6907,7 @@
                   <a:tcPr marL="177800" marR="177800" marT="76200" marB="76200" anchor="ctr">
                     <a:lnL w="12700" cap="flat" cmpd="sng" algn="ctr">
                       <a:solidFill>
-                        <a:srgbClr val="E2E5EB"/>
+                        <a:srgbClr val="232C42"/>
                       </a:solidFill>
                       <a:prstDash val="solid"/>
                       <a:round/>
@@ -6110,7 +6916,7 @@
                     </a:lnL>
                     <a:lnR w="12700" cap="flat" cmpd="sng" algn="ctr">
                       <a:solidFill>
-                        <a:srgbClr val="E2E5EB"/>
+                        <a:srgbClr val="232C42"/>
                       </a:solidFill>
                       <a:prstDash val="solid"/>
                       <a:round/>
@@ -6119,7 +6925,7 @@
                     </a:lnR>
                     <a:lnT w="12700" cap="flat" cmpd="sng" algn="ctr">
                       <a:solidFill>
-                        <a:srgbClr val="E2E5EB"/>
+                        <a:srgbClr val="232C42"/>
                       </a:solidFill>
                       <a:prstDash val="solid"/>
                       <a:round/>
@@ -6128,13 +6934,16 @@
                     </a:lnT>
                     <a:lnB w="12700" cap="flat" cmpd="sng" algn="ctr">
                       <a:solidFill>
-                        <a:srgbClr val="E2E5EB"/>
+                        <a:srgbClr val="232C42"/>
                       </a:solidFill>
                       <a:prstDash val="solid"/>
                       <a:round/>
                       <a:headEnd type="none" w="med" len="med"/>
                       <a:tailEnd type="none" w="med" len="med"/>
                     </a:lnB>
+                    <a:solidFill>
+                      <a:srgbClr val="121826"/>
+                    </a:solidFill>
                   </a:tcPr>
                 </a:tc>
                 <a:tc>
@@ -6148,7 +6957,7 @@
                       <a:r>
                         <a:rPr lang="en-US" sz="1350" dirty="0">
                           <a:solidFill>
-                            <a:srgbClr val="39435A"/>
+                            <a:srgbClr val="8794AE"/>
                           </a:solidFill>
                           <a:latin typeface="Yu Gothic" pitchFamily="34" charset="0"/>
                           <a:ea typeface="Yu Gothic" pitchFamily="34" charset="-122"/>
@@ -6166,7 +6975,7 @@
                   <a:tcPr marL="177800" marR="177800" marT="76200" marB="76200" anchor="ctr">
                     <a:lnL w="12700" cap="flat" cmpd="sng" algn="ctr">
                       <a:solidFill>
-                        <a:srgbClr val="E2E5EB"/>
+                        <a:srgbClr val="232C42"/>
                       </a:solidFill>
                       <a:prstDash val="solid"/>
                       <a:round/>
@@ -6175,7 +6984,7 @@
                     </a:lnL>
                     <a:lnR w="12700" cap="flat" cmpd="sng" algn="ctr">
                       <a:solidFill>
-                        <a:srgbClr val="E2E5EB"/>
+                        <a:srgbClr val="232C42"/>
                       </a:solidFill>
                       <a:prstDash val="solid"/>
                       <a:round/>
@@ -6184,7 +6993,7 @@
                     </a:lnR>
                     <a:lnT w="12700" cap="flat" cmpd="sng" algn="ctr">
                       <a:solidFill>
-                        <a:srgbClr val="E2E5EB"/>
+                        <a:srgbClr val="232C42"/>
                       </a:solidFill>
                       <a:prstDash val="solid"/>
                       <a:round/>
@@ -6193,13 +7002,16 @@
                     </a:lnT>
                     <a:lnB w="12700" cap="flat" cmpd="sng" algn="ctr">
                       <a:solidFill>
-                        <a:srgbClr val="E2E5EB"/>
+                        <a:srgbClr val="232C42"/>
                       </a:solidFill>
                       <a:prstDash val="solid"/>
                       <a:round/>
                       <a:headEnd type="none" w="med" len="med"/>
                       <a:tailEnd type="none" w="med" len="med"/>
                     </a:lnB>
+                    <a:solidFill>
+                      <a:srgbClr val="121826"/>
+                    </a:solidFill>
                   </a:tcPr>
                 </a:tc>
                 <a:tc>
@@ -6213,7 +7025,7 @@
                       <a:r>
                         <a:rPr lang="en-US" sz="1350" b="1" dirty="0">
                           <a:solidFill>
-                            <a:srgbClr val="12151C"/>
+                            <a:srgbClr val="FFFFFF"/>
                           </a:solidFill>
                           <a:latin typeface="Yu Gothic" pitchFamily="34" charset="0"/>
                           <a:ea typeface="Yu Gothic" pitchFamily="34" charset="-122"/>
@@ -6231,7 +7043,7 @@
                   <a:tcPr marL="177800" marR="177800" marT="76200" marB="76200" anchor="ctr">
                     <a:lnL w="12700" cap="flat" cmpd="sng" algn="ctr">
                       <a:solidFill>
-                        <a:srgbClr val="E2E5EB"/>
+                        <a:srgbClr val="232C42"/>
                       </a:solidFill>
                       <a:prstDash val="solid"/>
                       <a:round/>
@@ -6240,7 +7052,7 @@
                     </a:lnL>
                     <a:lnR w="12700" cap="flat" cmpd="sng" algn="ctr">
                       <a:solidFill>
-                        <a:srgbClr val="E2E5EB"/>
+                        <a:srgbClr val="232C42"/>
                       </a:solidFill>
                       <a:prstDash val="solid"/>
                       <a:round/>
@@ -6249,7 +7061,7 @@
                     </a:lnR>
                     <a:lnT w="12700" cap="flat" cmpd="sng" algn="ctr">
                       <a:solidFill>
-                        <a:srgbClr val="E2E5EB"/>
+                        <a:srgbClr val="232C42"/>
                       </a:solidFill>
                       <a:prstDash val="solid"/>
                       <a:round/>
@@ -6258,13 +7070,16 @@
                     </a:lnT>
                     <a:lnB w="12700" cap="flat" cmpd="sng" algn="ctr">
                       <a:solidFill>
-                        <a:srgbClr val="E2E5EB"/>
+                        <a:srgbClr val="232C42"/>
                       </a:solidFill>
                       <a:prstDash val="solid"/>
                       <a:round/>
                       <a:headEnd type="none" w="med" len="med"/>
                       <a:tailEnd type="none" w="med" len="med"/>
                     </a:lnB>
+                    <a:solidFill>
+                      <a:srgbClr val="182034"/>
+                    </a:solidFill>
                   </a:tcPr>
                 </a:tc>
               </a:tr>
@@ -6280,7 +7095,7 @@
                       <a:r>
                         <a:rPr lang="en-US" sz="1350" b="1" dirty="0">
                           <a:solidFill>
-                            <a:srgbClr val="12151C"/>
+                            <a:srgbClr val="FFFFFF"/>
                           </a:solidFill>
                           <a:latin typeface="Yu Gothic" pitchFamily="34" charset="0"/>
                           <a:ea typeface="Yu Gothic" pitchFamily="34" charset="-122"/>
@@ -6298,7 +7113,7 @@
                   <a:tcPr marL="177800" marR="177800" marT="76200" marB="76200" anchor="ctr">
                     <a:lnL w="12700" cap="flat" cmpd="sng" algn="ctr">
                       <a:solidFill>
-                        <a:srgbClr val="E2E5EB"/>
+                        <a:srgbClr val="232C42"/>
                       </a:solidFill>
                       <a:prstDash val="solid"/>
                       <a:round/>
@@ -6307,7 +7122,7 @@
                     </a:lnL>
                     <a:lnR w="12700" cap="flat" cmpd="sng" algn="ctr">
                       <a:solidFill>
-                        <a:srgbClr val="E2E5EB"/>
+                        <a:srgbClr val="232C42"/>
                       </a:solidFill>
                       <a:prstDash val="solid"/>
                       <a:round/>
@@ -6316,7 +7131,7 @@
                     </a:lnR>
                     <a:lnT w="12700" cap="flat" cmpd="sng" algn="ctr">
                       <a:solidFill>
-                        <a:srgbClr val="E2E5EB"/>
+                        <a:srgbClr val="232C42"/>
                       </a:solidFill>
                       <a:prstDash val="solid"/>
                       <a:round/>
@@ -6325,13 +7140,16 @@
                     </a:lnT>
                     <a:lnB w="12700" cap="flat" cmpd="sng" algn="ctr">
                       <a:solidFill>
-                        <a:srgbClr val="E2E5EB"/>
+                        <a:srgbClr val="232C42"/>
                       </a:solidFill>
                       <a:prstDash val="solid"/>
                       <a:round/>
                       <a:headEnd type="none" w="med" len="med"/>
                       <a:tailEnd type="none" w="med" len="med"/>
                     </a:lnB>
+                    <a:solidFill>
+                      <a:srgbClr val="121826"/>
+                    </a:solidFill>
                   </a:tcPr>
                 </a:tc>
                 <a:tc>
@@ -6345,7 +7163,7 @@
                       <a:r>
                         <a:rPr lang="en-US" sz="1350" dirty="0">
                           <a:solidFill>
-                            <a:srgbClr val="39435A"/>
+                            <a:srgbClr val="8794AE"/>
                           </a:solidFill>
                           <a:latin typeface="Yu Gothic" pitchFamily="34" charset="0"/>
                           <a:ea typeface="Yu Gothic" pitchFamily="34" charset="-122"/>
@@ -6363,7 +7181,7 @@
                   <a:tcPr marL="177800" marR="177800" marT="76200" marB="76200" anchor="ctr">
                     <a:lnL w="12700" cap="flat" cmpd="sng" algn="ctr">
                       <a:solidFill>
-                        <a:srgbClr val="E2E5EB"/>
+                        <a:srgbClr val="232C42"/>
                       </a:solidFill>
                       <a:prstDash val="solid"/>
                       <a:round/>
@@ -6372,7 +7190,7 @@
                     </a:lnL>
                     <a:lnR w="12700" cap="flat" cmpd="sng" algn="ctr">
                       <a:solidFill>
-                        <a:srgbClr val="E2E5EB"/>
+                        <a:srgbClr val="232C42"/>
                       </a:solidFill>
                       <a:prstDash val="solid"/>
                       <a:round/>
@@ -6381,7 +7199,7 @@
                     </a:lnR>
                     <a:lnT w="12700" cap="flat" cmpd="sng" algn="ctr">
                       <a:solidFill>
-                        <a:srgbClr val="E2E5EB"/>
+                        <a:srgbClr val="232C42"/>
                       </a:solidFill>
                       <a:prstDash val="solid"/>
                       <a:round/>
@@ -6390,13 +7208,16 @@
                     </a:lnT>
                     <a:lnB w="12700" cap="flat" cmpd="sng" algn="ctr">
                       <a:solidFill>
-                        <a:srgbClr val="E2E5EB"/>
+                        <a:srgbClr val="232C42"/>
                       </a:solidFill>
                       <a:prstDash val="solid"/>
                       <a:round/>
                       <a:headEnd type="none" w="med" len="med"/>
                       <a:tailEnd type="none" w="med" len="med"/>
                     </a:lnB>
+                    <a:solidFill>
+                      <a:srgbClr val="121826"/>
+                    </a:solidFill>
                   </a:tcPr>
                 </a:tc>
                 <a:tc>
@@ -6410,7 +7231,7 @@
                       <a:r>
                         <a:rPr lang="en-US" sz="1350" b="1" dirty="0">
                           <a:solidFill>
-                            <a:srgbClr val="12151C"/>
+                            <a:srgbClr val="FFFFFF"/>
                           </a:solidFill>
                           <a:latin typeface="Yu Gothic" pitchFamily="34" charset="0"/>
                           <a:ea typeface="Yu Gothic" pitchFamily="34" charset="-122"/>
@@ -6428,7 +7249,7 @@
                   <a:tcPr marL="177800" marR="177800" marT="76200" marB="76200" anchor="ctr">
                     <a:lnL w="12700" cap="flat" cmpd="sng" algn="ctr">
                       <a:solidFill>
-                        <a:srgbClr val="E2E5EB"/>
+                        <a:srgbClr val="232C42"/>
                       </a:solidFill>
                       <a:prstDash val="solid"/>
                       <a:round/>
@@ -6437,7 +7258,7 @@
                     </a:lnL>
                     <a:lnR w="12700" cap="flat" cmpd="sng" algn="ctr">
                       <a:solidFill>
-                        <a:srgbClr val="E2E5EB"/>
+                        <a:srgbClr val="232C42"/>
                       </a:solidFill>
                       <a:prstDash val="solid"/>
                       <a:round/>
@@ -6446,7 +7267,7 @@
                     </a:lnR>
                     <a:lnT w="12700" cap="flat" cmpd="sng" algn="ctr">
                       <a:solidFill>
-                        <a:srgbClr val="E2E5EB"/>
+                        <a:srgbClr val="232C42"/>
                       </a:solidFill>
                       <a:prstDash val="solid"/>
                       <a:round/>
@@ -6455,13 +7276,16 @@
                     </a:lnT>
                     <a:lnB w="12700" cap="flat" cmpd="sng" algn="ctr">
                       <a:solidFill>
-                        <a:srgbClr val="E2E5EB"/>
+                        <a:srgbClr val="232C42"/>
                       </a:solidFill>
                       <a:prstDash val="solid"/>
                       <a:round/>
                       <a:headEnd type="none" w="med" len="med"/>
                       <a:tailEnd type="none" w="med" len="med"/>
                     </a:lnB>
+                    <a:solidFill>
+                      <a:srgbClr val="182034"/>
+                    </a:solidFill>
                   </a:tcPr>
                 </a:tc>
               </a:tr>
@@ -6477,7 +7301,7 @@
                       <a:r>
                         <a:rPr lang="en-US" sz="1350" b="1" dirty="0">
                           <a:solidFill>
-                            <a:srgbClr val="12151C"/>
+                            <a:srgbClr val="FFFFFF"/>
                           </a:solidFill>
                           <a:latin typeface="Yu Gothic" pitchFamily="34" charset="0"/>
                           <a:ea typeface="Yu Gothic" pitchFamily="34" charset="-122"/>
@@ -6495,7 +7319,7 @@
                   <a:tcPr marL="177800" marR="177800" marT="76200" marB="76200" anchor="ctr">
                     <a:lnL w="12700" cap="flat" cmpd="sng" algn="ctr">
                       <a:solidFill>
-                        <a:srgbClr val="E2E5EB"/>
+                        <a:srgbClr val="232C42"/>
                       </a:solidFill>
                       <a:prstDash val="solid"/>
                       <a:round/>
@@ -6504,7 +7328,7 @@
                     </a:lnL>
                     <a:lnR w="12700" cap="flat" cmpd="sng" algn="ctr">
                       <a:solidFill>
-                        <a:srgbClr val="E2E5EB"/>
+                        <a:srgbClr val="232C42"/>
                       </a:solidFill>
                       <a:prstDash val="solid"/>
                       <a:round/>
@@ -6513,7 +7337,7 @@
                     </a:lnR>
                     <a:lnT w="12700" cap="flat" cmpd="sng" algn="ctr">
                       <a:solidFill>
-                        <a:srgbClr val="E2E5EB"/>
+                        <a:srgbClr val="232C42"/>
                       </a:solidFill>
                       <a:prstDash val="solid"/>
                       <a:round/>
@@ -6522,13 +7346,16 @@
                     </a:lnT>
                     <a:lnB w="12700" cap="flat" cmpd="sng" algn="ctr">
                       <a:solidFill>
-                        <a:srgbClr val="E2E5EB"/>
+                        <a:srgbClr val="232C42"/>
                       </a:solidFill>
                       <a:prstDash val="solid"/>
                       <a:round/>
                       <a:headEnd type="none" w="med" len="med"/>
                       <a:tailEnd type="none" w="med" len="med"/>
                     </a:lnB>
+                    <a:solidFill>
+                      <a:srgbClr val="121826"/>
+                    </a:solidFill>
                   </a:tcPr>
                 </a:tc>
                 <a:tc>
@@ -6542,7 +7369,7 @@
                       <a:r>
                         <a:rPr lang="en-US" sz="1350" dirty="0">
                           <a:solidFill>
-                            <a:srgbClr val="39435A"/>
+                            <a:srgbClr val="8794AE"/>
                           </a:solidFill>
                           <a:latin typeface="Yu Gothic" pitchFamily="34" charset="0"/>
                           <a:ea typeface="Yu Gothic" pitchFamily="34" charset="-122"/>
@@ -6560,7 +7387,7 @@
                   <a:tcPr marL="177800" marR="177800" marT="76200" marB="76200" anchor="ctr">
                     <a:lnL w="12700" cap="flat" cmpd="sng" algn="ctr">
                       <a:solidFill>
-                        <a:srgbClr val="E2E5EB"/>
+                        <a:srgbClr val="232C42"/>
                       </a:solidFill>
                       <a:prstDash val="solid"/>
                       <a:round/>
@@ -6569,7 +7396,7 @@
                     </a:lnL>
                     <a:lnR w="12700" cap="flat" cmpd="sng" algn="ctr">
                       <a:solidFill>
-                        <a:srgbClr val="E2E5EB"/>
+                        <a:srgbClr val="232C42"/>
                       </a:solidFill>
                       <a:prstDash val="solid"/>
                       <a:round/>
@@ -6578,7 +7405,7 @@
                     </a:lnR>
                     <a:lnT w="12700" cap="flat" cmpd="sng" algn="ctr">
                       <a:solidFill>
-                        <a:srgbClr val="E2E5EB"/>
+                        <a:srgbClr val="232C42"/>
                       </a:solidFill>
                       <a:prstDash val="solid"/>
                       <a:round/>
@@ -6587,13 +7414,16 @@
                     </a:lnT>
                     <a:lnB w="12700" cap="flat" cmpd="sng" algn="ctr">
                       <a:solidFill>
-                        <a:srgbClr val="E2E5EB"/>
+                        <a:srgbClr val="232C42"/>
                       </a:solidFill>
                       <a:prstDash val="solid"/>
                       <a:round/>
                       <a:headEnd type="none" w="med" len="med"/>
                       <a:tailEnd type="none" w="med" len="med"/>
                     </a:lnB>
+                    <a:solidFill>
+                      <a:srgbClr val="121826"/>
+                    </a:solidFill>
                   </a:tcPr>
                 </a:tc>
                 <a:tc>
@@ -6607,7 +7437,7 @@
                       <a:r>
                         <a:rPr lang="en-US" sz="1350" b="1" dirty="0">
                           <a:solidFill>
-                            <a:srgbClr val="12151C"/>
+                            <a:srgbClr val="FFFFFF"/>
                           </a:solidFill>
                           <a:latin typeface="Yu Gothic" pitchFamily="34" charset="0"/>
                           <a:ea typeface="Yu Gothic" pitchFamily="34" charset="-122"/>
@@ -6625,7 +7455,7 @@
                   <a:tcPr marL="177800" marR="177800" marT="76200" marB="76200" anchor="ctr">
                     <a:lnL w="12700" cap="flat" cmpd="sng" algn="ctr">
                       <a:solidFill>
-                        <a:srgbClr val="E2E5EB"/>
+                        <a:srgbClr val="232C42"/>
                       </a:solidFill>
                       <a:prstDash val="solid"/>
                       <a:round/>
@@ -6634,7 +7464,7 @@
                     </a:lnL>
                     <a:lnR w="12700" cap="flat" cmpd="sng" algn="ctr">
                       <a:solidFill>
-                        <a:srgbClr val="E2E5EB"/>
+                        <a:srgbClr val="232C42"/>
                       </a:solidFill>
                       <a:prstDash val="solid"/>
                       <a:round/>
@@ -6643,7 +7473,7 @@
                     </a:lnR>
                     <a:lnT w="12700" cap="flat" cmpd="sng" algn="ctr">
                       <a:solidFill>
-                        <a:srgbClr val="E2E5EB"/>
+                        <a:srgbClr val="232C42"/>
                       </a:solidFill>
                       <a:prstDash val="solid"/>
                       <a:round/>
@@ -6652,13 +7482,16 @@
                     </a:lnT>
                     <a:lnB w="12700" cap="flat" cmpd="sng" algn="ctr">
                       <a:solidFill>
-                        <a:srgbClr val="E2E5EB"/>
+                        <a:srgbClr val="232C42"/>
                       </a:solidFill>
                       <a:prstDash val="solid"/>
                       <a:round/>
                       <a:headEnd type="none" w="med" len="med"/>
                       <a:tailEnd type="none" w="med" len="med"/>
                     </a:lnB>
+                    <a:solidFill>
+                      <a:srgbClr val="182034"/>
+                    </a:solidFill>
                   </a:tcPr>
                 </a:tc>
               </a:tr>
@@ -6674,7 +7507,7 @@
                       <a:r>
                         <a:rPr lang="en-US" sz="1350" b="1" dirty="0">
                           <a:solidFill>
-                            <a:srgbClr val="12151C"/>
+                            <a:srgbClr val="FFFFFF"/>
                           </a:solidFill>
                           <a:latin typeface="Yu Gothic" pitchFamily="34" charset="0"/>
                           <a:ea typeface="Yu Gothic" pitchFamily="34" charset="-122"/>
@@ -6692,7 +7525,7 @@
                   <a:tcPr marL="177800" marR="177800" marT="76200" marB="76200" anchor="ctr">
                     <a:lnL w="12700" cap="flat" cmpd="sng" algn="ctr">
                       <a:solidFill>
-                        <a:srgbClr val="E2E5EB"/>
+                        <a:srgbClr val="232C42"/>
                       </a:solidFill>
                       <a:prstDash val="solid"/>
                       <a:round/>
@@ -6701,7 +7534,7 @@
                     </a:lnL>
                     <a:lnR w="12700" cap="flat" cmpd="sng" algn="ctr">
                       <a:solidFill>
-                        <a:srgbClr val="E2E5EB"/>
+                        <a:srgbClr val="232C42"/>
                       </a:solidFill>
                       <a:prstDash val="solid"/>
                       <a:round/>
@@ -6710,7 +7543,7 @@
                     </a:lnR>
                     <a:lnT w="12700" cap="flat" cmpd="sng" algn="ctr">
                       <a:solidFill>
-                        <a:srgbClr val="E2E5EB"/>
+                        <a:srgbClr val="232C42"/>
                       </a:solidFill>
                       <a:prstDash val="solid"/>
                       <a:round/>
@@ -6719,13 +7552,16 @@
                     </a:lnT>
                     <a:lnB w="12700" cap="flat" cmpd="sng" algn="ctr">
                       <a:solidFill>
-                        <a:srgbClr val="E2E5EB"/>
+                        <a:srgbClr val="232C42"/>
                       </a:solidFill>
                       <a:prstDash val="solid"/>
                       <a:round/>
                       <a:headEnd type="none" w="med" len="med"/>
                       <a:tailEnd type="none" w="med" len="med"/>
                     </a:lnB>
+                    <a:solidFill>
+                      <a:srgbClr val="121826"/>
+                    </a:solidFill>
                   </a:tcPr>
                 </a:tc>
                 <a:tc>
@@ -6739,7 +7575,7 @@
                       <a:r>
                         <a:rPr lang="en-US" sz="1350" dirty="0">
                           <a:solidFill>
-                            <a:srgbClr val="39435A"/>
+                            <a:srgbClr val="8794AE"/>
                           </a:solidFill>
                           <a:latin typeface="Yu Gothic" pitchFamily="34" charset="0"/>
                           <a:ea typeface="Yu Gothic" pitchFamily="34" charset="-122"/>
@@ -6757,7 +7593,7 @@
                   <a:tcPr marL="177800" marR="177800" marT="76200" marB="76200" anchor="ctr">
                     <a:lnL w="12700" cap="flat" cmpd="sng" algn="ctr">
                       <a:solidFill>
-                        <a:srgbClr val="E2E5EB"/>
+                        <a:srgbClr val="232C42"/>
                       </a:solidFill>
                       <a:prstDash val="solid"/>
                       <a:round/>
@@ -6766,7 +7602,7 @@
                     </a:lnL>
                     <a:lnR w="12700" cap="flat" cmpd="sng" algn="ctr">
                       <a:solidFill>
-                        <a:srgbClr val="E2E5EB"/>
+                        <a:srgbClr val="232C42"/>
                       </a:solidFill>
                       <a:prstDash val="solid"/>
                       <a:round/>
@@ -6775,7 +7611,7 @@
                     </a:lnR>
                     <a:lnT w="12700" cap="flat" cmpd="sng" algn="ctr">
                       <a:solidFill>
-                        <a:srgbClr val="E2E5EB"/>
+                        <a:srgbClr val="232C42"/>
                       </a:solidFill>
                       <a:prstDash val="solid"/>
                       <a:round/>
@@ -6784,13 +7620,16 @@
                     </a:lnT>
                     <a:lnB w="12700" cap="flat" cmpd="sng" algn="ctr">
                       <a:solidFill>
-                        <a:srgbClr val="E2E5EB"/>
+                        <a:srgbClr val="232C42"/>
                       </a:solidFill>
                       <a:prstDash val="solid"/>
                       <a:round/>
                       <a:headEnd type="none" w="med" len="med"/>
                       <a:tailEnd type="none" w="med" len="med"/>
                     </a:lnB>
+                    <a:solidFill>
+                      <a:srgbClr val="121826"/>
+                    </a:solidFill>
                   </a:tcPr>
                 </a:tc>
                 <a:tc>
@@ -6804,7 +7643,7 @@
                       <a:r>
                         <a:rPr lang="en-US" sz="1350" b="1" dirty="0">
                           <a:solidFill>
-                            <a:srgbClr val="12151C"/>
+                            <a:srgbClr val="FFFFFF"/>
                           </a:solidFill>
                           <a:latin typeface="Yu Gothic" pitchFamily="34" charset="0"/>
                           <a:ea typeface="Yu Gothic" pitchFamily="34" charset="-122"/>
@@ -6822,7 +7661,7 @@
                   <a:tcPr marL="177800" marR="177800" marT="76200" marB="76200" anchor="ctr">
                     <a:lnL w="12700" cap="flat" cmpd="sng" algn="ctr">
                       <a:solidFill>
-                        <a:srgbClr val="E2E5EB"/>
+                        <a:srgbClr val="232C42"/>
                       </a:solidFill>
                       <a:prstDash val="solid"/>
                       <a:round/>
@@ -6831,7 +7670,7 @@
                     </a:lnL>
                     <a:lnR w="12700" cap="flat" cmpd="sng" algn="ctr">
                       <a:solidFill>
-                        <a:srgbClr val="E2E5EB"/>
+                        <a:srgbClr val="232C42"/>
                       </a:solidFill>
                       <a:prstDash val="solid"/>
                       <a:round/>
@@ -6840,7 +7679,7 @@
                     </a:lnR>
                     <a:lnT w="12700" cap="flat" cmpd="sng" algn="ctr">
                       <a:solidFill>
-                        <a:srgbClr val="E2E5EB"/>
+                        <a:srgbClr val="232C42"/>
                       </a:solidFill>
                       <a:prstDash val="solid"/>
                       <a:round/>
@@ -6849,13 +7688,16 @@
                     </a:lnT>
                     <a:lnB w="12700" cap="flat" cmpd="sng" algn="ctr">
                       <a:solidFill>
-                        <a:srgbClr val="E2E5EB"/>
+                        <a:srgbClr val="232C42"/>
                       </a:solidFill>
                       <a:prstDash val="solid"/>
                       <a:round/>
                       <a:headEnd type="none" w="med" len="med"/>
                       <a:tailEnd type="none" w="med" len="med"/>
                     </a:lnB>
+                    <a:solidFill>
+                      <a:srgbClr val="182034"/>
+                    </a:solidFill>
                   </a:tcPr>
                 </a:tc>
               </a:tr>
@@ -6890,7 +7732,7 @@
             <a:r>
               <a:rPr lang="en-US" sz="1300" dirty="0">
                 <a:solidFill>
-                  <a:srgbClr val="6E7891"/>
+                  <a:srgbClr val="8794AE"/>
                 </a:solidFill>
                 <a:latin typeface="Yu Gothic" pitchFamily="34" charset="0"/>
                 <a:ea typeface="Yu Gothic" pitchFamily="34" charset="-122"/>
@@ -6916,7 +7758,7 @@
     <p:bg>
       <p:bgPr>
         <a:solidFill>
-          <a:srgbClr val="FFFFFF"/>
+          <a:srgbClr val="0A0D14"/>
         </a:solidFill>
       </p:bgPr>
     </p:bg>
@@ -6942,16 +7784,23 @@
         </p:nvSpPr>
         <p:spPr>
           <a:xfrm>
-            <a:off x="685800" y="548640"/>
-            <a:ext cx="457200" cy="457200"/>
-          </a:xfrm>
-          <a:prstGeom prst="ellipse">
-            <a:avLst/>
-          </a:prstGeom>
-          <a:solidFill>
-            <a:srgbClr val="E2603C"/>
-          </a:solidFill>
-          <a:ln/>
+            <a:off x="685800" y="566928"/>
+            <a:ext cx="566928" cy="402336"/>
+          </a:xfrm>
+          <a:prstGeom prst="roundRect">
+            <a:avLst>
+              <a:gd name="adj" fmla="val 11364"/>
+            </a:avLst>
+          </a:prstGeom>
+          <a:solidFill>
+            <a:srgbClr val="0E2A2A"/>
+          </a:solidFill>
+          <a:ln w="12700">
+            <a:solidFill>
+              <a:srgbClr val="2A6B62"/>
+            </a:solidFill>
+            <a:prstDash val="solid"/>
+          </a:ln>
         </p:spPr>
       </p:sp>
       <p:sp>
@@ -6962,8 +7811,8 @@
         </p:nvSpPr>
         <p:spPr>
           <a:xfrm>
-            <a:off x="685800" y="548640"/>
-            <a:ext cx="457200" cy="457200"/>
+            <a:off x="685800" y="566928"/>
+            <a:ext cx="566928" cy="402336"/>
           </a:xfrm>
           <a:prstGeom prst="rect">
             <a:avLst/>
@@ -6979,17 +7828,17 @@
               <a:buNone/>
             </a:pPr>
             <a:r>
-              <a:rPr lang="en-US" sz="1500" b="1" dirty="0">
-                <a:solidFill>
-                  <a:srgbClr val="FFFFFF"/>
-                </a:solidFill>
-                <a:latin typeface="Yu Gothic" pitchFamily="34" charset="0"/>
-                <a:ea typeface="Yu Gothic" pitchFamily="34" charset="-122"/>
-                <a:cs typeface="Yu Gothic" pitchFamily="34" charset="-120"/>
+              <a:rPr lang="en-US" sz="1400" b="1" dirty="0">
+                <a:solidFill>
+                  <a:srgbClr val="3FE0C8"/>
+                </a:solidFill>
+                <a:latin typeface="Courier New" pitchFamily="34" charset="0"/>
+                <a:ea typeface="Courier New" pitchFamily="34" charset="-122"/>
+                <a:cs typeface="Courier New" pitchFamily="34" charset="-120"/>
               </a:rPr>
               <a:t>02</a:t>
             </a:r>
-            <a:endParaRPr lang="en-US" sz="1500" dirty="0"/>
+            <a:endParaRPr lang="en-US" sz="1400" dirty="0"/>
           </a:p>
         </p:txBody>
       </p:sp>
@@ -7001,8 +7850,8 @@
         </p:nvSpPr>
         <p:spPr>
           <a:xfrm>
-            <a:off x="1307592" y="548640"/>
-            <a:ext cx="7315200" cy="457200"/>
+            <a:off x="1417320" y="566928"/>
+            <a:ext cx="8229600" cy="402336"/>
           </a:xfrm>
           <a:prstGeom prst="rect">
             <a:avLst/>
@@ -7020,7 +7869,7 @@
             <a:r>
               <a:rPr lang="en-US" sz="1300" b="1" spc="150" kern="0" dirty="0">
                 <a:solidFill>
-                  <a:srgbClr val="6E7891"/>
+                  <a:srgbClr val="8794AE"/>
                 </a:solidFill>
                 <a:latin typeface="Yu Gothic" pitchFamily="34" charset="0"/>
                 <a:ea typeface="Yu Gothic" pitchFamily="34" charset="-122"/>
@@ -7062,7 +7911,7 @@
             <a:r>
               <a:rPr lang="en-US" sz="3300" b="1" dirty="0">
                 <a:solidFill>
-                  <a:srgbClr val="12151C"/>
+                  <a:srgbClr val="FFFFFF"/>
                 </a:solidFill>
                 <a:latin typeface="Yu Gothic" pitchFamily="34" charset="0"/>
                 <a:ea typeface="Yu Gothic" pitchFamily="34" charset="-122"/>
@@ -7085,13 +7934,20 @@
             <a:off x="685800" y="2386584"/>
             <a:ext cx="420624" cy="420624"/>
           </a:xfrm>
-          <a:prstGeom prst="ellipse">
-            <a:avLst/>
-          </a:prstGeom>
-          <a:solidFill>
-            <a:srgbClr val="E2603C"/>
-          </a:solidFill>
-          <a:ln/>
+          <a:prstGeom prst="roundRect">
+            <a:avLst>
+              <a:gd name="adj" fmla="val 10870"/>
+            </a:avLst>
+          </a:prstGeom>
+          <a:solidFill>
+            <a:srgbClr val="0E2A2A"/>
+          </a:solidFill>
+          <a:ln w="12700">
+            <a:solidFill>
+              <a:srgbClr val="2A6B62"/>
+            </a:solidFill>
+            <a:prstDash val="solid"/>
+          </a:ln>
         </p:spPr>
       </p:sp>
       <p:sp>
@@ -7119,9 +7975,9 @@
               <a:buNone/>
             </a:pPr>
             <a:r>
-              <a:rPr lang="en-US" sz="1500" b="1" dirty="0">
-                <a:solidFill>
-                  <a:srgbClr val="FFFFFF"/>
+              <a:rPr lang="en-US" sz="1400" b="1" dirty="0">
+                <a:solidFill>
+                  <a:srgbClr val="3FE0C8"/>
                 </a:solidFill>
                 <a:latin typeface="Arial" pitchFamily="34" charset="0"/>
                 <a:ea typeface="Arial" pitchFamily="34" charset="-122"/>
@@ -7129,7 +7985,7 @@
               </a:rPr>
               <a:t>✓</a:t>
             </a:r>
-            <a:endParaRPr lang="en-US" sz="1500" dirty="0"/>
+            <a:endParaRPr lang="en-US" sz="1400" dirty="0"/>
           </a:p>
         </p:txBody>
       </p:sp>
@@ -7160,7 +8016,7 @@
             <a:r>
               <a:rPr lang="en-US" sz="1800" b="1" dirty="0">
                 <a:solidFill>
-                  <a:srgbClr val="12151C"/>
+                  <a:srgbClr val="FFFFFF"/>
                 </a:solidFill>
                 <a:latin typeface="Yu Gothic" pitchFamily="34" charset="0"/>
                 <a:ea typeface="Yu Gothic" pitchFamily="34" charset="-122"/>
@@ -7202,7 +8058,7 @@
             <a:r>
               <a:rPr lang="en-US" sz="1300" dirty="0">
                 <a:solidFill>
-                  <a:srgbClr val="39435A"/>
+                  <a:srgbClr val="C4CDE0"/>
                 </a:solidFill>
                 <a:latin typeface="Yu Gothic" pitchFamily="34" charset="0"/>
                 <a:ea typeface="Yu Gothic" pitchFamily="34" charset="-122"/>
@@ -7225,13 +8081,20 @@
             <a:off x="685800" y="3557016"/>
             <a:ext cx="420624" cy="420624"/>
           </a:xfrm>
-          <a:prstGeom prst="ellipse">
-            <a:avLst/>
-          </a:prstGeom>
-          <a:solidFill>
-            <a:srgbClr val="E2603C"/>
-          </a:solidFill>
-          <a:ln/>
+          <a:prstGeom prst="roundRect">
+            <a:avLst>
+              <a:gd name="adj" fmla="val 10870"/>
+            </a:avLst>
+          </a:prstGeom>
+          <a:solidFill>
+            <a:srgbClr val="0E2A2A"/>
+          </a:solidFill>
+          <a:ln w="12700">
+            <a:solidFill>
+              <a:srgbClr val="2A6B62"/>
+            </a:solidFill>
+            <a:prstDash val="solid"/>
+          </a:ln>
         </p:spPr>
       </p:sp>
       <p:sp>
@@ -7259,9 +8122,9 @@
               <a:buNone/>
             </a:pPr>
             <a:r>
-              <a:rPr lang="en-US" sz="1500" b="1" dirty="0">
-                <a:solidFill>
-                  <a:srgbClr val="FFFFFF"/>
+              <a:rPr lang="en-US" sz="1400" b="1" dirty="0">
+                <a:solidFill>
+                  <a:srgbClr val="3FE0C8"/>
                 </a:solidFill>
                 <a:latin typeface="Arial" pitchFamily="34" charset="0"/>
                 <a:ea typeface="Arial" pitchFamily="34" charset="-122"/>
@@ -7269,7 +8132,7 @@
               </a:rPr>
               <a:t>✓</a:t>
             </a:r>
-            <a:endParaRPr lang="en-US" sz="1500" dirty="0"/>
+            <a:endParaRPr lang="en-US" sz="1400" dirty="0"/>
           </a:p>
         </p:txBody>
       </p:sp>
@@ -7300,7 +8163,7 @@
             <a:r>
               <a:rPr lang="en-US" sz="1800" b="1" dirty="0">
                 <a:solidFill>
-                  <a:srgbClr val="12151C"/>
+                  <a:srgbClr val="FFFFFF"/>
                 </a:solidFill>
                 <a:latin typeface="Yu Gothic" pitchFamily="34" charset="0"/>
                 <a:ea typeface="Yu Gothic" pitchFamily="34" charset="-122"/>
@@ -7342,7 +8205,7 @@
             <a:r>
               <a:rPr lang="en-US" sz="1300" dirty="0">
                 <a:solidFill>
-                  <a:srgbClr val="39435A"/>
+                  <a:srgbClr val="C4CDE0"/>
                 </a:solidFill>
                 <a:latin typeface="Yu Gothic" pitchFamily="34" charset="0"/>
                 <a:ea typeface="Yu Gothic" pitchFamily="34" charset="-122"/>
@@ -7365,13 +8228,20 @@
             <a:off x="685800" y="4727448"/>
             <a:ext cx="420624" cy="420624"/>
           </a:xfrm>
-          <a:prstGeom prst="ellipse">
-            <a:avLst/>
-          </a:prstGeom>
-          <a:solidFill>
-            <a:srgbClr val="E2603C"/>
-          </a:solidFill>
-          <a:ln/>
+          <a:prstGeom prst="roundRect">
+            <a:avLst>
+              <a:gd name="adj" fmla="val 10870"/>
+            </a:avLst>
+          </a:prstGeom>
+          <a:solidFill>
+            <a:srgbClr val="0E2A2A"/>
+          </a:solidFill>
+          <a:ln w="12700">
+            <a:solidFill>
+              <a:srgbClr val="2A6B62"/>
+            </a:solidFill>
+            <a:prstDash val="solid"/>
+          </a:ln>
         </p:spPr>
       </p:sp>
       <p:sp>
@@ -7399,9 +8269,9 @@
               <a:buNone/>
             </a:pPr>
             <a:r>
-              <a:rPr lang="en-US" sz="1500" b="1" dirty="0">
-                <a:solidFill>
-                  <a:srgbClr val="FFFFFF"/>
+              <a:rPr lang="en-US" sz="1400" b="1" dirty="0">
+                <a:solidFill>
+                  <a:srgbClr val="3FE0C8"/>
                 </a:solidFill>
                 <a:latin typeface="Arial" pitchFamily="34" charset="0"/>
                 <a:ea typeface="Arial" pitchFamily="34" charset="-122"/>
@@ -7409,7 +8279,7 @@
               </a:rPr>
               <a:t>✓</a:t>
             </a:r>
-            <a:endParaRPr lang="en-US" sz="1500" dirty="0"/>
+            <a:endParaRPr lang="en-US" sz="1400" dirty="0"/>
           </a:p>
         </p:txBody>
       </p:sp>
@@ -7440,7 +8310,7 @@
             <a:r>
               <a:rPr lang="en-US" sz="1800" b="1" dirty="0">
                 <a:solidFill>
-                  <a:srgbClr val="12151C"/>
+                  <a:srgbClr val="FFFFFF"/>
                 </a:solidFill>
                 <a:latin typeface="Yu Gothic" pitchFamily="34" charset="0"/>
                 <a:ea typeface="Yu Gothic" pitchFamily="34" charset="-122"/>
@@ -7482,7 +8352,7 @@
             <a:r>
               <a:rPr lang="en-US" sz="1300" dirty="0">
                 <a:solidFill>
-                  <a:srgbClr val="39435A"/>
+                  <a:srgbClr val="C4CDE0"/>
                 </a:solidFill>
                 <a:latin typeface="Yu Gothic" pitchFamily="34" charset="0"/>
                 <a:ea typeface="Yu Gothic" pitchFamily="34" charset="-122"/>
@@ -7507,25 +8377,18 @@
           </a:xfrm>
           <a:prstGeom prst="roundRect">
             <a:avLst>
-              <a:gd name="adj" fmla="val 2712"/>
+              <a:gd name="adj" fmla="val 2034"/>
             </a:avLst>
           </a:prstGeom>
           <a:solidFill>
-            <a:srgbClr val="1D2230"/>
+            <a:srgbClr val="182034"/>
           </a:solidFill>
           <a:ln w="12700">
             <a:solidFill>
-              <a:srgbClr val="1D2230"/>
+              <a:srgbClr val="2A6B62"/>
             </a:solidFill>
             <a:prstDash val="solid"/>
           </a:ln>
-          <a:effectLst>
-            <a:outerShdw sx="100000" sy="100000" kx="0" ky="0" algn="bl" rotWithShape="0" blurRad="177800" dist="38100" dir="5400000">
-              <a:srgbClr val="1A1F2C">
-                <a:alpha val="10000"/>
-              </a:srgbClr>
-            </a:outerShdw>
-          </a:effectLst>
         </p:spPr>
       </p:sp>
       <p:sp>
@@ -7583,7 +8446,7 @@
             <a:avLst/>
           </a:prstGeom>
           <a:solidFill>
-            <a:srgbClr val="63A87B"/>
+            <a:srgbClr val="3FE0C8"/>
           </a:solidFill>
           <a:ln/>
         </p:spPr>
@@ -7667,7 +8530,7 @@
             <a:r>
               <a:rPr lang="en-US" sz="1300" dirty="0">
                 <a:solidFill>
-                  <a:srgbClr val="9DC7B4"/>
+                  <a:srgbClr val="3FE0C8"/>
                 </a:solidFill>
                 <a:latin typeface="Yu Gothic" pitchFamily="34" charset="0"/>
                 <a:ea typeface="Yu Gothic" pitchFamily="34" charset="-122"/>
@@ -7687,7 +8550,7 @@
             <a:r>
               <a:rPr lang="en-US" sz="1300" dirty="0">
                 <a:solidFill>
-                  <a:srgbClr val="9DC7B4"/>
+                  <a:srgbClr val="3FE0C8"/>
                 </a:solidFill>
                 <a:latin typeface="Yu Gothic" pitchFamily="34" charset="0"/>
                 <a:ea typeface="Yu Gothic" pitchFamily="34" charset="-122"/>
@@ -7726,7 +8589,7 @@
             <a:r>
               <a:rPr lang="en-US" sz="1200" i="1" dirty="0">
                 <a:solidFill>
-                  <a:srgbClr val="6E7891"/>
+                  <a:srgbClr val="8794AE"/>
                 </a:solidFill>
                 <a:latin typeface="Yu Gothic" pitchFamily="34" charset="0"/>
                 <a:ea typeface="Yu Gothic" pitchFamily="34" charset="-122"/>
@@ -7765,7 +8628,7 @@
             <a:r>
               <a:rPr lang="en-US" sz="1400" b="1" dirty="0">
                 <a:solidFill>
-                  <a:srgbClr val="E2603C"/>
+                  <a:srgbClr val="3FE0C8"/>
                 </a:solidFill>
                 <a:latin typeface="Yu Gothic" pitchFamily="34" charset="0"/>
                 <a:ea typeface="Yu Gothic" pitchFamily="34" charset="-122"/>
@@ -7791,7 +8654,7 @@
     <p:bg>
       <p:bgPr>
         <a:solidFill>
-          <a:srgbClr val="12151C"/>
+          <a:srgbClr val="0A0D14"/>
         </a:solidFill>
       </p:bgPr>
     </p:bg>
@@ -7817,16 +8680,23 @@
         </p:nvSpPr>
         <p:spPr>
           <a:xfrm>
-            <a:off x="685800" y="548640"/>
-            <a:ext cx="457200" cy="457200"/>
-          </a:xfrm>
-          <a:prstGeom prst="ellipse">
-            <a:avLst/>
-          </a:prstGeom>
-          <a:solidFill>
-            <a:srgbClr val="E2603C"/>
-          </a:solidFill>
-          <a:ln/>
+            <a:off x="685800" y="566928"/>
+            <a:ext cx="566928" cy="402336"/>
+          </a:xfrm>
+          <a:prstGeom prst="roundRect">
+            <a:avLst>
+              <a:gd name="adj" fmla="val 11364"/>
+            </a:avLst>
+          </a:prstGeom>
+          <a:solidFill>
+            <a:srgbClr val="0E2A2A"/>
+          </a:solidFill>
+          <a:ln w="12700">
+            <a:solidFill>
+              <a:srgbClr val="2A6B62"/>
+            </a:solidFill>
+            <a:prstDash val="solid"/>
+          </a:ln>
         </p:spPr>
       </p:sp>
       <p:sp>
@@ -7837,8 +8707,8 @@
         </p:nvSpPr>
         <p:spPr>
           <a:xfrm>
-            <a:off x="685800" y="548640"/>
-            <a:ext cx="457200" cy="457200"/>
+            <a:off x="685800" y="566928"/>
+            <a:ext cx="566928" cy="402336"/>
           </a:xfrm>
           <a:prstGeom prst="rect">
             <a:avLst/>
@@ -7854,17 +8724,17 @@
               <a:buNone/>
             </a:pPr>
             <a:r>
-              <a:rPr lang="en-US" sz="1500" b="1" dirty="0">
-                <a:solidFill>
-                  <a:srgbClr val="FFFFFF"/>
-                </a:solidFill>
-                <a:latin typeface="Yu Gothic" pitchFamily="34" charset="0"/>
-                <a:ea typeface="Yu Gothic" pitchFamily="34" charset="-122"/>
-                <a:cs typeface="Yu Gothic" pitchFamily="34" charset="-120"/>
+              <a:rPr lang="en-US" sz="1400" b="1" dirty="0">
+                <a:solidFill>
+                  <a:srgbClr val="3FE0C8"/>
+                </a:solidFill>
+                <a:latin typeface="Courier New" pitchFamily="34" charset="0"/>
+                <a:ea typeface="Courier New" pitchFamily="34" charset="-122"/>
+                <a:cs typeface="Courier New" pitchFamily="34" charset="-120"/>
               </a:rPr>
               <a:t>03</a:t>
             </a:r>
-            <a:endParaRPr lang="en-US" sz="1500" dirty="0"/>
+            <a:endParaRPr lang="en-US" sz="1400" dirty="0"/>
           </a:p>
         </p:txBody>
       </p:sp>
@@ -7876,8 +8746,8 @@
         </p:nvSpPr>
         <p:spPr>
           <a:xfrm>
-            <a:off x="1307592" y="548640"/>
-            <a:ext cx="7315200" cy="457200"/>
+            <a:off x="1417320" y="566928"/>
+            <a:ext cx="8229600" cy="402336"/>
           </a:xfrm>
           <a:prstGeom prst="rect">
             <a:avLst/>
@@ -7895,7 +8765,7 @@
             <a:r>
               <a:rPr lang="en-US" sz="1300" b="1" spc="150" kern="0" dirty="0">
                 <a:solidFill>
-                  <a:srgbClr val="9AA3B8"/>
+                  <a:srgbClr val="8794AE"/>
                 </a:solidFill>
                 <a:latin typeface="Yu Gothic" pitchFamily="34" charset="0"/>
                 <a:ea typeface="Yu Gothic" pitchFamily="34" charset="-122"/>
@@ -7976,7 +8846,7 @@
             <a:r>
               <a:rPr lang="en-US" sz="1300" b="1" spc="150" kern="0" dirty="0">
                 <a:solidFill>
-                  <a:srgbClr val="9AA3B8"/>
+                  <a:srgbClr val="8794AE"/>
                 </a:solidFill>
                 <a:latin typeface="Yu Gothic" pitchFamily="34" charset="0"/>
                 <a:ea typeface="Yu Gothic" pitchFamily="34" charset="-122"/>
@@ -8001,15 +8871,15 @@
           </a:xfrm>
           <a:prstGeom prst="roundRect">
             <a:avLst>
-              <a:gd name="adj" fmla="val 12000"/>
+              <a:gd name="adj" fmla="val 10000"/>
             </a:avLst>
           </a:prstGeom>
           <a:solidFill>
-            <a:srgbClr val="2C3346"/>
+            <a:srgbClr val="121826"/>
           </a:solidFill>
           <a:ln w="12700">
             <a:solidFill>
-              <a:srgbClr val="3B4459"/>
+              <a:srgbClr val="232C42"/>
             </a:solidFill>
             <a:prstDash val="solid"/>
           </a:ln>
@@ -8042,11 +8912,11 @@
             <a:r>
               <a:rPr lang="en-US" sz="1200" dirty="0">
                 <a:solidFill>
-                  <a:srgbClr val="9AA3B8"/>
-                </a:solidFill>
-                <a:latin typeface="Yu Gothic" pitchFamily="34" charset="0"/>
-                <a:ea typeface="Yu Gothic" pitchFamily="34" charset="-122"/>
-                <a:cs typeface="Yu Gothic" pitchFamily="34" charset="-120"/>
+                  <a:srgbClr val="8794AE"/>
+                </a:solidFill>
+                <a:latin typeface="Courier New" pitchFamily="34" charset="0"/>
+                <a:ea typeface="Courier New" pitchFamily="34" charset="-122"/>
+                <a:cs typeface="Courier New" pitchFamily="34" charset="-120"/>
               </a:rPr>
               <a:t>1</a:t>
             </a:r>
@@ -8067,15 +8937,15 @@
           </a:xfrm>
           <a:prstGeom prst="roundRect">
             <a:avLst>
-              <a:gd name="adj" fmla="val 12000"/>
+              <a:gd name="adj" fmla="val 10000"/>
             </a:avLst>
           </a:prstGeom>
           <a:solidFill>
-            <a:srgbClr val="2C3346"/>
+            <a:srgbClr val="121826"/>
           </a:solidFill>
           <a:ln w="12700">
             <a:solidFill>
-              <a:srgbClr val="3B4459"/>
+              <a:srgbClr val="232C42"/>
             </a:solidFill>
             <a:prstDash val="solid"/>
           </a:ln>
@@ -8108,11 +8978,11 @@
             <a:r>
               <a:rPr lang="en-US" sz="1200" dirty="0">
                 <a:solidFill>
-                  <a:srgbClr val="9AA3B8"/>
-                </a:solidFill>
-                <a:latin typeface="Yu Gothic" pitchFamily="34" charset="0"/>
-                <a:ea typeface="Yu Gothic" pitchFamily="34" charset="-122"/>
-                <a:cs typeface="Yu Gothic" pitchFamily="34" charset="-120"/>
+                  <a:srgbClr val="8794AE"/>
+                </a:solidFill>
+                <a:latin typeface="Courier New" pitchFamily="34" charset="0"/>
+                <a:ea typeface="Courier New" pitchFamily="34" charset="-122"/>
+                <a:cs typeface="Courier New" pitchFamily="34" charset="-120"/>
               </a:rPr>
               <a:t>2</a:t>
             </a:r>
@@ -8133,15 +9003,15 @@
           </a:xfrm>
           <a:prstGeom prst="roundRect">
             <a:avLst>
-              <a:gd name="adj" fmla="val 12000"/>
+              <a:gd name="adj" fmla="val 10000"/>
             </a:avLst>
           </a:prstGeom>
           <a:solidFill>
-            <a:srgbClr val="2C3346"/>
+            <a:srgbClr val="121826"/>
           </a:solidFill>
           <a:ln w="12700">
             <a:solidFill>
-              <a:srgbClr val="3B4459"/>
+              <a:srgbClr val="232C42"/>
             </a:solidFill>
             <a:prstDash val="solid"/>
           </a:ln>
@@ -8174,11 +9044,11 @@
             <a:r>
               <a:rPr lang="en-US" sz="1200" dirty="0">
                 <a:solidFill>
-                  <a:srgbClr val="9AA3B8"/>
-                </a:solidFill>
-                <a:latin typeface="Yu Gothic" pitchFamily="34" charset="0"/>
-                <a:ea typeface="Yu Gothic" pitchFamily="34" charset="-122"/>
-                <a:cs typeface="Yu Gothic" pitchFamily="34" charset="-120"/>
+                  <a:srgbClr val="8794AE"/>
+                </a:solidFill>
+                <a:latin typeface="Courier New" pitchFamily="34" charset="0"/>
+                <a:ea typeface="Courier New" pitchFamily="34" charset="-122"/>
+                <a:cs typeface="Courier New" pitchFamily="34" charset="-120"/>
               </a:rPr>
               <a:t>3</a:t>
             </a:r>
@@ -8199,15 +9069,15 @@
           </a:xfrm>
           <a:prstGeom prst="roundRect">
             <a:avLst>
-              <a:gd name="adj" fmla="val 12000"/>
+              <a:gd name="adj" fmla="val 10000"/>
             </a:avLst>
           </a:prstGeom>
           <a:solidFill>
-            <a:srgbClr val="2C3346"/>
+            <a:srgbClr val="121826"/>
           </a:solidFill>
           <a:ln w="12700">
             <a:solidFill>
-              <a:srgbClr val="3B4459"/>
+              <a:srgbClr val="232C42"/>
             </a:solidFill>
             <a:prstDash val="solid"/>
           </a:ln>
@@ -8240,11 +9110,11 @@
             <a:r>
               <a:rPr lang="en-US" sz="1200" dirty="0">
                 <a:solidFill>
-                  <a:srgbClr val="9AA3B8"/>
-                </a:solidFill>
-                <a:latin typeface="Yu Gothic" pitchFamily="34" charset="0"/>
-                <a:ea typeface="Yu Gothic" pitchFamily="34" charset="-122"/>
-                <a:cs typeface="Yu Gothic" pitchFamily="34" charset="-120"/>
+                  <a:srgbClr val="8794AE"/>
+                </a:solidFill>
+                <a:latin typeface="Courier New" pitchFamily="34" charset="0"/>
+                <a:ea typeface="Courier New" pitchFamily="34" charset="-122"/>
+                <a:cs typeface="Courier New" pitchFamily="34" charset="-120"/>
               </a:rPr>
               <a:t>4</a:t>
             </a:r>
@@ -8265,15 +9135,15 @@
           </a:xfrm>
           <a:prstGeom prst="roundRect">
             <a:avLst>
-              <a:gd name="adj" fmla="val 12000"/>
+              <a:gd name="adj" fmla="val 10000"/>
             </a:avLst>
           </a:prstGeom>
           <a:solidFill>
-            <a:srgbClr val="2C3346"/>
+            <a:srgbClr val="121826"/>
           </a:solidFill>
           <a:ln w="12700">
             <a:solidFill>
-              <a:srgbClr val="3B4459"/>
+              <a:srgbClr val="232C42"/>
             </a:solidFill>
             <a:prstDash val="solid"/>
           </a:ln>
@@ -8306,11 +9176,11 @@
             <a:r>
               <a:rPr lang="en-US" sz="1200" dirty="0">
                 <a:solidFill>
-                  <a:srgbClr val="9AA3B8"/>
-                </a:solidFill>
-                <a:latin typeface="Yu Gothic" pitchFamily="34" charset="0"/>
-                <a:ea typeface="Yu Gothic" pitchFamily="34" charset="-122"/>
-                <a:cs typeface="Yu Gothic" pitchFamily="34" charset="-120"/>
+                  <a:srgbClr val="8794AE"/>
+                </a:solidFill>
+                <a:latin typeface="Courier New" pitchFamily="34" charset="0"/>
+                <a:ea typeface="Courier New" pitchFamily="34" charset="-122"/>
+                <a:cs typeface="Courier New" pitchFamily="34" charset="-120"/>
               </a:rPr>
               <a:t>5</a:t>
             </a:r>
@@ -8345,7 +9215,7 @@
             <a:r>
               <a:rPr lang="en-US" sz="1200" i="1" dirty="0">
                 <a:solidFill>
-                  <a:srgbClr val="6E7891"/>
+                  <a:srgbClr val="8794AE"/>
                 </a:solidFill>
                 <a:latin typeface="Yu Gothic" pitchFamily="34" charset="0"/>
                 <a:ea typeface="Yu Gothic" pitchFamily="34" charset="-122"/>
@@ -8384,7 +9254,7 @@
             <a:r>
               <a:rPr lang="en-US" sz="1300" b="1" spc="150" kern="0" dirty="0">
                 <a:solidFill>
-                  <a:srgbClr val="E2603C"/>
+                  <a:srgbClr val="3FE0C8"/>
                 </a:solidFill>
                 <a:latin typeface="Yu Gothic" pitchFamily="34" charset="0"/>
                 <a:ea typeface="Yu Gothic" pitchFamily="34" charset="-122"/>
@@ -8409,15 +9279,15 @@
           </a:xfrm>
           <a:prstGeom prst="roundRect">
             <a:avLst>
-              <a:gd name="adj" fmla="val 15625"/>
+              <a:gd name="adj" fmla="val 12500"/>
             </a:avLst>
           </a:prstGeom>
           <a:solidFill>
-            <a:srgbClr val="E2603C"/>
+            <a:srgbClr val="3FE0C8"/>
           </a:solidFill>
           <a:ln w="12700">
             <a:solidFill>
-              <a:srgbClr val="E2603C"/>
+              <a:srgbClr val="3FE0C8"/>
             </a:solidFill>
             <a:prstDash val="solid"/>
           </a:ln>
@@ -8450,11 +9320,11 @@
             <a:r>
               <a:rPr lang="en-US" sz="1100" b="1" dirty="0">
                 <a:solidFill>
-                  <a:srgbClr val="FFFFFF"/>
-                </a:solidFill>
-                <a:latin typeface="Yu Gothic" pitchFamily="34" charset="0"/>
-                <a:ea typeface="Yu Gothic" pitchFamily="34" charset="-122"/>
-                <a:cs typeface="Yu Gothic" pitchFamily="34" charset="-120"/>
+                  <a:srgbClr val="07231F"/>
+                </a:solidFill>
+                <a:latin typeface="Courier New" pitchFamily="34" charset="0"/>
+                <a:ea typeface="Courier New" pitchFamily="34" charset="-122"/>
+                <a:cs typeface="Courier New" pitchFamily="34" charset="-120"/>
               </a:rPr>
               <a:t>1</a:t>
             </a:r>
@@ -8475,15 +9345,15 @@
           </a:xfrm>
           <a:prstGeom prst="roundRect">
             <a:avLst>
-              <a:gd name="adj" fmla="val 15625"/>
+              <a:gd name="adj" fmla="val 12500"/>
             </a:avLst>
           </a:prstGeom>
           <a:solidFill>
-            <a:srgbClr val="E2603C"/>
+            <a:srgbClr val="3FE0C8"/>
           </a:solidFill>
           <a:ln w="12700">
             <a:solidFill>
-              <a:srgbClr val="E2603C"/>
+              <a:srgbClr val="3FE0C8"/>
             </a:solidFill>
             <a:prstDash val="solid"/>
           </a:ln>
@@ -8516,11 +9386,11 @@
             <a:r>
               <a:rPr lang="en-US" sz="1100" b="1" dirty="0">
                 <a:solidFill>
-                  <a:srgbClr val="FFFFFF"/>
-                </a:solidFill>
-                <a:latin typeface="Yu Gothic" pitchFamily="34" charset="0"/>
-                <a:ea typeface="Yu Gothic" pitchFamily="34" charset="-122"/>
-                <a:cs typeface="Yu Gothic" pitchFamily="34" charset="-120"/>
+                  <a:srgbClr val="07231F"/>
+                </a:solidFill>
+                <a:latin typeface="Courier New" pitchFamily="34" charset="0"/>
+                <a:ea typeface="Courier New" pitchFamily="34" charset="-122"/>
+                <a:cs typeface="Courier New" pitchFamily="34" charset="-120"/>
               </a:rPr>
               <a:t>2</a:t>
             </a:r>
@@ -8541,15 +9411,15 @@
           </a:xfrm>
           <a:prstGeom prst="roundRect">
             <a:avLst>
-              <a:gd name="adj" fmla="val 15625"/>
+              <a:gd name="adj" fmla="val 12500"/>
             </a:avLst>
           </a:prstGeom>
           <a:solidFill>
-            <a:srgbClr val="E2603C"/>
+            <a:srgbClr val="3FE0C8"/>
           </a:solidFill>
           <a:ln w="12700">
             <a:solidFill>
-              <a:srgbClr val="E2603C"/>
+              <a:srgbClr val="3FE0C8"/>
             </a:solidFill>
             <a:prstDash val="solid"/>
           </a:ln>
@@ -8582,11 +9452,11 @@
             <a:r>
               <a:rPr lang="en-US" sz="1100" b="1" dirty="0">
                 <a:solidFill>
-                  <a:srgbClr val="FFFFFF"/>
-                </a:solidFill>
-                <a:latin typeface="Yu Gothic" pitchFamily="34" charset="0"/>
-                <a:ea typeface="Yu Gothic" pitchFamily="34" charset="-122"/>
-                <a:cs typeface="Yu Gothic" pitchFamily="34" charset="-120"/>
+                  <a:srgbClr val="07231F"/>
+                </a:solidFill>
+                <a:latin typeface="Courier New" pitchFamily="34" charset="0"/>
+                <a:ea typeface="Courier New" pitchFamily="34" charset="-122"/>
+                <a:cs typeface="Courier New" pitchFamily="34" charset="-120"/>
               </a:rPr>
               <a:t>3</a:t>
             </a:r>
@@ -8607,15 +9477,15 @@
           </a:xfrm>
           <a:prstGeom prst="roundRect">
             <a:avLst>
-              <a:gd name="adj" fmla="val 15625"/>
+              <a:gd name="adj" fmla="val 12500"/>
             </a:avLst>
           </a:prstGeom>
           <a:solidFill>
-            <a:srgbClr val="E2603C"/>
+            <a:srgbClr val="3FE0C8"/>
           </a:solidFill>
           <a:ln w="12700">
             <a:solidFill>
-              <a:srgbClr val="E2603C"/>
+              <a:srgbClr val="3FE0C8"/>
             </a:solidFill>
             <a:prstDash val="solid"/>
           </a:ln>
@@ -8648,11 +9518,11 @@
             <a:r>
               <a:rPr lang="en-US" sz="1100" b="1" dirty="0">
                 <a:solidFill>
-                  <a:srgbClr val="FFFFFF"/>
-                </a:solidFill>
-                <a:latin typeface="Yu Gothic" pitchFamily="34" charset="0"/>
-                <a:ea typeface="Yu Gothic" pitchFamily="34" charset="-122"/>
-                <a:cs typeface="Yu Gothic" pitchFamily="34" charset="-120"/>
+                  <a:srgbClr val="07231F"/>
+                </a:solidFill>
+                <a:latin typeface="Courier New" pitchFamily="34" charset="0"/>
+                <a:ea typeface="Courier New" pitchFamily="34" charset="-122"/>
+                <a:cs typeface="Courier New" pitchFamily="34" charset="-120"/>
               </a:rPr>
               <a:t>4</a:t>
             </a:r>
@@ -8673,15 +9543,15 @@
           </a:xfrm>
           <a:prstGeom prst="roundRect">
             <a:avLst>
-              <a:gd name="adj" fmla="val 15625"/>
+              <a:gd name="adj" fmla="val 12500"/>
             </a:avLst>
           </a:prstGeom>
           <a:solidFill>
-            <a:srgbClr val="E2603C"/>
+            <a:srgbClr val="3FE0C8"/>
           </a:solidFill>
           <a:ln w="12700">
             <a:solidFill>
-              <a:srgbClr val="E2603C"/>
+              <a:srgbClr val="3FE0C8"/>
             </a:solidFill>
             <a:prstDash val="solid"/>
           </a:ln>
@@ -8714,11 +9584,11 @@
             <a:r>
               <a:rPr lang="en-US" sz="1100" b="1" dirty="0">
                 <a:solidFill>
-                  <a:srgbClr val="FFFFFF"/>
-                </a:solidFill>
-                <a:latin typeface="Yu Gothic" pitchFamily="34" charset="0"/>
-                <a:ea typeface="Yu Gothic" pitchFamily="34" charset="-122"/>
-                <a:cs typeface="Yu Gothic" pitchFamily="34" charset="-120"/>
+                  <a:srgbClr val="07231F"/>
+                </a:solidFill>
+                <a:latin typeface="Courier New" pitchFamily="34" charset="0"/>
+                <a:ea typeface="Courier New" pitchFamily="34" charset="-122"/>
+                <a:cs typeface="Courier New" pitchFamily="34" charset="-120"/>
               </a:rPr>
               <a:t>5</a:t>
             </a:r>
@@ -8778,15 +9648,15 @@
           </a:xfrm>
           <a:prstGeom prst="roundRect">
             <a:avLst>
-              <a:gd name="adj" fmla="val 2532"/>
+              <a:gd name="adj" fmla="val 1519"/>
             </a:avLst>
           </a:prstGeom>
           <a:solidFill>
-            <a:srgbClr val="1D2230"/>
+            <a:srgbClr val="121826"/>
           </a:solidFill>
           <a:ln w="12700">
             <a:solidFill>
-              <a:srgbClr val="2E3648"/>
+              <a:srgbClr val="3C3470"/>
             </a:solidFill>
             <a:prstDash val="solid"/>
           </a:ln>
@@ -8819,7 +9689,7 @@
             <a:r>
               <a:rPr lang="en-US" sz="1300" b="1" spc="150" kern="0" dirty="0">
                 <a:solidFill>
-                  <a:srgbClr val="E2603C"/>
+                  <a:srgbClr val="8E7BFF"/>
                 </a:solidFill>
                 <a:latin typeface="Yu Gothic" pitchFamily="34" charset="0"/>
                 <a:ea typeface="Yu Gothic" pitchFamily="34" charset="-122"/>
@@ -8861,7 +9731,7 @@
             <a:r>
               <a:rPr lang="en-US" sz="1300" dirty="0">
                 <a:solidFill>
-                  <a:srgbClr val="D7DBE6"/>
+                  <a:srgbClr val="C4CDE0"/>
                 </a:solidFill>
                 <a:latin typeface="Yu Gothic" pitchFamily="34" charset="0"/>
                 <a:ea typeface="Yu Gothic" pitchFamily="34" charset="-122"/>
@@ -8900,7 +9770,7 @@
             <a:r>
               <a:rPr lang="en-US" sz="1300" b="1" spc="150" kern="0" dirty="0">
                 <a:solidFill>
-                  <a:srgbClr val="E2603C"/>
+                  <a:srgbClr val="8E7BFF"/>
                 </a:solidFill>
                 <a:latin typeface="Yu Gothic" pitchFamily="34" charset="0"/>
                 <a:ea typeface="Yu Gothic" pitchFamily="34" charset="-122"/>
@@ -8943,7 +9813,7 @@
             <a:r>
               <a:rPr lang="en-US" sz="1200" dirty="0">
                 <a:solidFill>
-                  <a:srgbClr val="D7DBE6"/>
+                  <a:srgbClr val="C4CDE0"/>
                 </a:solidFill>
                 <a:latin typeface="Yu Gothic" pitchFamily="34" charset="0"/>
                 <a:ea typeface="Yu Gothic" pitchFamily="34" charset="-122"/>
@@ -8964,7 +9834,7 @@
             <a:r>
               <a:rPr lang="en-US" sz="1200" dirty="0">
                 <a:solidFill>
-                  <a:srgbClr val="D7DBE6"/>
+                  <a:srgbClr val="C4CDE0"/>
                 </a:solidFill>
                 <a:latin typeface="Yu Gothic" pitchFamily="34" charset="0"/>
                 <a:ea typeface="Yu Gothic" pitchFamily="34" charset="-122"/>
@@ -8985,7 +9855,7 @@
             <a:r>
               <a:rPr lang="en-US" sz="1200" dirty="0">
                 <a:solidFill>
-                  <a:srgbClr val="D7DBE6"/>
+                  <a:srgbClr val="C4CDE0"/>
                 </a:solidFill>
                 <a:latin typeface="Yu Gothic" pitchFamily="34" charset="0"/>
                 <a:ea typeface="Yu Gothic" pitchFamily="34" charset="-122"/>
@@ -9011,7 +9881,7 @@
     <p:bg>
       <p:bgPr>
         <a:solidFill>
-          <a:srgbClr val="12151C"/>
+          <a:srgbClr val="0A0D14"/>
         </a:solidFill>
       </p:bgPr>
     </p:bg>
@@ -9037,28 +9907,935 @@
         </p:nvSpPr>
         <p:spPr>
           <a:xfrm>
-            <a:off x="685800" y="548640"/>
-            <a:ext cx="457200" cy="457200"/>
+            <a:off x="685800" y="5257800"/>
+            <a:ext cx="41148" cy="41148"/>
           </a:xfrm>
           <a:prstGeom prst="ellipse">
             <a:avLst/>
           </a:prstGeom>
           <a:solidFill>
-            <a:srgbClr val="E2603C"/>
-          </a:solidFill>
-          <a:ln/>
-        </p:spPr>
-      </p:sp>
-      <p:sp>
-        <p:nvSpPr>
-          <p:cNvPr id="3" name="Text 1"/>
-          <p:cNvSpPr/>
-          <p:nvPr/>
-        </p:nvSpPr>
-        <p:spPr>
-          <a:xfrm>
-            <a:off x="685800" y="548640"/>
-            <a:ext cx="457200" cy="457200"/>
+            <a:srgbClr val="27324A"/>
+          </a:solidFill>
+          <a:ln w="12700">
+            <a:solidFill>
+              <a:srgbClr val="27324A"/>
+            </a:solidFill>
+            <a:prstDash val="solid"/>
+          </a:ln>
+        </p:spPr>
+      </p:sp>
+      <p:sp>
+        <p:nvSpPr>
+          <p:cNvPr id="3" name="Shape 1"/>
+          <p:cNvSpPr/>
+          <p:nvPr/>
+        </p:nvSpPr>
+        <p:spPr>
+          <a:xfrm>
+            <a:off x="685800" y="5678424"/>
+            <a:ext cx="41148" cy="41148"/>
+          </a:xfrm>
+          <a:prstGeom prst="ellipse">
+            <a:avLst/>
+          </a:prstGeom>
+          <a:solidFill>
+            <a:srgbClr val="27324A"/>
+          </a:solidFill>
+          <a:ln w="12700">
+            <a:solidFill>
+              <a:srgbClr val="27324A"/>
+            </a:solidFill>
+            <a:prstDash val="solid"/>
+          </a:ln>
+        </p:spPr>
+      </p:sp>
+      <p:sp>
+        <p:nvSpPr>
+          <p:cNvPr id="4" name="Shape 2"/>
+          <p:cNvSpPr/>
+          <p:nvPr/>
+        </p:nvSpPr>
+        <p:spPr>
+          <a:xfrm>
+            <a:off x="685800" y="6099048"/>
+            <a:ext cx="41148" cy="41148"/>
+          </a:xfrm>
+          <a:prstGeom prst="ellipse">
+            <a:avLst/>
+          </a:prstGeom>
+          <a:solidFill>
+            <a:srgbClr val="27324A"/>
+          </a:solidFill>
+          <a:ln w="12700">
+            <a:solidFill>
+              <a:srgbClr val="27324A"/>
+            </a:solidFill>
+            <a:prstDash val="solid"/>
+          </a:ln>
+        </p:spPr>
+      </p:sp>
+      <p:sp>
+        <p:nvSpPr>
+          <p:cNvPr id="5" name="Shape 3"/>
+          <p:cNvSpPr/>
+          <p:nvPr/>
+        </p:nvSpPr>
+        <p:spPr>
+          <a:xfrm>
+            <a:off x="1106424" y="5257800"/>
+            <a:ext cx="41148" cy="41148"/>
+          </a:xfrm>
+          <a:prstGeom prst="ellipse">
+            <a:avLst/>
+          </a:prstGeom>
+          <a:solidFill>
+            <a:srgbClr val="27324A"/>
+          </a:solidFill>
+          <a:ln w="12700">
+            <a:solidFill>
+              <a:srgbClr val="27324A"/>
+            </a:solidFill>
+            <a:prstDash val="solid"/>
+          </a:ln>
+        </p:spPr>
+      </p:sp>
+      <p:sp>
+        <p:nvSpPr>
+          <p:cNvPr id="6" name="Shape 4"/>
+          <p:cNvSpPr/>
+          <p:nvPr/>
+        </p:nvSpPr>
+        <p:spPr>
+          <a:xfrm>
+            <a:off x="1106424" y="5678424"/>
+            <a:ext cx="41148" cy="41148"/>
+          </a:xfrm>
+          <a:prstGeom prst="ellipse">
+            <a:avLst/>
+          </a:prstGeom>
+          <a:solidFill>
+            <a:srgbClr val="27324A"/>
+          </a:solidFill>
+          <a:ln w="12700">
+            <a:solidFill>
+              <a:srgbClr val="27324A"/>
+            </a:solidFill>
+            <a:prstDash val="solid"/>
+          </a:ln>
+        </p:spPr>
+      </p:sp>
+      <p:sp>
+        <p:nvSpPr>
+          <p:cNvPr id="7" name="Shape 5"/>
+          <p:cNvSpPr/>
+          <p:nvPr/>
+        </p:nvSpPr>
+        <p:spPr>
+          <a:xfrm>
+            <a:off x="1106424" y="6099048"/>
+            <a:ext cx="41148" cy="41148"/>
+          </a:xfrm>
+          <a:prstGeom prst="ellipse">
+            <a:avLst/>
+          </a:prstGeom>
+          <a:solidFill>
+            <a:srgbClr val="27324A"/>
+          </a:solidFill>
+          <a:ln w="12700">
+            <a:solidFill>
+              <a:srgbClr val="27324A"/>
+            </a:solidFill>
+            <a:prstDash val="solid"/>
+          </a:ln>
+        </p:spPr>
+      </p:sp>
+      <p:sp>
+        <p:nvSpPr>
+          <p:cNvPr id="8" name="Shape 6"/>
+          <p:cNvSpPr/>
+          <p:nvPr/>
+        </p:nvSpPr>
+        <p:spPr>
+          <a:xfrm>
+            <a:off x="1527048" y="5257800"/>
+            <a:ext cx="41148" cy="41148"/>
+          </a:xfrm>
+          <a:prstGeom prst="ellipse">
+            <a:avLst/>
+          </a:prstGeom>
+          <a:solidFill>
+            <a:srgbClr val="27324A"/>
+          </a:solidFill>
+          <a:ln w="12700">
+            <a:solidFill>
+              <a:srgbClr val="27324A"/>
+            </a:solidFill>
+            <a:prstDash val="solid"/>
+          </a:ln>
+        </p:spPr>
+      </p:sp>
+      <p:sp>
+        <p:nvSpPr>
+          <p:cNvPr id="9" name="Shape 7"/>
+          <p:cNvSpPr/>
+          <p:nvPr/>
+        </p:nvSpPr>
+        <p:spPr>
+          <a:xfrm>
+            <a:off x="1527048" y="5678424"/>
+            <a:ext cx="41148" cy="41148"/>
+          </a:xfrm>
+          <a:prstGeom prst="ellipse">
+            <a:avLst/>
+          </a:prstGeom>
+          <a:solidFill>
+            <a:srgbClr val="27324A"/>
+          </a:solidFill>
+          <a:ln w="12700">
+            <a:solidFill>
+              <a:srgbClr val="27324A"/>
+            </a:solidFill>
+            <a:prstDash val="solid"/>
+          </a:ln>
+        </p:spPr>
+      </p:sp>
+      <p:sp>
+        <p:nvSpPr>
+          <p:cNvPr id="10" name="Shape 8"/>
+          <p:cNvSpPr/>
+          <p:nvPr/>
+        </p:nvSpPr>
+        <p:spPr>
+          <a:xfrm>
+            <a:off x="1527048" y="6099048"/>
+            <a:ext cx="41148" cy="41148"/>
+          </a:xfrm>
+          <a:prstGeom prst="ellipse">
+            <a:avLst/>
+          </a:prstGeom>
+          <a:solidFill>
+            <a:srgbClr val="27324A"/>
+          </a:solidFill>
+          <a:ln w="12700">
+            <a:solidFill>
+              <a:srgbClr val="27324A"/>
+            </a:solidFill>
+            <a:prstDash val="solid"/>
+          </a:ln>
+        </p:spPr>
+      </p:sp>
+      <p:sp>
+        <p:nvSpPr>
+          <p:cNvPr id="11" name="Shape 9"/>
+          <p:cNvSpPr/>
+          <p:nvPr/>
+        </p:nvSpPr>
+        <p:spPr>
+          <a:xfrm>
+            <a:off x="1947672" y="5257800"/>
+            <a:ext cx="41148" cy="41148"/>
+          </a:xfrm>
+          <a:prstGeom prst="ellipse">
+            <a:avLst/>
+          </a:prstGeom>
+          <a:solidFill>
+            <a:srgbClr val="27324A"/>
+          </a:solidFill>
+          <a:ln w="12700">
+            <a:solidFill>
+              <a:srgbClr val="27324A"/>
+            </a:solidFill>
+            <a:prstDash val="solid"/>
+          </a:ln>
+        </p:spPr>
+      </p:sp>
+      <p:sp>
+        <p:nvSpPr>
+          <p:cNvPr id="12" name="Shape 10"/>
+          <p:cNvSpPr/>
+          <p:nvPr/>
+        </p:nvSpPr>
+        <p:spPr>
+          <a:xfrm>
+            <a:off x="1947672" y="5678424"/>
+            <a:ext cx="41148" cy="41148"/>
+          </a:xfrm>
+          <a:prstGeom prst="ellipse">
+            <a:avLst/>
+          </a:prstGeom>
+          <a:solidFill>
+            <a:srgbClr val="27324A"/>
+          </a:solidFill>
+          <a:ln w="12700">
+            <a:solidFill>
+              <a:srgbClr val="27324A"/>
+            </a:solidFill>
+            <a:prstDash val="solid"/>
+          </a:ln>
+        </p:spPr>
+      </p:sp>
+      <p:sp>
+        <p:nvSpPr>
+          <p:cNvPr id="13" name="Shape 11"/>
+          <p:cNvSpPr/>
+          <p:nvPr/>
+        </p:nvSpPr>
+        <p:spPr>
+          <a:xfrm>
+            <a:off x="1947672" y="6099048"/>
+            <a:ext cx="41148" cy="41148"/>
+          </a:xfrm>
+          <a:prstGeom prst="ellipse">
+            <a:avLst/>
+          </a:prstGeom>
+          <a:solidFill>
+            <a:srgbClr val="27324A"/>
+          </a:solidFill>
+          <a:ln w="12700">
+            <a:solidFill>
+              <a:srgbClr val="27324A"/>
+            </a:solidFill>
+            <a:prstDash val="solid"/>
+          </a:ln>
+        </p:spPr>
+      </p:sp>
+      <p:sp>
+        <p:nvSpPr>
+          <p:cNvPr id="14" name="Shape 12"/>
+          <p:cNvSpPr/>
+          <p:nvPr/>
+        </p:nvSpPr>
+        <p:spPr>
+          <a:xfrm>
+            <a:off x="2368296" y="5257800"/>
+            <a:ext cx="41148" cy="41148"/>
+          </a:xfrm>
+          <a:prstGeom prst="ellipse">
+            <a:avLst/>
+          </a:prstGeom>
+          <a:solidFill>
+            <a:srgbClr val="27324A"/>
+          </a:solidFill>
+          <a:ln w="12700">
+            <a:solidFill>
+              <a:srgbClr val="27324A"/>
+            </a:solidFill>
+            <a:prstDash val="solid"/>
+          </a:ln>
+        </p:spPr>
+      </p:sp>
+      <p:sp>
+        <p:nvSpPr>
+          <p:cNvPr id="15" name="Shape 13"/>
+          <p:cNvSpPr/>
+          <p:nvPr/>
+        </p:nvSpPr>
+        <p:spPr>
+          <a:xfrm>
+            <a:off x="2368296" y="5678424"/>
+            <a:ext cx="41148" cy="41148"/>
+          </a:xfrm>
+          <a:prstGeom prst="ellipse">
+            <a:avLst/>
+          </a:prstGeom>
+          <a:solidFill>
+            <a:srgbClr val="27324A"/>
+          </a:solidFill>
+          <a:ln w="12700">
+            <a:solidFill>
+              <a:srgbClr val="27324A"/>
+            </a:solidFill>
+            <a:prstDash val="solid"/>
+          </a:ln>
+        </p:spPr>
+      </p:sp>
+      <p:sp>
+        <p:nvSpPr>
+          <p:cNvPr id="16" name="Shape 14"/>
+          <p:cNvSpPr/>
+          <p:nvPr/>
+        </p:nvSpPr>
+        <p:spPr>
+          <a:xfrm>
+            <a:off x="2368296" y="6099048"/>
+            <a:ext cx="41148" cy="41148"/>
+          </a:xfrm>
+          <a:prstGeom prst="ellipse">
+            <a:avLst/>
+          </a:prstGeom>
+          <a:solidFill>
+            <a:srgbClr val="27324A"/>
+          </a:solidFill>
+          <a:ln w="12700">
+            <a:solidFill>
+              <a:srgbClr val="27324A"/>
+            </a:solidFill>
+            <a:prstDash val="solid"/>
+          </a:ln>
+        </p:spPr>
+      </p:sp>
+      <p:sp>
+        <p:nvSpPr>
+          <p:cNvPr id="17" name="Shape 15"/>
+          <p:cNvSpPr/>
+          <p:nvPr/>
+        </p:nvSpPr>
+        <p:spPr>
+          <a:xfrm>
+            <a:off x="2788920" y="5257800"/>
+            <a:ext cx="41148" cy="41148"/>
+          </a:xfrm>
+          <a:prstGeom prst="ellipse">
+            <a:avLst/>
+          </a:prstGeom>
+          <a:solidFill>
+            <a:srgbClr val="27324A"/>
+          </a:solidFill>
+          <a:ln w="12700">
+            <a:solidFill>
+              <a:srgbClr val="27324A"/>
+            </a:solidFill>
+            <a:prstDash val="solid"/>
+          </a:ln>
+        </p:spPr>
+      </p:sp>
+      <p:sp>
+        <p:nvSpPr>
+          <p:cNvPr id="18" name="Shape 16"/>
+          <p:cNvSpPr/>
+          <p:nvPr/>
+        </p:nvSpPr>
+        <p:spPr>
+          <a:xfrm>
+            <a:off x="2788920" y="5678424"/>
+            <a:ext cx="41148" cy="41148"/>
+          </a:xfrm>
+          <a:prstGeom prst="ellipse">
+            <a:avLst/>
+          </a:prstGeom>
+          <a:solidFill>
+            <a:srgbClr val="27324A"/>
+          </a:solidFill>
+          <a:ln w="12700">
+            <a:solidFill>
+              <a:srgbClr val="27324A"/>
+            </a:solidFill>
+            <a:prstDash val="solid"/>
+          </a:ln>
+        </p:spPr>
+      </p:sp>
+      <p:sp>
+        <p:nvSpPr>
+          <p:cNvPr id="19" name="Shape 17"/>
+          <p:cNvSpPr/>
+          <p:nvPr/>
+        </p:nvSpPr>
+        <p:spPr>
+          <a:xfrm>
+            <a:off x="2788920" y="6099048"/>
+            <a:ext cx="41148" cy="41148"/>
+          </a:xfrm>
+          <a:prstGeom prst="ellipse">
+            <a:avLst/>
+          </a:prstGeom>
+          <a:solidFill>
+            <a:srgbClr val="27324A"/>
+          </a:solidFill>
+          <a:ln w="12700">
+            <a:solidFill>
+              <a:srgbClr val="27324A"/>
+            </a:solidFill>
+            <a:prstDash val="solid"/>
+          </a:ln>
+        </p:spPr>
+      </p:sp>
+      <p:sp>
+        <p:nvSpPr>
+          <p:cNvPr id="20" name="Shape 18"/>
+          <p:cNvSpPr/>
+          <p:nvPr/>
+        </p:nvSpPr>
+        <p:spPr>
+          <a:xfrm>
+            <a:off x="3209544" y="5257800"/>
+            <a:ext cx="41148" cy="41148"/>
+          </a:xfrm>
+          <a:prstGeom prst="ellipse">
+            <a:avLst/>
+          </a:prstGeom>
+          <a:solidFill>
+            <a:srgbClr val="27324A"/>
+          </a:solidFill>
+          <a:ln w="12700">
+            <a:solidFill>
+              <a:srgbClr val="27324A"/>
+            </a:solidFill>
+            <a:prstDash val="solid"/>
+          </a:ln>
+        </p:spPr>
+      </p:sp>
+      <p:sp>
+        <p:nvSpPr>
+          <p:cNvPr id="21" name="Shape 19"/>
+          <p:cNvSpPr/>
+          <p:nvPr/>
+        </p:nvSpPr>
+        <p:spPr>
+          <a:xfrm>
+            <a:off x="3209544" y="5678424"/>
+            <a:ext cx="41148" cy="41148"/>
+          </a:xfrm>
+          <a:prstGeom prst="ellipse">
+            <a:avLst/>
+          </a:prstGeom>
+          <a:solidFill>
+            <a:srgbClr val="27324A"/>
+          </a:solidFill>
+          <a:ln w="12700">
+            <a:solidFill>
+              <a:srgbClr val="27324A"/>
+            </a:solidFill>
+            <a:prstDash val="solid"/>
+          </a:ln>
+        </p:spPr>
+      </p:sp>
+      <p:sp>
+        <p:nvSpPr>
+          <p:cNvPr id="22" name="Shape 20"/>
+          <p:cNvSpPr/>
+          <p:nvPr/>
+        </p:nvSpPr>
+        <p:spPr>
+          <a:xfrm>
+            <a:off x="3209544" y="6099048"/>
+            <a:ext cx="41148" cy="41148"/>
+          </a:xfrm>
+          <a:prstGeom prst="ellipse">
+            <a:avLst/>
+          </a:prstGeom>
+          <a:solidFill>
+            <a:srgbClr val="27324A"/>
+          </a:solidFill>
+          <a:ln w="12700">
+            <a:solidFill>
+              <a:srgbClr val="27324A"/>
+            </a:solidFill>
+            <a:prstDash val="solid"/>
+          </a:ln>
+        </p:spPr>
+      </p:sp>
+      <p:sp>
+        <p:nvSpPr>
+          <p:cNvPr id="23" name="Shape 21"/>
+          <p:cNvSpPr/>
+          <p:nvPr/>
+        </p:nvSpPr>
+        <p:spPr>
+          <a:xfrm>
+            <a:off x="3630168" y="5257800"/>
+            <a:ext cx="41148" cy="41148"/>
+          </a:xfrm>
+          <a:prstGeom prst="ellipse">
+            <a:avLst/>
+          </a:prstGeom>
+          <a:solidFill>
+            <a:srgbClr val="27324A"/>
+          </a:solidFill>
+          <a:ln w="12700">
+            <a:solidFill>
+              <a:srgbClr val="27324A"/>
+            </a:solidFill>
+            <a:prstDash val="solid"/>
+          </a:ln>
+        </p:spPr>
+      </p:sp>
+      <p:sp>
+        <p:nvSpPr>
+          <p:cNvPr id="24" name="Shape 22"/>
+          <p:cNvSpPr/>
+          <p:nvPr/>
+        </p:nvSpPr>
+        <p:spPr>
+          <a:xfrm>
+            <a:off x="3630168" y="5678424"/>
+            <a:ext cx="41148" cy="41148"/>
+          </a:xfrm>
+          <a:prstGeom prst="ellipse">
+            <a:avLst/>
+          </a:prstGeom>
+          <a:solidFill>
+            <a:srgbClr val="27324A"/>
+          </a:solidFill>
+          <a:ln w="12700">
+            <a:solidFill>
+              <a:srgbClr val="27324A"/>
+            </a:solidFill>
+            <a:prstDash val="solid"/>
+          </a:ln>
+        </p:spPr>
+      </p:sp>
+      <p:sp>
+        <p:nvSpPr>
+          <p:cNvPr id="25" name="Shape 23"/>
+          <p:cNvSpPr/>
+          <p:nvPr/>
+        </p:nvSpPr>
+        <p:spPr>
+          <a:xfrm>
+            <a:off x="3630168" y="6099048"/>
+            <a:ext cx="41148" cy="41148"/>
+          </a:xfrm>
+          <a:prstGeom prst="ellipse">
+            <a:avLst/>
+          </a:prstGeom>
+          <a:solidFill>
+            <a:srgbClr val="27324A"/>
+          </a:solidFill>
+          <a:ln w="12700">
+            <a:solidFill>
+              <a:srgbClr val="27324A"/>
+            </a:solidFill>
+            <a:prstDash val="solid"/>
+          </a:ln>
+        </p:spPr>
+      </p:sp>
+      <p:sp>
+        <p:nvSpPr>
+          <p:cNvPr id="26" name="Shape 24"/>
+          <p:cNvSpPr/>
+          <p:nvPr/>
+        </p:nvSpPr>
+        <p:spPr>
+          <a:xfrm>
+            <a:off x="4050792" y="5257800"/>
+            <a:ext cx="41148" cy="41148"/>
+          </a:xfrm>
+          <a:prstGeom prst="ellipse">
+            <a:avLst/>
+          </a:prstGeom>
+          <a:solidFill>
+            <a:srgbClr val="27324A"/>
+          </a:solidFill>
+          <a:ln w="12700">
+            <a:solidFill>
+              <a:srgbClr val="27324A"/>
+            </a:solidFill>
+            <a:prstDash val="solid"/>
+          </a:ln>
+        </p:spPr>
+      </p:sp>
+      <p:sp>
+        <p:nvSpPr>
+          <p:cNvPr id="27" name="Shape 25"/>
+          <p:cNvSpPr/>
+          <p:nvPr/>
+        </p:nvSpPr>
+        <p:spPr>
+          <a:xfrm>
+            <a:off x="4050792" y="5678424"/>
+            <a:ext cx="41148" cy="41148"/>
+          </a:xfrm>
+          <a:prstGeom prst="ellipse">
+            <a:avLst/>
+          </a:prstGeom>
+          <a:solidFill>
+            <a:srgbClr val="27324A"/>
+          </a:solidFill>
+          <a:ln w="12700">
+            <a:solidFill>
+              <a:srgbClr val="27324A"/>
+            </a:solidFill>
+            <a:prstDash val="solid"/>
+          </a:ln>
+        </p:spPr>
+      </p:sp>
+      <p:sp>
+        <p:nvSpPr>
+          <p:cNvPr id="28" name="Shape 26"/>
+          <p:cNvSpPr/>
+          <p:nvPr/>
+        </p:nvSpPr>
+        <p:spPr>
+          <a:xfrm>
+            <a:off x="4050792" y="6099048"/>
+            <a:ext cx="41148" cy="41148"/>
+          </a:xfrm>
+          <a:prstGeom prst="ellipse">
+            <a:avLst/>
+          </a:prstGeom>
+          <a:solidFill>
+            <a:srgbClr val="27324A"/>
+          </a:solidFill>
+          <a:ln w="12700">
+            <a:solidFill>
+              <a:srgbClr val="27324A"/>
+            </a:solidFill>
+            <a:prstDash val="solid"/>
+          </a:ln>
+        </p:spPr>
+      </p:sp>
+      <p:sp>
+        <p:nvSpPr>
+          <p:cNvPr id="29" name="Shape 27"/>
+          <p:cNvSpPr/>
+          <p:nvPr/>
+        </p:nvSpPr>
+        <p:spPr>
+          <a:xfrm>
+            <a:off x="4471416" y="5257800"/>
+            <a:ext cx="41148" cy="41148"/>
+          </a:xfrm>
+          <a:prstGeom prst="ellipse">
+            <a:avLst/>
+          </a:prstGeom>
+          <a:solidFill>
+            <a:srgbClr val="27324A"/>
+          </a:solidFill>
+          <a:ln w="12700">
+            <a:solidFill>
+              <a:srgbClr val="27324A"/>
+            </a:solidFill>
+            <a:prstDash val="solid"/>
+          </a:ln>
+        </p:spPr>
+      </p:sp>
+      <p:sp>
+        <p:nvSpPr>
+          <p:cNvPr id="30" name="Shape 28"/>
+          <p:cNvSpPr/>
+          <p:nvPr/>
+        </p:nvSpPr>
+        <p:spPr>
+          <a:xfrm>
+            <a:off x="4471416" y="5678424"/>
+            <a:ext cx="41148" cy="41148"/>
+          </a:xfrm>
+          <a:prstGeom prst="ellipse">
+            <a:avLst/>
+          </a:prstGeom>
+          <a:solidFill>
+            <a:srgbClr val="27324A"/>
+          </a:solidFill>
+          <a:ln w="12700">
+            <a:solidFill>
+              <a:srgbClr val="27324A"/>
+            </a:solidFill>
+            <a:prstDash val="solid"/>
+          </a:ln>
+        </p:spPr>
+      </p:sp>
+      <p:sp>
+        <p:nvSpPr>
+          <p:cNvPr id="31" name="Shape 29"/>
+          <p:cNvSpPr/>
+          <p:nvPr/>
+        </p:nvSpPr>
+        <p:spPr>
+          <a:xfrm>
+            <a:off x="4471416" y="6099048"/>
+            <a:ext cx="41148" cy="41148"/>
+          </a:xfrm>
+          <a:prstGeom prst="ellipse">
+            <a:avLst/>
+          </a:prstGeom>
+          <a:solidFill>
+            <a:srgbClr val="27324A"/>
+          </a:solidFill>
+          <a:ln w="12700">
+            <a:solidFill>
+              <a:srgbClr val="27324A"/>
+            </a:solidFill>
+            <a:prstDash val="solid"/>
+          </a:ln>
+        </p:spPr>
+      </p:sp>
+      <p:sp>
+        <p:nvSpPr>
+          <p:cNvPr id="32" name="Shape 30"/>
+          <p:cNvSpPr/>
+          <p:nvPr/>
+        </p:nvSpPr>
+        <p:spPr>
+          <a:xfrm>
+            <a:off x="4892040" y="5257800"/>
+            <a:ext cx="41148" cy="41148"/>
+          </a:xfrm>
+          <a:prstGeom prst="ellipse">
+            <a:avLst/>
+          </a:prstGeom>
+          <a:solidFill>
+            <a:srgbClr val="27324A"/>
+          </a:solidFill>
+          <a:ln w="12700">
+            <a:solidFill>
+              <a:srgbClr val="27324A"/>
+            </a:solidFill>
+            <a:prstDash val="solid"/>
+          </a:ln>
+        </p:spPr>
+      </p:sp>
+      <p:sp>
+        <p:nvSpPr>
+          <p:cNvPr id="33" name="Shape 31"/>
+          <p:cNvSpPr/>
+          <p:nvPr/>
+        </p:nvSpPr>
+        <p:spPr>
+          <a:xfrm>
+            <a:off x="4892040" y="5678424"/>
+            <a:ext cx="41148" cy="41148"/>
+          </a:xfrm>
+          <a:prstGeom prst="ellipse">
+            <a:avLst/>
+          </a:prstGeom>
+          <a:solidFill>
+            <a:srgbClr val="27324A"/>
+          </a:solidFill>
+          <a:ln w="12700">
+            <a:solidFill>
+              <a:srgbClr val="27324A"/>
+            </a:solidFill>
+            <a:prstDash val="solid"/>
+          </a:ln>
+        </p:spPr>
+      </p:sp>
+      <p:sp>
+        <p:nvSpPr>
+          <p:cNvPr id="34" name="Shape 32"/>
+          <p:cNvSpPr/>
+          <p:nvPr/>
+        </p:nvSpPr>
+        <p:spPr>
+          <a:xfrm>
+            <a:off x="4892040" y="6099048"/>
+            <a:ext cx="41148" cy="41148"/>
+          </a:xfrm>
+          <a:prstGeom prst="ellipse">
+            <a:avLst/>
+          </a:prstGeom>
+          <a:solidFill>
+            <a:srgbClr val="27324A"/>
+          </a:solidFill>
+          <a:ln w="12700">
+            <a:solidFill>
+              <a:srgbClr val="27324A"/>
+            </a:solidFill>
+            <a:prstDash val="solid"/>
+          </a:ln>
+        </p:spPr>
+      </p:sp>
+      <p:sp>
+        <p:nvSpPr>
+          <p:cNvPr id="35" name="Shape 33"/>
+          <p:cNvSpPr/>
+          <p:nvPr/>
+        </p:nvSpPr>
+        <p:spPr>
+          <a:xfrm>
+            <a:off x="5312664" y="5257800"/>
+            <a:ext cx="41148" cy="41148"/>
+          </a:xfrm>
+          <a:prstGeom prst="ellipse">
+            <a:avLst/>
+          </a:prstGeom>
+          <a:solidFill>
+            <a:srgbClr val="27324A"/>
+          </a:solidFill>
+          <a:ln w="12700">
+            <a:solidFill>
+              <a:srgbClr val="27324A"/>
+            </a:solidFill>
+            <a:prstDash val="solid"/>
+          </a:ln>
+        </p:spPr>
+      </p:sp>
+      <p:sp>
+        <p:nvSpPr>
+          <p:cNvPr id="36" name="Shape 34"/>
+          <p:cNvSpPr/>
+          <p:nvPr/>
+        </p:nvSpPr>
+        <p:spPr>
+          <a:xfrm>
+            <a:off x="5312664" y="5678424"/>
+            <a:ext cx="41148" cy="41148"/>
+          </a:xfrm>
+          <a:prstGeom prst="ellipse">
+            <a:avLst/>
+          </a:prstGeom>
+          <a:solidFill>
+            <a:srgbClr val="27324A"/>
+          </a:solidFill>
+          <a:ln w="12700">
+            <a:solidFill>
+              <a:srgbClr val="27324A"/>
+            </a:solidFill>
+            <a:prstDash val="solid"/>
+          </a:ln>
+        </p:spPr>
+      </p:sp>
+      <p:sp>
+        <p:nvSpPr>
+          <p:cNvPr id="37" name="Shape 35"/>
+          <p:cNvSpPr/>
+          <p:nvPr/>
+        </p:nvSpPr>
+        <p:spPr>
+          <a:xfrm>
+            <a:off x="5312664" y="6099048"/>
+            <a:ext cx="41148" cy="41148"/>
+          </a:xfrm>
+          <a:prstGeom prst="ellipse">
+            <a:avLst/>
+          </a:prstGeom>
+          <a:solidFill>
+            <a:srgbClr val="27324A"/>
+          </a:solidFill>
+          <a:ln w="12700">
+            <a:solidFill>
+              <a:srgbClr val="27324A"/>
+            </a:solidFill>
+            <a:prstDash val="solid"/>
+          </a:ln>
+        </p:spPr>
+      </p:sp>
+      <p:sp>
+        <p:nvSpPr>
+          <p:cNvPr id="38" name="Shape 36"/>
+          <p:cNvSpPr/>
+          <p:nvPr/>
+        </p:nvSpPr>
+        <p:spPr>
+          <a:xfrm>
+            <a:off x="685800" y="566928"/>
+            <a:ext cx="566928" cy="402336"/>
+          </a:xfrm>
+          <a:prstGeom prst="roundRect">
+            <a:avLst>
+              <a:gd name="adj" fmla="val 11364"/>
+            </a:avLst>
+          </a:prstGeom>
+          <a:solidFill>
+            <a:srgbClr val="0E2A2A"/>
+          </a:solidFill>
+          <a:ln w="12700">
+            <a:solidFill>
+              <a:srgbClr val="2A6B62"/>
+            </a:solidFill>
+            <a:prstDash val="solid"/>
+          </a:ln>
+        </p:spPr>
+      </p:sp>
+      <p:sp>
+        <p:nvSpPr>
+          <p:cNvPr id="39" name="Text 37"/>
+          <p:cNvSpPr/>
+          <p:nvPr/>
+        </p:nvSpPr>
+        <p:spPr>
+          <a:xfrm>
+            <a:off x="685800" y="566928"/>
+            <a:ext cx="566928" cy="402336"/>
           </a:xfrm>
           <a:prstGeom prst="rect">
             <a:avLst/>
@@ -9074,30 +10851,30 @@
               <a:buNone/>
             </a:pPr>
             <a:r>
-              <a:rPr lang="en-US" sz="1500" b="1" dirty="0">
-                <a:solidFill>
-                  <a:srgbClr val="FFFFFF"/>
-                </a:solidFill>
-                <a:latin typeface="Yu Gothic" pitchFamily="34" charset="0"/>
-                <a:ea typeface="Yu Gothic" pitchFamily="34" charset="-122"/>
-                <a:cs typeface="Yu Gothic" pitchFamily="34" charset="-120"/>
+              <a:rPr lang="en-US" sz="1400" b="1" dirty="0">
+                <a:solidFill>
+                  <a:srgbClr val="3FE0C8"/>
+                </a:solidFill>
+                <a:latin typeface="Courier New" pitchFamily="34" charset="0"/>
+                <a:ea typeface="Courier New" pitchFamily="34" charset="-122"/>
+                <a:cs typeface="Courier New" pitchFamily="34" charset="-120"/>
               </a:rPr>
               <a:t>04</a:t>
             </a:r>
-            <a:endParaRPr lang="en-US" sz="1500" dirty="0"/>
-          </a:p>
-        </p:txBody>
-      </p:sp>
-      <p:sp>
-        <p:nvSpPr>
-          <p:cNvPr id="4" name="Text 2"/>
-          <p:cNvSpPr/>
-          <p:nvPr/>
-        </p:nvSpPr>
-        <p:spPr>
-          <a:xfrm>
-            <a:off x="1307592" y="548640"/>
-            <a:ext cx="7315200" cy="457200"/>
+            <a:endParaRPr lang="en-US" sz="1400" dirty="0"/>
+          </a:p>
+        </p:txBody>
+      </p:sp>
+      <p:sp>
+        <p:nvSpPr>
+          <p:cNvPr id="40" name="Text 38"/>
+          <p:cNvSpPr/>
+          <p:nvPr/>
+        </p:nvSpPr>
+        <p:spPr>
+          <a:xfrm>
+            <a:off x="1417320" y="566928"/>
+            <a:ext cx="8229600" cy="402336"/>
           </a:xfrm>
           <a:prstGeom prst="rect">
             <a:avLst/>
@@ -9115,7 +10892,7 @@
             <a:r>
               <a:rPr lang="en-US" sz="1300" b="1" spc="150" kern="0" dirty="0">
                 <a:solidFill>
-                  <a:srgbClr val="9AA3B8"/>
+                  <a:srgbClr val="8794AE"/>
                 </a:solidFill>
                 <a:latin typeface="Yu Gothic" pitchFamily="34" charset="0"/>
                 <a:ea typeface="Yu Gothic" pitchFamily="34" charset="-122"/>
@@ -9129,7 +10906,7 @@
       </p:sp>
       <p:sp>
         <p:nvSpPr>
-          <p:cNvPr id="5" name="Text 3"/>
+          <p:cNvPr id="41" name="Text 39"/>
           <p:cNvSpPr/>
           <p:nvPr/>
         </p:nvSpPr>
@@ -9191,7 +10968,7 @@
       </p:sp>
       <p:sp>
         <p:nvSpPr>
-          <p:cNvPr id="6" name="Text 4"/>
+          <p:cNvPr id="42" name="Text 40"/>
           <p:cNvSpPr/>
           <p:nvPr/>
         </p:nvSpPr>
@@ -9219,7 +10996,7 @@
             <a:r>
               <a:rPr lang="en-US" sz="1500" dirty="0">
                 <a:solidFill>
-                  <a:srgbClr val="9AA3B8"/>
+                  <a:srgbClr val="C4CDE0"/>
                 </a:solidFill>
                 <a:latin typeface="Yu Gothic" pitchFamily="34" charset="0"/>
                 <a:ea typeface="Yu Gothic" pitchFamily="34" charset="-122"/>
@@ -9239,7 +11016,7 @@
             <a:r>
               <a:rPr lang="en-US" sz="1500" dirty="0">
                 <a:solidFill>
-                  <a:srgbClr val="9AA3B8"/>
+                  <a:srgbClr val="C4CDE0"/>
                 </a:solidFill>
                 <a:latin typeface="Yu Gothic" pitchFamily="34" charset="0"/>
                 <a:ea typeface="Yu Gothic" pitchFamily="34" charset="-122"/>
@@ -9253,7 +11030,7 @@
       </p:sp>
       <p:sp>
         <p:nvSpPr>
-          <p:cNvPr id="7" name="Shape 5"/>
+          <p:cNvPr id="43" name="Shape 41"/>
           <p:cNvSpPr/>
           <p:nvPr/>
         </p:nvSpPr>
@@ -9264,15 +11041,15 @@
           </a:xfrm>
           <a:prstGeom prst="roundRect">
             <a:avLst>
-              <a:gd name="adj" fmla="val 5714"/>
+              <a:gd name="adj" fmla="val 3429"/>
             </a:avLst>
           </a:prstGeom>
           <a:solidFill>
-            <a:srgbClr val="1D2230"/>
+            <a:srgbClr val="121826"/>
           </a:solidFill>
           <a:ln w="12700">
             <a:solidFill>
-              <a:srgbClr val="2E3648"/>
+              <a:srgbClr val="232C42"/>
             </a:solidFill>
             <a:prstDash val="solid"/>
           </a:ln>
@@ -9280,7 +11057,7 @@
       </p:sp>
       <p:sp>
         <p:nvSpPr>
-          <p:cNvPr id="8" name="Text 6"/>
+          <p:cNvPr id="44" name="Text 42"/>
           <p:cNvSpPr/>
           <p:nvPr/>
         </p:nvSpPr>
@@ -9305,7 +11082,7 @@
             <a:r>
               <a:rPr lang="en-US" sz="1200" b="1" spc="150" kern="0" dirty="0">
                 <a:solidFill>
-                  <a:srgbClr val="6E7891"/>
+                  <a:srgbClr val="8794AE"/>
                 </a:solidFill>
                 <a:latin typeface="Yu Gothic" pitchFamily="34" charset="0"/>
                 <a:ea typeface="Yu Gothic" pitchFamily="34" charset="-122"/>
@@ -9319,7 +11096,7 @@
       </p:sp>
       <p:sp>
         <p:nvSpPr>
-          <p:cNvPr id="9" name="Text 7"/>
+          <p:cNvPr id="45" name="Text 43"/>
           <p:cNvSpPr/>
           <p:nvPr/>
         </p:nvSpPr>
@@ -9344,7 +11121,7 @@
             <a:r>
               <a:rPr lang="en-US" sz="1700" b="1" dirty="0">
                 <a:solidFill>
-                  <a:srgbClr val="D7DBE6"/>
+                  <a:srgbClr val="C4CDE0"/>
                 </a:solidFill>
                 <a:latin typeface="Yu Gothic" pitchFamily="34" charset="0"/>
                 <a:ea typeface="Yu Gothic" pitchFamily="34" charset="-122"/>
@@ -9358,7 +11135,7 @@
       </p:sp>
       <p:sp>
         <p:nvSpPr>
-          <p:cNvPr id="10" name="Text 8"/>
+          <p:cNvPr id="46" name="Text 44"/>
           <p:cNvSpPr/>
           <p:nvPr/>
         </p:nvSpPr>
@@ -9383,7 +11160,7 @@
             <a:r>
               <a:rPr lang="en-US" sz="1250" dirty="0">
                 <a:solidFill>
-                  <a:srgbClr val="6E7891"/>
+                  <a:srgbClr val="8794AE"/>
                 </a:solidFill>
                 <a:latin typeface="Yu Gothic" pitchFamily="34" charset="0"/>
                 <a:ea typeface="Yu Gothic" pitchFamily="34" charset="-122"/>
@@ -9397,7 +11174,7 @@
       </p:sp>
       <p:sp>
         <p:nvSpPr>
-          <p:cNvPr id="11" name="Shape 9"/>
+          <p:cNvPr id="47" name="Shape 45"/>
           <p:cNvSpPr/>
           <p:nvPr/>
         </p:nvSpPr>
@@ -9408,15 +11185,15 @@
           </a:xfrm>
           <a:prstGeom prst="roundRect">
             <a:avLst>
-              <a:gd name="adj" fmla="val 4167"/>
+              <a:gd name="adj" fmla="val 2500"/>
             </a:avLst>
           </a:prstGeom>
           <a:solidFill>
-            <a:srgbClr val="FCEFE9"/>
+            <a:srgbClr val="0E2A2A"/>
           </a:solidFill>
           <a:ln w="12700">
             <a:solidFill>
-              <a:srgbClr val="FCEFE9"/>
+              <a:srgbClr val="2A6B62"/>
             </a:solidFill>
             <a:prstDash val="solid"/>
           </a:ln>
@@ -9424,7 +11201,7 @@
       </p:sp>
       <p:sp>
         <p:nvSpPr>
-          <p:cNvPr id="12" name="Text 10"/>
+          <p:cNvPr id="48" name="Text 46"/>
           <p:cNvSpPr/>
           <p:nvPr/>
         </p:nvSpPr>
@@ -9449,7 +11226,7 @@
             <a:r>
               <a:rPr lang="en-US" sz="1200" b="1" spc="150" kern="0" dirty="0">
                 <a:solidFill>
-                  <a:srgbClr val="E2603C"/>
+                  <a:srgbClr val="3FE0C8"/>
                 </a:solidFill>
                 <a:latin typeface="Yu Gothic" pitchFamily="34" charset="0"/>
                 <a:ea typeface="Yu Gothic" pitchFamily="34" charset="-122"/>
@@ -9463,7 +11240,7 @@
       </p:sp>
       <p:sp>
         <p:nvSpPr>
-          <p:cNvPr id="13" name="Text 11"/>
+          <p:cNvPr id="49" name="Text 47"/>
           <p:cNvSpPr/>
           <p:nvPr/>
         </p:nvSpPr>
@@ -9491,7 +11268,7 @@
             <a:r>
               <a:rPr lang="en-US" sz="1400" b="1" dirty="0">
                 <a:solidFill>
-                  <a:srgbClr val="12151C"/>
+                  <a:srgbClr val="FFFFFF"/>
                 </a:solidFill>
                 <a:latin typeface="Yu Gothic" pitchFamily="34" charset="0"/>
                 <a:ea typeface="Yu Gothic" pitchFamily="34" charset="-122"/>
@@ -9511,7 +11288,7 @@
             <a:r>
               <a:rPr lang="en-US" sz="1400" b="1" dirty="0">
                 <a:solidFill>
-                  <a:srgbClr val="12151C"/>
+                  <a:srgbClr val="FFFFFF"/>
                 </a:solidFill>
                 <a:latin typeface="Yu Gothic" pitchFamily="34" charset="0"/>
                 <a:ea typeface="Yu Gothic" pitchFamily="34" charset="-122"/>
@@ -9531,7 +11308,7 @@
             <a:r>
               <a:rPr lang="en-US" sz="1400" b="1" dirty="0">
                 <a:solidFill>
-                  <a:srgbClr val="12151C"/>
+                  <a:srgbClr val="FFFFFF"/>
                 </a:solidFill>
                 <a:latin typeface="Yu Gothic" pitchFamily="34" charset="0"/>
                 <a:ea typeface="Yu Gothic" pitchFamily="34" charset="-122"/>
@@ -9545,7 +11322,7 @@
       </p:sp>
       <p:sp>
         <p:nvSpPr>
-          <p:cNvPr id="14" name="Text 12"/>
+          <p:cNvPr id="50" name="Text 48"/>
           <p:cNvSpPr/>
           <p:nvPr/>
         </p:nvSpPr>
@@ -9570,7 +11347,7 @@
             <a:r>
               <a:rPr lang="en-US" sz="1250" dirty="0">
                 <a:solidFill>
-                  <a:srgbClr val="39435A"/>
+                  <a:srgbClr val="3FE0C8"/>
                 </a:solidFill>
                 <a:latin typeface="Yu Gothic" pitchFamily="34" charset="0"/>
                 <a:ea typeface="Yu Gothic" pitchFamily="34" charset="-122"/>
@@ -9596,7 +11373,7 @@
     <p:bg>
       <p:bgPr>
         <a:solidFill>
-          <a:srgbClr val="FFFFFF"/>
+          <a:srgbClr val="0A0D14"/>
         </a:solidFill>
       </p:bgPr>
     </p:bg>
@@ -9622,16 +11399,23 @@
         </p:nvSpPr>
         <p:spPr>
           <a:xfrm>
-            <a:off x="685800" y="548640"/>
-            <a:ext cx="457200" cy="457200"/>
-          </a:xfrm>
-          <a:prstGeom prst="ellipse">
-            <a:avLst/>
-          </a:prstGeom>
-          <a:solidFill>
-            <a:srgbClr val="E2603C"/>
-          </a:solidFill>
-          <a:ln/>
+            <a:off x="685800" y="566928"/>
+            <a:ext cx="566928" cy="402336"/>
+          </a:xfrm>
+          <a:prstGeom prst="roundRect">
+            <a:avLst>
+              <a:gd name="adj" fmla="val 11364"/>
+            </a:avLst>
+          </a:prstGeom>
+          <a:solidFill>
+            <a:srgbClr val="0E2A2A"/>
+          </a:solidFill>
+          <a:ln w="12700">
+            <a:solidFill>
+              <a:srgbClr val="2A6B62"/>
+            </a:solidFill>
+            <a:prstDash val="solid"/>
+          </a:ln>
         </p:spPr>
       </p:sp>
       <p:sp>
@@ -9642,8 +11426,8 @@
         </p:nvSpPr>
         <p:spPr>
           <a:xfrm>
-            <a:off x="685800" y="548640"/>
-            <a:ext cx="457200" cy="457200"/>
+            <a:off x="685800" y="566928"/>
+            <a:ext cx="566928" cy="402336"/>
           </a:xfrm>
           <a:prstGeom prst="rect">
             <a:avLst/>
@@ -9659,17 +11443,17 @@
               <a:buNone/>
             </a:pPr>
             <a:r>
-              <a:rPr lang="en-US" sz="1500" b="1" dirty="0">
-                <a:solidFill>
-                  <a:srgbClr val="FFFFFF"/>
-                </a:solidFill>
-                <a:latin typeface="Yu Gothic" pitchFamily="34" charset="0"/>
-                <a:ea typeface="Yu Gothic" pitchFamily="34" charset="-122"/>
-                <a:cs typeface="Yu Gothic" pitchFamily="34" charset="-120"/>
+              <a:rPr lang="en-US" sz="1400" b="1" dirty="0">
+                <a:solidFill>
+                  <a:srgbClr val="3FE0C8"/>
+                </a:solidFill>
+                <a:latin typeface="Courier New" pitchFamily="34" charset="0"/>
+                <a:ea typeface="Courier New" pitchFamily="34" charset="-122"/>
+                <a:cs typeface="Courier New" pitchFamily="34" charset="-120"/>
               </a:rPr>
               <a:t>04</a:t>
             </a:r>
-            <a:endParaRPr lang="en-US" sz="1500" dirty="0"/>
+            <a:endParaRPr lang="en-US" sz="1400" dirty="0"/>
           </a:p>
         </p:txBody>
       </p:sp>
@@ -9681,8 +11465,8 @@
         </p:nvSpPr>
         <p:spPr>
           <a:xfrm>
-            <a:off x="1307592" y="548640"/>
-            <a:ext cx="7315200" cy="457200"/>
+            <a:off x="1417320" y="566928"/>
+            <a:ext cx="8229600" cy="402336"/>
           </a:xfrm>
           <a:prstGeom prst="rect">
             <a:avLst/>
@@ -9700,7 +11484,7 @@
             <a:r>
               <a:rPr lang="en-US" sz="1300" b="1" spc="150" kern="0" dirty="0">
                 <a:solidFill>
-                  <a:srgbClr val="6E7891"/>
+                  <a:srgbClr val="8794AE"/>
                 </a:solidFill>
                 <a:latin typeface="Yu Gothic" pitchFamily="34" charset="0"/>
                 <a:ea typeface="Yu Gothic" pitchFamily="34" charset="-122"/>
@@ -9742,7 +11526,7 @@
             <a:r>
               <a:rPr lang="en-US" sz="3300" b="1" dirty="0">
                 <a:solidFill>
-                  <a:srgbClr val="12151C"/>
+                  <a:srgbClr val="FFFFFF"/>
                 </a:solidFill>
                 <a:latin typeface="Yu Gothic" pitchFamily="34" charset="0"/>
                 <a:ea typeface="Yu Gothic" pitchFamily="34" charset="-122"/>
@@ -9767,15 +11551,15 @@
           </a:xfrm>
           <a:prstGeom prst="roundRect">
             <a:avLst>
-              <a:gd name="adj" fmla="val 3226"/>
+              <a:gd name="adj" fmla="val 1935"/>
             </a:avLst>
           </a:prstGeom>
           <a:solidFill>
-            <a:srgbClr val="F3F4F7"/>
+            <a:srgbClr val="121826"/>
           </a:solidFill>
           <a:ln w="12700">
             <a:solidFill>
-              <a:srgbClr val="E2E5EB"/>
+              <a:srgbClr val="232C42"/>
             </a:solidFill>
             <a:prstDash val="solid"/>
           </a:ln>
@@ -9792,13 +11576,20 @@
             <a:off x="1005840" y="2606040"/>
             <a:ext cx="457200" cy="457200"/>
           </a:xfrm>
-          <a:prstGeom prst="ellipse">
-            <a:avLst/>
-          </a:prstGeom>
-          <a:solidFill>
-            <a:srgbClr val="E2603C"/>
-          </a:solidFill>
-          <a:ln/>
+          <a:prstGeom prst="roundRect">
+            <a:avLst>
+              <a:gd name="adj" fmla="val 10000"/>
+            </a:avLst>
+          </a:prstGeom>
+          <a:solidFill>
+            <a:srgbClr val="0E2A2A"/>
+          </a:solidFill>
+          <a:ln w="12700">
+            <a:solidFill>
+              <a:srgbClr val="2A6B62"/>
+            </a:solidFill>
+            <a:prstDash val="solid"/>
+          </a:ln>
         </p:spPr>
       </p:sp>
       <p:sp>
@@ -9828,11 +11619,11 @@
             <a:r>
               <a:rPr lang="en-US" sz="1400" b="1" dirty="0">
                 <a:solidFill>
-                  <a:srgbClr val="FFFFFF"/>
-                </a:solidFill>
-                <a:latin typeface="Yu Gothic" pitchFamily="34" charset="0"/>
-                <a:ea typeface="Yu Gothic" pitchFamily="34" charset="-122"/>
-                <a:cs typeface="Yu Gothic" pitchFamily="34" charset="-120"/>
+                  <a:srgbClr val="3FE0C8"/>
+                </a:solidFill>
+                <a:latin typeface="Courier New" pitchFamily="34" charset="0"/>
+                <a:ea typeface="Courier New" pitchFamily="34" charset="-122"/>
+                <a:cs typeface="Courier New" pitchFamily="34" charset="-120"/>
               </a:rPr>
               <a:t>1</a:t>
             </a:r>
@@ -9867,7 +11658,7 @@
             <a:r>
               <a:rPr lang="en-US" sz="1700" b="1" dirty="0">
                 <a:solidFill>
-                  <a:srgbClr val="12151C"/>
+                  <a:srgbClr val="FFFFFF"/>
                 </a:solidFill>
                 <a:latin typeface="Yu Gothic" pitchFamily="34" charset="0"/>
                 <a:ea typeface="Yu Gothic" pitchFamily="34" charset="-122"/>
@@ -9909,7 +11700,7 @@
             <a:r>
               <a:rPr lang="en-US" sz="1250" dirty="0">
                 <a:solidFill>
-                  <a:srgbClr val="39435A"/>
+                  <a:srgbClr val="C4CDE0"/>
                 </a:solidFill>
                 <a:latin typeface="Yu Gothic" pitchFamily="34" charset="0"/>
                 <a:ea typeface="Yu Gothic" pitchFamily="34" charset="-122"/>
@@ -9951,7 +11742,7 @@
             <a:r>
               <a:rPr lang="en-US" sz="1250" i="1" dirty="0">
                 <a:solidFill>
-                  <a:srgbClr val="E2603C"/>
+                  <a:srgbClr val="3FE0C8"/>
                 </a:solidFill>
                 <a:latin typeface="Yu Gothic" pitchFamily="34" charset="0"/>
                 <a:ea typeface="Yu Gothic" pitchFamily="34" charset="-122"/>
@@ -9976,15 +11767,15 @@
           </a:xfrm>
           <a:prstGeom prst="roundRect">
             <a:avLst>
-              <a:gd name="adj" fmla="val 3226"/>
+              <a:gd name="adj" fmla="val 1935"/>
             </a:avLst>
           </a:prstGeom>
           <a:solidFill>
-            <a:srgbClr val="F3F4F7"/>
+            <a:srgbClr val="121826"/>
           </a:solidFill>
           <a:ln w="12700">
             <a:solidFill>
-              <a:srgbClr val="E2E5EB"/>
+              <a:srgbClr val="232C42"/>
             </a:solidFill>
             <a:prstDash val="solid"/>
           </a:ln>
@@ -10001,13 +11792,20 @@
             <a:off x="4690872" y="2606040"/>
             <a:ext cx="457200" cy="457200"/>
           </a:xfrm>
-          <a:prstGeom prst="ellipse">
-            <a:avLst/>
-          </a:prstGeom>
-          <a:solidFill>
-            <a:srgbClr val="E2603C"/>
-          </a:solidFill>
-          <a:ln/>
+          <a:prstGeom prst="roundRect">
+            <a:avLst>
+              <a:gd name="adj" fmla="val 10000"/>
+            </a:avLst>
+          </a:prstGeom>
+          <a:solidFill>
+            <a:srgbClr val="0E2A2A"/>
+          </a:solidFill>
+          <a:ln w="12700">
+            <a:solidFill>
+              <a:srgbClr val="2A6B62"/>
+            </a:solidFill>
+            <a:prstDash val="solid"/>
+          </a:ln>
         </p:spPr>
       </p:sp>
       <p:sp>
@@ -10037,11 +11835,11 @@
             <a:r>
               <a:rPr lang="en-US" sz="1400" b="1" dirty="0">
                 <a:solidFill>
-                  <a:srgbClr val="FFFFFF"/>
-                </a:solidFill>
-                <a:latin typeface="Yu Gothic" pitchFamily="34" charset="0"/>
-                <a:ea typeface="Yu Gothic" pitchFamily="34" charset="-122"/>
-                <a:cs typeface="Yu Gothic" pitchFamily="34" charset="-120"/>
+                  <a:srgbClr val="3FE0C8"/>
+                </a:solidFill>
+                <a:latin typeface="Courier New" pitchFamily="34" charset="0"/>
+                <a:ea typeface="Courier New" pitchFamily="34" charset="-122"/>
+                <a:cs typeface="Courier New" pitchFamily="34" charset="-120"/>
               </a:rPr>
               <a:t>2</a:t>
             </a:r>
@@ -10076,7 +11874,7 @@
             <a:r>
               <a:rPr lang="en-US" sz="1700" b="1" dirty="0">
                 <a:solidFill>
-                  <a:srgbClr val="12151C"/>
+                  <a:srgbClr val="FFFFFF"/>
                 </a:solidFill>
                 <a:latin typeface="Yu Gothic" pitchFamily="34" charset="0"/>
                 <a:ea typeface="Yu Gothic" pitchFamily="34" charset="-122"/>
@@ -10118,7 +11916,7 @@
             <a:r>
               <a:rPr lang="en-US" sz="1250" dirty="0">
                 <a:solidFill>
-                  <a:srgbClr val="39435A"/>
+                  <a:srgbClr val="C4CDE0"/>
                 </a:solidFill>
                 <a:latin typeface="Yu Gothic" pitchFamily="34" charset="0"/>
                 <a:ea typeface="Yu Gothic" pitchFamily="34" charset="-122"/>
@@ -10160,7 +11958,7 @@
             <a:r>
               <a:rPr lang="en-US" sz="1250" i="1" dirty="0">
                 <a:solidFill>
-                  <a:srgbClr val="E2603C"/>
+                  <a:srgbClr val="3FE0C8"/>
                 </a:solidFill>
                 <a:latin typeface="Yu Gothic" pitchFamily="34" charset="0"/>
                 <a:ea typeface="Yu Gothic" pitchFamily="34" charset="-122"/>
@@ -10185,15 +11983,15 @@
           </a:xfrm>
           <a:prstGeom prst="roundRect">
             <a:avLst>
-              <a:gd name="adj" fmla="val 3226"/>
+              <a:gd name="adj" fmla="val 1935"/>
             </a:avLst>
           </a:prstGeom>
           <a:solidFill>
-            <a:srgbClr val="F3F4F7"/>
+            <a:srgbClr val="121826"/>
           </a:solidFill>
           <a:ln w="12700">
             <a:solidFill>
-              <a:srgbClr val="E2E5EB"/>
+              <a:srgbClr val="232C42"/>
             </a:solidFill>
             <a:prstDash val="solid"/>
           </a:ln>
@@ -10210,13 +12008,20 @@
             <a:off x="8375904" y="2606040"/>
             <a:ext cx="457200" cy="457200"/>
           </a:xfrm>
-          <a:prstGeom prst="ellipse">
-            <a:avLst/>
-          </a:prstGeom>
-          <a:solidFill>
-            <a:srgbClr val="E2603C"/>
-          </a:solidFill>
-          <a:ln/>
+          <a:prstGeom prst="roundRect">
+            <a:avLst>
+              <a:gd name="adj" fmla="val 10000"/>
+            </a:avLst>
+          </a:prstGeom>
+          <a:solidFill>
+            <a:srgbClr val="0E2A2A"/>
+          </a:solidFill>
+          <a:ln w="12700">
+            <a:solidFill>
+              <a:srgbClr val="2A6B62"/>
+            </a:solidFill>
+            <a:prstDash val="solid"/>
+          </a:ln>
         </p:spPr>
       </p:sp>
       <p:sp>
@@ -10246,11 +12051,11 @@
             <a:r>
               <a:rPr lang="en-US" sz="1400" b="1" dirty="0">
                 <a:solidFill>
-                  <a:srgbClr val="FFFFFF"/>
-                </a:solidFill>
-                <a:latin typeface="Yu Gothic" pitchFamily="34" charset="0"/>
-                <a:ea typeface="Yu Gothic" pitchFamily="34" charset="-122"/>
-                <a:cs typeface="Yu Gothic" pitchFamily="34" charset="-120"/>
+                  <a:srgbClr val="3FE0C8"/>
+                </a:solidFill>
+                <a:latin typeface="Courier New" pitchFamily="34" charset="0"/>
+                <a:ea typeface="Courier New" pitchFamily="34" charset="-122"/>
+                <a:cs typeface="Courier New" pitchFamily="34" charset="-120"/>
               </a:rPr>
               <a:t>3</a:t>
             </a:r>
@@ -10285,7 +12090,7 @@
             <a:r>
               <a:rPr lang="en-US" sz="1700" b="1" dirty="0">
                 <a:solidFill>
-                  <a:srgbClr val="12151C"/>
+                  <a:srgbClr val="FFFFFF"/>
                 </a:solidFill>
                 <a:latin typeface="Yu Gothic" pitchFamily="34" charset="0"/>
                 <a:ea typeface="Yu Gothic" pitchFamily="34" charset="-122"/>
@@ -10327,7 +12132,7 @@
             <a:r>
               <a:rPr lang="en-US" sz="1250" dirty="0">
                 <a:solidFill>
-                  <a:srgbClr val="39435A"/>
+                  <a:srgbClr val="C4CDE0"/>
                 </a:solidFill>
                 <a:latin typeface="Yu Gothic" pitchFamily="34" charset="0"/>
                 <a:ea typeface="Yu Gothic" pitchFamily="34" charset="-122"/>
@@ -10369,7 +12174,7 @@
             <a:r>
               <a:rPr lang="en-US" sz="1250" i="1" dirty="0">
                 <a:solidFill>
-                  <a:srgbClr val="E2603C"/>
+                  <a:srgbClr val="3FE0C8"/>
                 </a:solidFill>
                 <a:latin typeface="Yu Gothic" pitchFamily="34" charset="0"/>
                 <a:ea typeface="Yu Gothic" pitchFamily="34" charset="-122"/>
@@ -10408,7 +12213,7 @@
             <a:r>
               <a:rPr lang="en-US" sz="1500" b="1" dirty="0">
                 <a:solidFill>
-                  <a:srgbClr val="E2603C"/>
+                  <a:srgbClr val="3FE0C8"/>
                 </a:solidFill>
                 <a:latin typeface="Yu Gothic" pitchFamily="34" charset="0"/>
                 <a:ea typeface="Yu Gothic" pitchFamily="34" charset="-122"/>
@@ -10434,7 +12239,7 @@
     <p:bg>
       <p:bgPr>
         <a:solidFill>
-          <a:srgbClr val="FFFFFF"/>
+          <a:srgbClr val="0A0D14"/>
         </a:solidFill>
       </p:bgPr>
     </p:bg>
@@ -10460,16 +12265,23 @@
         </p:nvSpPr>
         <p:spPr>
           <a:xfrm>
-            <a:off x="685800" y="548640"/>
-            <a:ext cx="457200" cy="457200"/>
-          </a:xfrm>
-          <a:prstGeom prst="ellipse">
-            <a:avLst/>
-          </a:prstGeom>
-          <a:solidFill>
-            <a:srgbClr val="E2603C"/>
-          </a:solidFill>
-          <a:ln/>
+            <a:off x="685800" y="566928"/>
+            <a:ext cx="566928" cy="402336"/>
+          </a:xfrm>
+          <a:prstGeom prst="roundRect">
+            <a:avLst>
+              <a:gd name="adj" fmla="val 11364"/>
+            </a:avLst>
+          </a:prstGeom>
+          <a:solidFill>
+            <a:srgbClr val="0E2A2A"/>
+          </a:solidFill>
+          <a:ln w="12700">
+            <a:solidFill>
+              <a:srgbClr val="2A6B62"/>
+            </a:solidFill>
+            <a:prstDash val="solid"/>
+          </a:ln>
         </p:spPr>
       </p:sp>
       <p:sp>
@@ -10480,8 +12292,8 @@
         </p:nvSpPr>
         <p:spPr>
           <a:xfrm>
-            <a:off x="685800" y="548640"/>
-            <a:ext cx="457200" cy="457200"/>
+            <a:off x="685800" y="566928"/>
+            <a:ext cx="566928" cy="402336"/>
           </a:xfrm>
           <a:prstGeom prst="rect">
             <a:avLst/>
@@ -10497,17 +12309,17 @@
               <a:buNone/>
             </a:pPr>
             <a:r>
-              <a:rPr lang="en-US" sz="1500" b="1" dirty="0">
-                <a:solidFill>
-                  <a:srgbClr val="FFFFFF"/>
-                </a:solidFill>
-                <a:latin typeface="Yu Gothic" pitchFamily="34" charset="0"/>
-                <a:ea typeface="Yu Gothic" pitchFamily="34" charset="-122"/>
-                <a:cs typeface="Yu Gothic" pitchFamily="34" charset="-120"/>
+              <a:rPr lang="en-US" sz="1400" b="1" dirty="0">
+                <a:solidFill>
+                  <a:srgbClr val="3FE0C8"/>
+                </a:solidFill>
+                <a:latin typeface="Courier New" pitchFamily="34" charset="0"/>
+                <a:ea typeface="Courier New" pitchFamily="34" charset="-122"/>
+                <a:cs typeface="Courier New" pitchFamily="34" charset="-120"/>
               </a:rPr>
               <a:t>05</a:t>
             </a:r>
-            <a:endParaRPr lang="en-US" sz="1500" dirty="0"/>
+            <a:endParaRPr lang="en-US" sz="1400" dirty="0"/>
           </a:p>
         </p:txBody>
       </p:sp>
@@ -10519,8 +12331,8 @@
         </p:nvSpPr>
         <p:spPr>
           <a:xfrm>
-            <a:off x="1307592" y="548640"/>
-            <a:ext cx="7315200" cy="457200"/>
+            <a:off x="1417320" y="566928"/>
+            <a:ext cx="8229600" cy="402336"/>
           </a:xfrm>
           <a:prstGeom prst="rect">
             <a:avLst/>
@@ -10538,7 +12350,7 @@
             <a:r>
               <a:rPr lang="en-US" sz="1300" b="1" spc="150" kern="0" dirty="0">
                 <a:solidFill>
-                  <a:srgbClr val="6E7891"/>
+                  <a:srgbClr val="8794AE"/>
                 </a:solidFill>
                 <a:latin typeface="Yu Gothic" pitchFamily="34" charset="0"/>
                 <a:ea typeface="Yu Gothic" pitchFamily="34" charset="-122"/>
@@ -10580,7 +12392,7 @@
             <a:r>
               <a:rPr lang="en-US" sz="3300" b="1" dirty="0">
                 <a:solidFill>
-                  <a:srgbClr val="12151C"/>
+                  <a:srgbClr val="FFFFFF"/>
                 </a:solidFill>
                 <a:latin typeface="Yu Gothic" pitchFamily="34" charset="0"/>
                 <a:ea typeface="Yu Gothic" pitchFamily="34" charset="-122"/>
@@ -10605,15 +12417,15 @@
           </a:xfrm>
           <a:prstGeom prst="roundRect">
             <a:avLst>
-              <a:gd name="adj" fmla="val 3922"/>
+              <a:gd name="adj" fmla="val 2353"/>
             </a:avLst>
           </a:prstGeom>
           <a:solidFill>
-            <a:srgbClr val="F3F4F7"/>
+            <a:srgbClr val="121826"/>
           </a:solidFill>
           <a:ln w="12700">
             <a:solidFill>
-              <a:srgbClr val="E2E5EB"/>
+              <a:srgbClr val="232C42"/>
             </a:solidFill>
             <a:prstDash val="solid"/>
           </a:ln>
@@ -10646,11 +12458,11 @@
             <a:r>
               <a:rPr lang="en-US" sz="1900" b="1" dirty="0">
                 <a:solidFill>
-                  <a:srgbClr val="12151C"/>
-                </a:solidFill>
-                <a:latin typeface="Yu Gothic" pitchFamily="34" charset="0"/>
-                <a:ea typeface="Yu Gothic" pitchFamily="34" charset="-122"/>
-                <a:cs typeface="Yu Gothic" pitchFamily="34" charset="-120"/>
+                  <a:srgbClr val="FFFFFF"/>
+                </a:solidFill>
+                <a:latin typeface="Courier New" pitchFamily="34" charset="0"/>
+                <a:ea typeface="Courier New" pitchFamily="34" charset="-122"/>
+                <a:cs typeface="Courier New" pitchFamily="34" charset="-120"/>
               </a:rPr>
               <a:t>CLAUDE.md</a:t>
             </a:r>
@@ -10685,7 +12497,7 @@
             <a:r>
               <a:rPr lang="en-US" sz="1300" b="1" dirty="0">
                 <a:solidFill>
-                  <a:srgbClr val="6E7891"/>
+                  <a:srgbClr val="8794AE"/>
                 </a:solidFill>
                 <a:latin typeface="Yu Gothic" pitchFamily="34" charset="0"/>
                 <a:ea typeface="Yu Gothic" pitchFamily="34" charset="-122"/>
@@ -10727,7 +12539,7 @@
             <a:r>
               <a:rPr lang="en-US" sz="1300" dirty="0">
                 <a:solidFill>
-                  <a:srgbClr val="39435A"/>
+                  <a:srgbClr val="C4CDE0"/>
                 </a:solidFill>
                 <a:latin typeface="Yu Gothic" pitchFamily="34" charset="0"/>
                 <a:ea typeface="Yu Gothic" pitchFamily="34" charset="-122"/>
@@ -10752,15 +12564,15 @@
           </a:xfrm>
           <a:prstGeom prst="roundRect">
             <a:avLst>
-              <a:gd name="adj" fmla="val 3922"/>
+              <a:gd name="adj" fmla="val 2353"/>
             </a:avLst>
           </a:prstGeom>
           <a:solidFill>
-            <a:srgbClr val="FCEFE9"/>
+            <a:srgbClr val="0E2A2A"/>
           </a:solidFill>
           <a:ln w="12700">
             <a:solidFill>
-              <a:srgbClr val="F0C9B8"/>
+              <a:srgbClr val="2A6B62"/>
             </a:solidFill>
             <a:prstDash val="solid"/>
           </a:ln>
@@ -10793,7 +12605,7 @@
             <a:r>
               <a:rPr lang="en-US" sz="1900" b="1" dirty="0">
                 <a:solidFill>
-                  <a:srgbClr val="12151C"/>
+                  <a:srgbClr val="FFFFFF"/>
                 </a:solidFill>
                 <a:latin typeface="Yu Gothic" pitchFamily="34" charset="0"/>
                 <a:ea typeface="Yu Gothic" pitchFamily="34" charset="-122"/>
@@ -10832,7 +12644,7 @@
             <a:r>
               <a:rPr lang="en-US" sz="1300" b="1" dirty="0">
                 <a:solidFill>
-                  <a:srgbClr val="E2603C"/>
+                  <a:srgbClr val="3FE0C8"/>
                 </a:solidFill>
                 <a:latin typeface="Yu Gothic" pitchFamily="34" charset="0"/>
                 <a:ea typeface="Yu Gothic" pitchFamily="34" charset="-122"/>
@@ -10874,7 +12686,7 @@
             <a:r>
               <a:rPr lang="en-US" sz="1300" dirty="0">
                 <a:solidFill>
-                  <a:srgbClr val="1D2230"/>
+                  <a:srgbClr val="FFFFFF"/>
                 </a:solidFill>
                 <a:latin typeface="Yu Gothic" pitchFamily="34" charset="0"/>
                 <a:ea typeface="Yu Gothic" pitchFamily="34" charset="-122"/>
@@ -10899,15 +12711,15 @@
           </a:xfrm>
           <a:prstGeom prst="roundRect">
             <a:avLst>
-              <a:gd name="adj" fmla="val 7143"/>
+              <a:gd name="adj" fmla="val 4286"/>
             </a:avLst>
           </a:prstGeom>
           <a:solidFill>
-            <a:srgbClr val="12151C"/>
+            <a:srgbClr val="1A1733"/>
           </a:solidFill>
           <a:ln w="12700">
             <a:solidFill>
-              <a:srgbClr val="12151C"/>
+              <a:srgbClr val="3C3470"/>
             </a:solidFill>
             <a:prstDash val="solid"/>
           </a:ln>
@@ -10979,7 +12791,7 @@
             <a:r>
               <a:rPr lang="en-US" sz="1300" dirty="0">
                 <a:solidFill>
-                  <a:srgbClr val="9AA3B8"/>
+                  <a:srgbClr val="C4CDE0"/>
                 </a:solidFill>
                 <a:latin typeface="Yu Gothic" pitchFamily="34" charset="0"/>
                 <a:ea typeface="Yu Gothic" pitchFamily="34" charset="-122"/>
@@ -11021,7 +12833,7 @@
             <a:r>
               <a:rPr lang="en-US" sz="1600" b="1" dirty="0">
                 <a:solidFill>
-                  <a:srgbClr val="E2603C"/>
+                  <a:srgbClr val="8E7BFF"/>
                 </a:solidFill>
                 <a:latin typeface="Yu Gothic" pitchFamily="34" charset="0"/>
                 <a:ea typeface="Yu Gothic" pitchFamily="34" charset="-122"/>
@@ -11041,7 +12853,7 @@
             <a:r>
               <a:rPr lang="en-US" sz="1600" b="1" dirty="0">
                 <a:solidFill>
-                  <a:srgbClr val="E2603C"/>
+                  <a:srgbClr val="8E7BFF"/>
                 </a:solidFill>
                 <a:latin typeface="Yu Gothic" pitchFamily="34" charset="0"/>
                 <a:ea typeface="Yu Gothic" pitchFamily="34" charset="-122"/>
